--- a/projects/selfintroduction/template.pptx
+++ b/projects/selfintroduction/template.pptx
@@ -2,10 +2,11 @@
 <file path=ppt/presentation.xml><?xml version="1.0" encoding="utf-8"?>
 <p:presentation xmlns:a="http://schemas.openxmlformats.org/drawingml/2006/main" xmlns:r="http://schemas.openxmlformats.org/officeDocument/2006/relationships" xmlns:p="http://schemas.openxmlformats.org/presentationml/2006/main" autoCompressPictures="0">
   <p:sldMasterIdLst>
-    <p:sldMasterId id="2147483648" r:id="rId1"/>
+    <p:sldMasterId id="2147483660" r:id="rId1"/>
   </p:sldMasterIdLst>
   <p:sldIdLst>
     <p:sldId id="256" r:id="rId2"/>
+    <p:sldId id="257" r:id="rId3"/>
   </p:sldIdLst>
   <p:sldSz cx="12192000" cy="6858000"/>
   <p:notesSz cx="6858000" cy="9144000"/>
@@ -104,11 +105,16 @@
       </a:defRPr>
     </a:lvl9pPr>
   </p:defaultTextStyle>
+  <p:extLst>
+    <p:ext uri="{EFAFB233-063F-42B5-8137-9DF3F51BA10A}">
+      <p15:sldGuideLst xmlns:p15="http://schemas.microsoft.com/office/powerpoint/2012/main"/>
+    </p:ext>
+  </p:extLst>
 </p:presentation>
 </file>
 
 <file path=ppt/slideLayouts/slideLayout1.xml><?xml version="1.0" encoding="utf-8"?>
-<p:sldLayout xmlns:a="http://schemas.openxmlformats.org/drawingml/2006/main" xmlns:r="http://schemas.openxmlformats.org/officeDocument/2006/relationships" xmlns:p="http://schemas.openxmlformats.org/presentationml/2006/main" type="title" preserve="1">
+<p:sldLayout xmlns:a="http://schemas.openxmlformats.org/drawingml/2006/main" xmlns:r="http://schemas.openxmlformats.org/officeDocument/2006/relationships" xmlns:p="http://schemas.openxmlformats.org/presentationml/2006/main" showMasterSp="0" type="title" preserve="1">
   <p:cSld name="Title Slide">
     <p:spTree>
       <p:nvGrpSpPr>
@@ -136,17 +142,19 @@
         </p:nvSpPr>
         <p:spPr>
           <a:xfrm>
-            <a:off x="2417779" y="802298"/>
-            <a:ext cx="8637073" cy="2541431"/>
+            <a:off x="684212" y="685799"/>
+            <a:ext cx="8001000" cy="2971801"/>
           </a:xfrm>
         </p:spPr>
         <p:txBody>
-          <a:bodyPr bIns="0" anchor="b">
+          <a:bodyPr anchor="b">
             <a:normAutofit/>
           </a:bodyPr>
           <a:lstStyle>
             <a:lvl1pPr algn="l">
-              <a:defRPr sz="6600"/>
+              <a:defRPr sz="4800">
+                <a:effectLst/>
+              </a:defRPr>
             </a:lvl1pPr>
           </a:lstStyle>
           <a:p>
@@ -170,54 +178,104 @@
         </p:nvSpPr>
         <p:spPr>
           <a:xfrm>
-            <a:off x="2417780" y="3531204"/>
-            <a:ext cx="8637072" cy="977621"/>
+            <a:off x="684212" y="3843867"/>
+            <a:ext cx="6400800" cy="1947333"/>
           </a:xfrm>
         </p:spPr>
         <p:txBody>
-          <a:bodyPr tIns="91440" bIns="91440">
+          <a:bodyPr anchor="t">
             <a:normAutofit/>
           </a:bodyPr>
           <a:lstStyle>
             <a:lvl1pPr marL="0" indent="0" algn="l">
               <a:buNone/>
-              <a:defRPr sz="1800" b="0" cap="all" baseline="0">
-                <a:solidFill>
-                  <a:schemeClr val="tx1"/>
+              <a:defRPr sz="2100">
+                <a:solidFill>
+                  <a:schemeClr val="bg2">
+                    <a:lumMod val="75000"/>
+                  </a:schemeClr>
                 </a:solidFill>
               </a:defRPr>
             </a:lvl1pPr>
             <a:lvl2pPr marL="457200" indent="0" algn="ctr">
               <a:buNone/>
-              <a:defRPr sz="1800"/>
+              <a:defRPr>
+                <a:solidFill>
+                  <a:schemeClr val="tx1">
+                    <a:tint val="75000"/>
+                  </a:schemeClr>
+                </a:solidFill>
+              </a:defRPr>
             </a:lvl2pPr>
             <a:lvl3pPr marL="914400" indent="0" algn="ctr">
               <a:buNone/>
-              <a:defRPr sz="1800"/>
+              <a:defRPr>
+                <a:solidFill>
+                  <a:schemeClr val="tx1">
+                    <a:tint val="75000"/>
+                  </a:schemeClr>
+                </a:solidFill>
+              </a:defRPr>
             </a:lvl3pPr>
             <a:lvl4pPr marL="1371600" indent="0" algn="ctr">
               <a:buNone/>
-              <a:defRPr sz="1600"/>
+              <a:defRPr>
+                <a:solidFill>
+                  <a:schemeClr val="tx1">
+                    <a:tint val="75000"/>
+                  </a:schemeClr>
+                </a:solidFill>
+              </a:defRPr>
             </a:lvl4pPr>
             <a:lvl5pPr marL="1828800" indent="0" algn="ctr">
               <a:buNone/>
-              <a:defRPr sz="1600"/>
+              <a:defRPr>
+                <a:solidFill>
+                  <a:schemeClr val="tx1">
+                    <a:tint val="75000"/>
+                  </a:schemeClr>
+                </a:solidFill>
+              </a:defRPr>
             </a:lvl5pPr>
             <a:lvl6pPr marL="2286000" indent="0" algn="ctr">
               <a:buNone/>
-              <a:defRPr sz="1600"/>
+              <a:defRPr>
+                <a:solidFill>
+                  <a:schemeClr val="tx1">
+                    <a:tint val="75000"/>
+                  </a:schemeClr>
+                </a:solidFill>
+              </a:defRPr>
             </a:lvl6pPr>
             <a:lvl7pPr marL="2743200" indent="0" algn="ctr">
               <a:buNone/>
-              <a:defRPr sz="1600"/>
+              <a:defRPr>
+                <a:solidFill>
+                  <a:schemeClr val="tx1">
+                    <a:tint val="75000"/>
+                  </a:schemeClr>
+                </a:solidFill>
+              </a:defRPr>
             </a:lvl7pPr>
             <a:lvl8pPr marL="3200400" indent="0" algn="ctr">
               <a:buNone/>
-              <a:defRPr sz="1600"/>
+              <a:defRPr>
+                <a:solidFill>
+                  <a:schemeClr val="tx1">
+                    <a:tint val="75000"/>
+                  </a:schemeClr>
+                </a:solidFill>
+              </a:defRPr>
             </a:lvl8pPr>
             <a:lvl9pPr marL="3657600" indent="0" algn="ctr">
               <a:buNone/>
-              <a:defRPr sz="1600"/>
+              <a:defRPr>
+                <a:solidFill>
+                  <a:schemeClr val="tx1">
+                    <a:tint val="75000"/>
+                  </a:schemeClr>
+                </a:solidFill>
+              </a:defRPr>
             </a:lvl9pPr>
           </a:lstStyle>
           <a:p>
@@ -245,8 +303,9 @@
           <a:lstStyle/>
           <a:p>
             <a:fld id="{48A87A34-81AB-432B-8DAE-1953F412C126}" type="datetimeFigureOut">
-              <a:rPr lang="en-US" dirty="0"/>
-              <a:t>3/26/26</a:t>
+              <a:rPr lang="en-US" smtClean="0"/>
+              <a:pPr/>
+              <a:t>3/27/2026</a:t>
             </a:fld>
             <a:endParaRPr lang="en-US" dirty="0"/>
           </a:p>
@@ -262,12 +321,7 @@
             <p:ph type="ftr" sz="quarter" idx="11"/>
           </p:nvPr>
         </p:nvSpPr>
-        <p:spPr>
-          <a:xfrm>
-            <a:off x="2416500" y="329307"/>
-            <a:ext cx="4973915" cy="309201"/>
-          </a:xfrm>
-        </p:spPr>
+        <p:spPr/>
         <p:txBody>
           <a:bodyPr/>
           <a:lstStyle/>
@@ -286,18 +340,14 @@
             <p:ph type="sldNum" sz="quarter" idx="12"/>
           </p:nvPr>
         </p:nvSpPr>
-        <p:spPr>
-          <a:xfrm>
-            <a:off x="1437664" y="798973"/>
-            <a:ext cx="811019" cy="503578"/>
-          </a:xfrm>
-        </p:spPr>
+        <p:spPr/>
         <p:txBody>
           <a:bodyPr/>
           <a:lstStyle/>
           <a:p>
             <a:fld id="{6D22F896-40B5-4ADD-8801-0D06FADFA095}" type="slidenum">
-              <a:rPr lang="en-US" dirty="0"/>
+              <a:rPr lang="en-US" smtClean="0"/>
+              <a:pPr/>
               <a:t>‹#›</a:t>
             </a:fld>
             <a:endParaRPr lang="en-US" dirty="0"/>
@@ -306,28 +356,172 @@
       </p:sp>
       <p:cxnSp>
         <p:nvCxnSpPr>
-          <p:cNvPr id="15" name="Straight Connector 14"/>
+          <p:cNvPr id="16" name="Straight Connector 15"/>
           <p:cNvCxnSpPr/>
           <p:nvPr/>
         </p:nvCxnSpPr>
         <p:spPr>
-          <a:xfrm>
-            <a:off x="2417780" y="3528542"/>
-            <a:ext cx="8637072" cy="0"/>
+          <a:xfrm flipH="1">
+            <a:off x="8228012" y="8467"/>
+            <a:ext cx="3810000" cy="3810000"/>
           </a:xfrm>
           <a:prstGeom prst="line">
             <a:avLst/>
           </a:prstGeom>
-          <a:ln w="31750"/>
+          <a:ln w="12700">
+            <a:solidFill>
+              <a:schemeClr val="tx1"/>
+            </a:solidFill>
+          </a:ln>
         </p:spPr>
         <p:style>
-          <a:lnRef idx="3">
+          <a:lnRef idx="2">
             <a:schemeClr val="accent1"/>
           </a:lnRef>
           <a:fillRef idx="0">
             <a:schemeClr val="accent1"/>
           </a:fillRef>
-          <a:effectRef idx="2">
+          <a:effectRef idx="1">
+            <a:schemeClr val="accent1"/>
+          </a:effectRef>
+          <a:fontRef idx="minor">
+            <a:schemeClr val="tx1"/>
+          </a:fontRef>
+        </p:style>
+      </p:cxnSp>
+      <p:cxnSp>
+        <p:nvCxnSpPr>
+          <p:cNvPr id="17" name="Straight Connector 16"/>
+          <p:cNvCxnSpPr/>
+          <p:nvPr/>
+        </p:nvCxnSpPr>
+        <p:spPr>
+          <a:xfrm flipH="1">
+            <a:off x="6108170" y="91545"/>
+            <a:ext cx="6080655" cy="6080655"/>
+          </a:xfrm>
+          <a:prstGeom prst="line">
+            <a:avLst/>
+          </a:prstGeom>
+          <a:ln w="12700">
+            <a:solidFill>
+              <a:schemeClr val="tx1"/>
+            </a:solidFill>
+          </a:ln>
+        </p:spPr>
+        <p:style>
+          <a:lnRef idx="2">
+            <a:schemeClr val="accent1"/>
+          </a:lnRef>
+          <a:fillRef idx="0">
+            <a:schemeClr val="accent1"/>
+          </a:fillRef>
+          <a:effectRef idx="1">
+            <a:schemeClr val="accent1"/>
+          </a:effectRef>
+          <a:fontRef idx="minor">
+            <a:schemeClr val="tx1"/>
+          </a:fontRef>
+        </p:style>
+      </p:cxnSp>
+      <p:cxnSp>
+        <p:nvCxnSpPr>
+          <p:cNvPr id="19" name="Straight Connector 18"/>
+          <p:cNvCxnSpPr/>
+          <p:nvPr/>
+        </p:nvCxnSpPr>
+        <p:spPr>
+          <a:xfrm flipH="1">
+            <a:off x="7235825" y="228600"/>
+            <a:ext cx="4953000" cy="4953000"/>
+          </a:xfrm>
+          <a:prstGeom prst="line">
+            <a:avLst/>
+          </a:prstGeom>
+          <a:ln w="12700">
+            <a:solidFill>
+              <a:schemeClr val="tx1"/>
+            </a:solidFill>
+          </a:ln>
+        </p:spPr>
+        <p:style>
+          <a:lnRef idx="2">
+            <a:schemeClr val="accent1"/>
+          </a:lnRef>
+          <a:fillRef idx="0">
+            <a:schemeClr val="accent1"/>
+          </a:fillRef>
+          <a:effectRef idx="1">
+            <a:schemeClr val="accent1"/>
+          </a:effectRef>
+          <a:fontRef idx="minor">
+            <a:schemeClr val="tx1"/>
+          </a:fontRef>
+        </p:style>
+      </p:cxnSp>
+      <p:cxnSp>
+        <p:nvCxnSpPr>
+          <p:cNvPr id="21" name="Straight Connector 20"/>
+          <p:cNvCxnSpPr/>
+          <p:nvPr/>
+        </p:nvCxnSpPr>
+        <p:spPr>
+          <a:xfrm flipH="1">
+            <a:off x="7335837" y="32278"/>
+            <a:ext cx="4852989" cy="4852989"/>
+          </a:xfrm>
+          <a:prstGeom prst="line">
+            <a:avLst/>
+          </a:prstGeom>
+          <a:ln w="31750">
+            <a:solidFill>
+              <a:schemeClr val="tx1"/>
+            </a:solidFill>
+          </a:ln>
+        </p:spPr>
+        <p:style>
+          <a:lnRef idx="2">
+            <a:schemeClr val="accent1"/>
+          </a:lnRef>
+          <a:fillRef idx="0">
+            <a:schemeClr val="accent1"/>
+          </a:fillRef>
+          <a:effectRef idx="1">
+            <a:schemeClr val="accent1"/>
+          </a:effectRef>
+          <a:fontRef idx="minor">
+            <a:schemeClr val="tx1"/>
+          </a:fontRef>
+        </p:style>
+      </p:cxnSp>
+      <p:cxnSp>
+        <p:nvCxnSpPr>
+          <p:cNvPr id="23" name="Straight Connector 22"/>
+          <p:cNvCxnSpPr/>
+          <p:nvPr/>
+        </p:nvCxnSpPr>
+        <p:spPr>
+          <a:xfrm flipH="1">
+            <a:off x="7845426" y="609601"/>
+            <a:ext cx="4343399" cy="4343399"/>
+          </a:xfrm>
+          <a:prstGeom prst="line">
+            <a:avLst/>
+          </a:prstGeom>
+          <a:ln w="31750">
+            <a:solidFill>
+              <a:schemeClr val="tx1"/>
+            </a:solidFill>
+          </a:ln>
+        </p:spPr>
+        <p:style>
+          <a:lnRef idx="2">
+            <a:schemeClr val="accent1"/>
+          </a:lnRef>
+          <a:fillRef idx="0">
+            <a:schemeClr val="accent1"/>
+          </a:fillRef>
+          <a:effectRef idx="1">
             <a:schemeClr val="accent1"/>
           </a:effectRef>
           <a:fontRef idx="minor">
@@ -336,6 +530,11 @@
         </p:style>
       </p:cxnSp>
     </p:spTree>
+    <p:extLst>
+      <p:ext uri="{BB962C8B-B14F-4D97-AF65-F5344CB8AC3E}">
+        <p14:creationId xmlns:p14="http://schemas.microsoft.com/office/powerpoint/2010/main" val="2128653084"/>
+      </p:ext>
+    </p:extLst>
   </p:cSld>
   <p:clrMapOvr>
     <a:masterClrMapping/>
@@ -344,6 +543,1824 @@
 </file>
 
 <file path=ppt/slideLayouts/slideLayout10.xml><?xml version="1.0" encoding="utf-8"?>
+<p:sldLayout xmlns:a="http://schemas.openxmlformats.org/drawingml/2006/main" xmlns:r="http://schemas.openxmlformats.org/officeDocument/2006/relationships" xmlns:p="http://schemas.openxmlformats.org/presentationml/2006/main" preserve="1">
+  <p:cSld name="パノラマ写真 (キャプション付き)">
+    <p:spTree>
+      <p:nvGrpSpPr>
+        <p:cNvPr id="1" name=""/>
+        <p:cNvGrpSpPr/>
+        <p:nvPr/>
+      </p:nvGrpSpPr>
+      <p:grpSpPr>
+        <a:xfrm>
+          <a:off x="0" y="0"/>
+          <a:ext cx="0" cy="0"/>
+          <a:chOff x="0" y="0"/>
+          <a:chExt cx="0" cy="0"/>
+        </a:xfrm>
+      </p:grpSpPr>
+      <p:sp>
+        <p:nvSpPr>
+          <p:cNvPr id="2" name="Title 1"/>
+          <p:cNvSpPr>
+            <a:spLocks noGrp="1"/>
+          </p:cNvSpPr>
+          <p:nvPr>
+            <p:ph type="title"/>
+          </p:nvPr>
+        </p:nvSpPr>
+        <p:spPr/>
+        <p:txBody>
+          <a:bodyPr/>
+          <a:lstStyle/>
+          <a:p>
+            <a:r>
+              <a:rPr lang="ja-JP" altLang="en-US"/>
+              <a:t>マスター タイトルの書式設定</a:t>
+            </a:r>
+            <a:endParaRPr lang="en-US" dirty="0"/>
+          </a:p>
+        </p:txBody>
+      </p:sp>
+      <p:sp>
+        <p:nvSpPr>
+          <p:cNvPr id="17" name="Picture Placeholder 2"/>
+          <p:cNvSpPr>
+            <a:spLocks noGrp="1" noChangeAspect="1"/>
+          </p:cNvSpPr>
+          <p:nvPr>
+            <p:ph type="pic" idx="13"/>
+          </p:nvPr>
+        </p:nvSpPr>
+        <p:spPr>
+          <a:xfrm>
+            <a:off x="685800" y="533400"/>
+            <a:ext cx="10818812" cy="3124200"/>
+          </a:xfrm>
+          <a:prstGeom prst="snip2DiagRect">
+            <a:avLst>
+              <a:gd name="adj1" fmla="val 10815"/>
+              <a:gd name="adj2" fmla="val 0"/>
+            </a:avLst>
+          </a:prstGeom>
+          <a:ln w="15875">
+            <a:solidFill>
+              <a:schemeClr val="tx1">
+                <a:alpha val="40000"/>
+              </a:schemeClr>
+            </a:solidFill>
+          </a:ln>
+          <a:effectLst>
+            <a:innerShdw blurRad="57150" dist="38100" dir="14460000">
+              <a:srgbClr val="000000">
+                <a:alpha val="70000"/>
+              </a:srgbClr>
+            </a:innerShdw>
+          </a:effectLst>
+        </p:spPr>
+        <p:txBody>
+          <a:bodyPr anchor="t">
+            <a:normAutofit/>
+          </a:bodyPr>
+          <a:lstStyle>
+            <a:lvl1pPr marL="0" indent="0" algn="ctr">
+              <a:buNone/>
+              <a:defRPr sz="1600"/>
+            </a:lvl1pPr>
+            <a:lvl2pPr marL="457200" indent="0">
+              <a:buNone/>
+              <a:defRPr sz="1600"/>
+            </a:lvl2pPr>
+            <a:lvl3pPr marL="914400" indent="0">
+              <a:buNone/>
+              <a:defRPr sz="1600"/>
+            </a:lvl3pPr>
+            <a:lvl4pPr marL="1371600" indent="0">
+              <a:buNone/>
+              <a:defRPr sz="1600"/>
+            </a:lvl4pPr>
+            <a:lvl5pPr marL="1828800" indent="0">
+              <a:buNone/>
+              <a:defRPr sz="1600"/>
+            </a:lvl5pPr>
+            <a:lvl6pPr marL="2286000" indent="0">
+              <a:buNone/>
+              <a:defRPr sz="1600"/>
+            </a:lvl6pPr>
+            <a:lvl7pPr marL="2743200" indent="0">
+              <a:buNone/>
+              <a:defRPr sz="1600"/>
+            </a:lvl7pPr>
+            <a:lvl8pPr marL="3200400" indent="0">
+              <a:buNone/>
+              <a:defRPr sz="1600"/>
+            </a:lvl8pPr>
+            <a:lvl9pPr marL="3657600" indent="0">
+              <a:buNone/>
+              <a:defRPr sz="1600"/>
+            </a:lvl9pPr>
+          </a:lstStyle>
+          <a:p>
+            <a:r>
+              <a:rPr lang="ja-JP" altLang="en-US"/>
+              <a:t>アイコンをクリックして図を追加</a:t>
+            </a:r>
+            <a:endParaRPr lang="en-US" dirty="0"/>
+          </a:p>
+        </p:txBody>
+      </p:sp>
+      <p:sp>
+        <p:nvSpPr>
+          <p:cNvPr id="16" name="Text Placeholder 9"/>
+          <p:cNvSpPr>
+            <a:spLocks noGrp="1"/>
+          </p:cNvSpPr>
+          <p:nvPr>
+            <p:ph type="body" sz="quarter" idx="14"/>
+          </p:nvPr>
+        </p:nvSpPr>
+        <p:spPr>
+          <a:xfrm>
+            <a:off x="914402" y="3843867"/>
+            <a:ext cx="8304210" cy="457200"/>
+          </a:xfrm>
+        </p:spPr>
+        <p:txBody>
+          <a:bodyPr anchor="t">
+            <a:normAutofit/>
+          </a:bodyPr>
+          <a:lstStyle>
+            <a:lvl1pPr marL="0" indent="0">
+              <a:buFontTx/>
+              <a:buNone/>
+              <a:defRPr sz="1600"/>
+            </a:lvl1pPr>
+            <a:lvl2pPr marL="457200" indent="0">
+              <a:buFontTx/>
+              <a:buNone/>
+              <a:defRPr/>
+            </a:lvl2pPr>
+            <a:lvl3pPr marL="914400" indent="0">
+              <a:buFontTx/>
+              <a:buNone/>
+              <a:defRPr/>
+            </a:lvl3pPr>
+            <a:lvl4pPr marL="1371600" indent="0">
+              <a:buFontTx/>
+              <a:buNone/>
+              <a:defRPr/>
+            </a:lvl4pPr>
+            <a:lvl5pPr marL="1828800" indent="0">
+              <a:buFontTx/>
+              <a:buNone/>
+              <a:defRPr/>
+            </a:lvl5pPr>
+          </a:lstStyle>
+          <a:p>
+            <a:pPr lvl="0"/>
+            <a:r>
+              <a:rPr lang="ja-JP" altLang="en-US"/>
+              <a:t>マスター テキストの書式設定</a:t>
+            </a:r>
+          </a:p>
+        </p:txBody>
+      </p:sp>
+      <p:sp>
+        <p:nvSpPr>
+          <p:cNvPr id="3" name="Date Placeholder 2"/>
+          <p:cNvSpPr>
+            <a:spLocks noGrp="1"/>
+          </p:cNvSpPr>
+          <p:nvPr>
+            <p:ph type="dt" sz="half" idx="10"/>
+          </p:nvPr>
+        </p:nvSpPr>
+        <p:spPr/>
+        <p:txBody>
+          <a:bodyPr/>
+          <a:lstStyle/>
+          <a:p>
+            <a:fld id="{48A87A34-81AB-432B-8DAE-1953F412C126}" type="datetimeFigureOut">
+              <a:rPr lang="en-US" smtClean="0"/>
+              <a:pPr/>
+              <a:t>3/27/2026</a:t>
+            </a:fld>
+            <a:endParaRPr lang="en-US" dirty="0"/>
+          </a:p>
+        </p:txBody>
+      </p:sp>
+      <p:sp>
+        <p:nvSpPr>
+          <p:cNvPr id="4" name="Footer Placeholder 3"/>
+          <p:cNvSpPr>
+            <a:spLocks noGrp="1"/>
+          </p:cNvSpPr>
+          <p:nvPr>
+            <p:ph type="ftr" sz="quarter" idx="11"/>
+          </p:nvPr>
+        </p:nvSpPr>
+        <p:spPr/>
+        <p:txBody>
+          <a:bodyPr/>
+          <a:lstStyle/>
+          <a:p>
+            <a:endParaRPr lang="en-US" dirty="0"/>
+          </a:p>
+        </p:txBody>
+      </p:sp>
+      <p:sp>
+        <p:nvSpPr>
+          <p:cNvPr id="5" name="Slide Number Placeholder 4"/>
+          <p:cNvSpPr>
+            <a:spLocks noGrp="1"/>
+          </p:cNvSpPr>
+          <p:nvPr>
+            <p:ph type="sldNum" sz="quarter" idx="12"/>
+          </p:nvPr>
+        </p:nvSpPr>
+        <p:spPr/>
+        <p:txBody>
+          <a:bodyPr/>
+          <a:lstStyle/>
+          <a:p>
+            <a:fld id="{6D22F896-40B5-4ADD-8801-0D06FADFA095}" type="slidenum">
+              <a:rPr lang="en-US" smtClean="0"/>
+              <a:pPr/>
+              <a:t>‹#›</a:t>
+            </a:fld>
+            <a:endParaRPr lang="en-US" dirty="0"/>
+          </a:p>
+        </p:txBody>
+      </p:sp>
+    </p:spTree>
+    <p:extLst>
+      <p:ext uri="{BB962C8B-B14F-4D97-AF65-F5344CB8AC3E}">
+        <p14:creationId xmlns:p14="http://schemas.microsoft.com/office/powerpoint/2010/main" val="4287209503"/>
+      </p:ext>
+    </p:extLst>
+  </p:cSld>
+  <p:clrMapOvr>
+    <a:masterClrMapping/>
+  </p:clrMapOvr>
+</p:sldLayout>
+</file>
+
+<file path=ppt/slideLayouts/slideLayout11.xml><?xml version="1.0" encoding="utf-8"?>
+<p:sldLayout xmlns:a="http://schemas.openxmlformats.org/drawingml/2006/main" xmlns:r="http://schemas.openxmlformats.org/officeDocument/2006/relationships" xmlns:p="http://schemas.openxmlformats.org/presentationml/2006/main" preserve="1">
+  <p:cSld name="タイトルとキャプション">
+    <p:spTree>
+      <p:nvGrpSpPr>
+        <p:cNvPr id="1" name=""/>
+        <p:cNvGrpSpPr/>
+        <p:nvPr/>
+      </p:nvGrpSpPr>
+      <p:grpSpPr>
+        <a:xfrm>
+          <a:off x="0" y="0"/>
+          <a:ext cx="0" cy="0"/>
+          <a:chOff x="0" y="0"/>
+          <a:chExt cx="0" cy="0"/>
+        </a:xfrm>
+      </p:grpSpPr>
+      <p:sp>
+        <p:nvSpPr>
+          <p:cNvPr id="2" name="Title 1"/>
+          <p:cNvSpPr>
+            <a:spLocks noGrp="1"/>
+          </p:cNvSpPr>
+          <p:nvPr>
+            <p:ph type="title"/>
+          </p:nvPr>
+        </p:nvSpPr>
+        <p:spPr>
+          <a:xfrm>
+            <a:off x="684213" y="685800"/>
+            <a:ext cx="10058400" cy="2743200"/>
+          </a:xfrm>
+        </p:spPr>
+        <p:txBody>
+          <a:bodyPr anchor="ctr">
+            <a:normAutofit/>
+          </a:bodyPr>
+          <a:lstStyle>
+            <a:lvl1pPr algn="l">
+              <a:defRPr sz="3200" b="0" cap="all"/>
+            </a:lvl1pPr>
+          </a:lstStyle>
+          <a:p>
+            <a:r>
+              <a:rPr lang="ja-JP" altLang="en-US"/>
+              <a:t>マスター タイトルの書式設定</a:t>
+            </a:r>
+            <a:endParaRPr lang="en-US" dirty="0"/>
+          </a:p>
+        </p:txBody>
+      </p:sp>
+      <p:sp>
+        <p:nvSpPr>
+          <p:cNvPr id="3" name="Text Placeholder 2"/>
+          <p:cNvSpPr>
+            <a:spLocks noGrp="1"/>
+          </p:cNvSpPr>
+          <p:nvPr>
+            <p:ph type="body" idx="1"/>
+          </p:nvPr>
+        </p:nvSpPr>
+        <p:spPr>
+          <a:xfrm>
+            <a:off x="684212" y="4114800"/>
+            <a:ext cx="8535988" cy="1879600"/>
+          </a:xfrm>
+        </p:spPr>
+        <p:txBody>
+          <a:bodyPr anchor="ctr">
+            <a:normAutofit/>
+          </a:bodyPr>
+          <a:lstStyle>
+            <a:lvl1pPr marL="0" indent="0" algn="l">
+              <a:buNone/>
+              <a:defRPr sz="2000">
+                <a:solidFill>
+                  <a:schemeClr val="bg2">
+                    <a:lumMod val="75000"/>
+                  </a:schemeClr>
+                </a:solidFill>
+              </a:defRPr>
+            </a:lvl1pPr>
+            <a:lvl2pPr marL="457200" indent="0">
+              <a:buNone/>
+              <a:defRPr sz="1800">
+                <a:solidFill>
+                  <a:schemeClr val="tx1">
+                    <a:tint val="75000"/>
+                  </a:schemeClr>
+                </a:solidFill>
+              </a:defRPr>
+            </a:lvl2pPr>
+            <a:lvl3pPr marL="914400" indent="0">
+              <a:buNone/>
+              <a:defRPr sz="1600">
+                <a:solidFill>
+                  <a:schemeClr val="tx1">
+                    <a:tint val="75000"/>
+                  </a:schemeClr>
+                </a:solidFill>
+              </a:defRPr>
+            </a:lvl3pPr>
+            <a:lvl4pPr marL="1371600" indent="0">
+              <a:buNone/>
+              <a:defRPr sz="1400">
+                <a:solidFill>
+                  <a:schemeClr val="tx1">
+                    <a:tint val="75000"/>
+                  </a:schemeClr>
+                </a:solidFill>
+              </a:defRPr>
+            </a:lvl4pPr>
+            <a:lvl5pPr marL="1828800" indent="0">
+              <a:buNone/>
+              <a:defRPr sz="1400">
+                <a:solidFill>
+                  <a:schemeClr val="tx1">
+                    <a:tint val="75000"/>
+                  </a:schemeClr>
+                </a:solidFill>
+              </a:defRPr>
+            </a:lvl5pPr>
+            <a:lvl6pPr marL="2286000" indent="0">
+              <a:buNone/>
+              <a:defRPr sz="1400">
+                <a:solidFill>
+                  <a:schemeClr val="tx1">
+                    <a:tint val="75000"/>
+                  </a:schemeClr>
+                </a:solidFill>
+              </a:defRPr>
+            </a:lvl6pPr>
+            <a:lvl7pPr marL="2743200" indent="0">
+              <a:buNone/>
+              <a:defRPr sz="1400">
+                <a:solidFill>
+                  <a:schemeClr val="tx1">
+                    <a:tint val="75000"/>
+                  </a:schemeClr>
+                </a:solidFill>
+              </a:defRPr>
+            </a:lvl7pPr>
+            <a:lvl8pPr marL="3200400" indent="0">
+              <a:buNone/>
+              <a:defRPr sz="1400">
+                <a:solidFill>
+                  <a:schemeClr val="tx1">
+                    <a:tint val="75000"/>
+                  </a:schemeClr>
+                </a:solidFill>
+              </a:defRPr>
+            </a:lvl8pPr>
+            <a:lvl9pPr marL="3657600" indent="0">
+              <a:buNone/>
+              <a:defRPr sz="1400">
+                <a:solidFill>
+                  <a:schemeClr val="tx1">
+                    <a:tint val="75000"/>
+                  </a:schemeClr>
+                </a:solidFill>
+              </a:defRPr>
+            </a:lvl9pPr>
+          </a:lstStyle>
+          <a:p>
+            <a:pPr lvl="0"/>
+            <a:r>
+              <a:rPr lang="ja-JP" altLang="en-US"/>
+              <a:t>マスター テキストの書式設定</a:t>
+            </a:r>
+          </a:p>
+        </p:txBody>
+      </p:sp>
+      <p:sp>
+        <p:nvSpPr>
+          <p:cNvPr id="4" name="Date Placeholder 3"/>
+          <p:cNvSpPr>
+            <a:spLocks noGrp="1"/>
+          </p:cNvSpPr>
+          <p:nvPr>
+            <p:ph type="dt" sz="half" idx="10"/>
+          </p:nvPr>
+        </p:nvSpPr>
+        <p:spPr/>
+        <p:txBody>
+          <a:bodyPr/>
+          <a:lstStyle/>
+          <a:p>
+            <a:fld id="{48A87A34-81AB-432B-8DAE-1953F412C126}" type="datetimeFigureOut">
+              <a:rPr lang="en-US" smtClean="0"/>
+              <a:pPr/>
+              <a:t>3/27/2026</a:t>
+            </a:fld>
+            <a:endParaRPr lang="en-US" dirty="0"/>
+          </a:p>
+        </p:txBody>
+      </p:sp>
+      <p:sp>
+        <p:nvSpPr>
+          <p:cNvPr id="5" name="Footer Placeholder 4"/>
+          <p:cNvSpPr>
+            <a:spLocks noGrp="1"/>
+          </p:cNvSpPr>
+          <p:nvPr>
+            <p:ph type="ftr" sz="quarter" idx="11"/>
+          </p:nvPr>
+        </p:nvSpPr>
+        <p:spPr/>
+        <p:txBody>
+          <a:bodyPr/>
+          <a:lstStyle/>
+          <a:p>
+            <a:endParaRPr lang="en-US" dirty="0"/>
+          </a:p>
+        </p:txBody>
+      </p:sp>
+      <p:sp>
+        <p:nvSpPr>
+          <p:cNvPr id="6" name="Slide Number Placeholder 5"/>
+          <p:cNvSpPr>
+            <a:spLocks noGrp="1"/>
+          </p:cNvSpPr>
+          <p:nvPr>
+            <p:ph type="sldNum" sz="quarter" idx="12"/>
+          </p:nvPr>
+        </p:nvSpPr>
+        <p:spPr/>
+        <p:txBody>
+          <a:bodyPr/>
+          <a:lstStyle/>
+          <a:p>
+            <a:fld id="{6D22F896-40B5-4ADD-8801-0D06FADFA095}" type="slidenum">
+              <a:rPr lang="en-US" smtClean="0"/>
+              <a:pPr/>
+              <a:t>‹#›</a:t>
+            </a:fld>
+            <a:endParaRPr lang="en-US" dirty="0"/>
+          </a:p>
+        </p:txBody>
+      </p:sp>
+    </p:spTree>
+    <p:extLst>
+      <p:ext uri="{BB962C8B-B14F-4D97-AF65-F5344CB8AC3E}">
+        <p14:creationId xmlns:p14="http://schemas.microsoft.com/office/powerpoint/2010/main" val="1175422794"/>
+      </p:ext>
+    </p:extLst>
+  </p:cSld>
+  <p:clrMapOvr>
+    <a:masterClrMapping/>
+  </p:clrMapOvr>
+</p:sldLayout>
+</file>
+
+<file path=ppt/slideLayouts/slideLayout12.xml><?xml version="1.0" encoding="utf-8"?>
+<p:sldLayout xmlns:a="http://schemas.openxmlformats.org/drawingml/2006/main" xmlns:r="http://schemas.openxmlformats.org/officeDocument/2006/relationships" xmlns:p="http://schemas.openxmlformats.org/presentationml/2006/main" preserve="1">
+  <p:cSld name="引用 (キャプション付き)">
+    <p:spTree>
+      <p:nvGrpSpPr>
+        <p:cNvPr id="1" name=""/>
+        <p:cNvGrpSpPr/>
+        <p:nvPr/>
+      </p:nvGrpSpPr>
+      <p:grpSpPr>
+        <a:xfrm>
+          <a:off x="0" y="0"/>
+          <a:ext cx="0" cy="0"/>
+          <a:chOff x="0" y="0"/>
+          <a:chExt cx="0" cy="0"/>
+        </a:xfrm>
+      </p:grpSpPr>
+      <p:sp>
+        <p:nvSpPr>
+          <p:cNvPr id="2" name="Title 1"/>
+          <p:cNvSpPr>
+            <a:spLocks noGrp="1"/>
+          </p:cNvSpPr>
+          <p:nvPr>
+            <p:ph type="title"/>
+          </p:nvPr>
+        </p:nvSpPr>
+        <p:spPr>
+          <a:xfrm>
+            <a:off x="1141411" y="685800"/>
+            <a:ext cx="9144001" cy="2743200"/>
+          </a:xfrm>
+        </p:spPr>
+        <p:txBody>
+          <a:bodyPr anchor="ctr">
+            <a:normAutofit/>
+          </a:bodyPr>
+          <a:lstStyle>
+            <a:lvl1pPr algn="l">
+              <a:defRPr sz="3200" b="0" cap="all">
+                <a:solidFill>
+                  <a:schemeClr val="tx1"/>
+                </a:solidFill>
+              </a:defRPr>
+            </a:lvl1pPr>
+          </a:lstStyle>
+          <a:p>
+            <a:r>
+              <a:rPr lang="ja-JP" altLang="en-US"/>
+              <a:t>マスター タイトルの書式設定</a:t>
+            </a:r>
+            <a:endParaRPr lang="en-US" dirty="0"/>
+          </a:p>
+        </p:txBody>
+      </p:sp>
+      <p:sp>
+        <p:nvSpPr>
+          <p:cNvPr id="10" name="Text Placeholder 9"/>
+          <p:cNvSpPr>
+            <a:spLocks noGrp="1"/>
+          </p:cNvSpPr>
+          <p:nvPr>
+            <p:ph type="body" sz="quarter" idx="13"/>
+          </p:nvPr>
+        </p:nvSpPr>
+        <p:spPr>
+          <a:xfrm>
+            <a:off x="1446212" y="3429000"/>
+            <a:ext cx="8534400" cy="381000"/>
+          </a:xfrm>
+        </p:spPr>
+        <p:txBody>
+          <a:bodyPr anchor="ctr"/>
+          <a:lstStyle>
+            <a:lvl1pPr marL="0" indent="0">
+              <a:buFontTx/>
+              <a:buNone/>
+              <a:defRPr/>
+            </a:lvl1pPr>
+            <a:lvl2pPr marL="457200" indent="0">
+              <a:buFontTx/>
+              <a:buNone/>
+              <a:defRPr/>
+            </a:lvl2pPr>
+            <a:lvl3pPr marL="914400" indent="0">
+              <a:buFontTx/>
+              <a:buNone/>
+              <a:defRPr/>
+            </a:lvl3pPr>
+            <a:lvl4pPr marL="1371600" indent="0">
+              <a:buFontTx/>
+              <a:buNone/>
+              <a:defRPr/>
+            </a:lvl4pPr>
+            <a:lvl5pPr marL="1828800" indent="0">
+              <a:buFontTx/>
+              <a:buNone/>
+              <a:defRPr/>
+            </a:lvl5pPr>
+          </a:lstStyle>
+          <a:p>
+            <a:pPr lvl="0"/>
+            <a:r>
+              <a:rPr lang="ja-JP" altLang="en-US"/>
+              <a:t>マスター テキストの書式設定</a:t>
+            </a:r>
+          </a:p>
+        </p:txBody>
+      </p:sp>
+      <p:sp>
+        <p:nvSpPr>
+          <p:cNvPr id="3" name="Text Placeholder 2"/>
+          <p:cNvSpPr>
+            <a:spLocks noGrp="1"/>
+          </p:cNvSpPr>
+          <p:nvPr>
+            <p:ph type="body" idx="1"/>
+          </p:nvPr>
+        </p:nvSpPr>
+        <p:spPr>
+          <a:xfrm>
+            <a:off x="684213" y="4301067"/>
+            <a:ext cx="8534400" cy="1684865"/>
+          </a:xfrm>
+        </p:spPr>
+        <p:txBody>
+          <a:bodyPr anchor="ctr">
+            <a:normAutofit/>
+          </a:bodyPr>
+          <a:lstStyle>
+            <a:lvl1pPr marL="0" indent="0" algn="l">
+              <a:buNone/>
+              <a:defRPr sz="2000">
+                <a:solidFill>
+                  <a:schemeClr val="bg2">
+                    <a:lumMod val="75000"/>
+                  </a:schemeClr>
+                </a:solidFill>
+              </a:defRPr>
+            </a:lvl1pPr>
+            <a:lvl2pPr marL="457200" indent="0">
+              <a:buNone/>
+              <a:defRPr sz="1800">
+                <a:solidFill>
+                  <a:schemeClr val="tx1">
+                    <a:tint val="75000"/>
+                  </a:schemeClr>
+                </a:solidFill>
+              </a:defRPr>
+            </a:lvl2pPr>
+            <a:lvl3pPr marL="914400" indent="0">
+              <a:buNone/>
+              <a:defRPr sz="1600">
+                <a:solidFill>
+                  <a:schemeClr val="tx1">
+                    <a:tint val="75000"/>
+                  </a:schemeClr>
+                </a:solidFill>
+              </a:defRPr>
+            </a:lvl3pPr>
+            <a:lvl4pPr marL="1371600" indent="0">
+              <a:buNone/>
+              <a:defRPr sz="1400">
+                <a:solidFill>
+                  <a:schemeClr val="tx1">
+                    <a:tint val="75000"/>
+                  </a:schemeClr>
+                </a:solidFill>
+              </a:defRPr>
+            </a:lvl4pPr>
+            <a:lvl5pPr marL="1828800" indent="0">
+              <a:buNone/>
+              <a:defRPr sz="1400">
+                <a:solidFill>
+                  <a:schemeClr val="tx1">
+                    <a:tint val="75000"/>
+                  </a:schemeClr>
+                </a:solidFill>
+              </a:defRPr>
+            </a:lvl5pPr>
+            <a:lvl6pPr marL="2286000" indent="0">
+              <a:buNone/>
+              <a:defRPr sz="1400">
+                <a:solidFill>
+                  <a:schemeClr val="tx1">
+                    <a:tint val="75000"/>
+                  </a:schemeClr>
+                </a:solidFill>
+              </a:defRPr>
+            </a:lvl6pPr>
+            <a:lvl7pPr marL="2743200" indent="0">
+              <a:buNone/>
+              <a:defRPr sz="1400">
+                <a:solidFill>
+                  <a:schemeClr val="tx1">
+                    <a:tint val="75000"/>
+                  </a:schemeClr>
+                </a:solidFill>
+              </a:defRPr>
+            </a:lvl7pPr>
+            <a:lvl8pPr marL="3200400" indent="0">
+              <a:buNone/>
+              <a:defRPr sz="1400">
+                <a:solidFill>
+                  <a:schemeClr val="tx1">
+                    <a:tint val="75000"/>
+                  </a:schemeClr>
+                </a:solidFill>
+              </a:defRPr>
+            </a:lvl8pPr>
+            <a:lvl9pPr marL="3657600" indent="0">
+              <a:buNone/>
+              <a:defRPr sz="1400">
+                <a:solidFill>
+                  <a:schemeClr val="tx1">
+                    <a:tint val="75000"/>
+                  </a:schemeClr>
+                </a:solidFill>
+              </a:defRPr>
+            </a:lvl9pPr>
+          </a:lstStyle>
+          <a:p>
+            <a:pPr lvl="0"/>
+            <a:r>
+              <a:rPr lang="ja-JP" altLang="en-US"/>
+              <a:t>マスター テキストの書式設定</a:t>
+            </a:r>
+          </a:p>
+        </p:txBody>
+      </p:sp>
+      <p:sp>
+        <p:nvSpPr>
+          <p:cNvPr id="4" name="Date Placeholder 3"/>
+          <p:cNvSpPr>
+            <a:spLocks noGrp="1"/>
+          </p:cNvSpPr>
+          <p:nvPr>
+            <p:ph type="dt" sz="half" idx="10"/>
+          </p:nvPr>
+        </p:nvSpPr>
+        <p:spPr/>
+        <p:txBody>
+          <a:bodyPr/>
+          <a:lstStyle/>
+          <a:p>
+            <a:fld id="{48A87A34-81AB-432B-8DAE-1953F412C126}" type="datetimeFigureOut">
+              <a:rPr lang="en-US" smtClean="0"/>
+              <a:pPr/>
+              <a:t>3/27/2026</a:t>
+            </a:fld>
+            <a:endParaRPr lang="en-US" dirty="0"/>
+          </a:p>
+        </p:txBody>
+      </p:sp>
+      <p:sp>
+        <p:nvSpPr>
+          <p:cNvPr id="5" name="Footer Placeholder 4"/>
+          <p:cNvSpPr>
+            <a:spLocks noGrp="1"/>
+          </p:cNvSpPr>
+          <p:nvPr>
+            <p:ph type="ftr" sz="quarter" idx="11"/>
+          </p:nvPr>
+        </p:nvSpPr>
+        <p:spPr/>
+        <p:txBody>
+          <a:bodyPr/>
+          <a:lstStyle/>
+          <a:p>
+            <a:endParaRPr lang="en-US" dirty="0"/>
+          </a:p>
+        </p:txBody>
+      </p:sp>
+      <p:sp>
+        <p:nvSpPr>
+          <p:cNvPr id="6" name="Slide Number Placeholder 5"/>
+          <p:cNvSpPr>
+            <a:spLocks noGrp="1"/>
+          </p:cNvSpPr>
+          <p:nvPr>
+            <p:ph type="sldNum" sz="quarter" idx="12"/>
+          </p:nvPr>
+        </p:nvSpPr>
+        <p:spPr/>
+        <p:txBody>
+          <a:bodyPr/>
+          <a:lstStyle/>
+          <a:p>
+            <a:fld id="{6D22F896-40B5-4ADD-8801-0D06FADFA095}" type="slidenum">
+              <a:rPr lang="en-US" smtClean="0"/>
+              <a:pPr/>
+              <a:t>‹#›</a:t>
+            </a:fld>
+            <a:endParaRPr lang="en-US" dirty="0"/>
+          </a:p>
+        </p:txBody>
+      </p:sp>
+      <p:sp>
+        <p:nvSpPr>
+          <p:cNvPr id="14" name="TextBox 13"/>
+          <p:cNvSpPr txBox="1"/>
+          <p:nvPr/>
+        </p:nvSpPr>
+        <p:spPr>
+          <a:xfrm>
+            <a:off x="531812" y="812222"/>
+            <a:ext cx="609600" cy="584776"/>
+          </a:xfrm>
+          <a:prstGeom prst="rect">
+            <a:avLst/>
+          </a:prstGeom>
+        </p:spPr>
+        <p:txBody>
+          <a:bodyPr vert="horz" lIns="91440" tIns="45720" rIns="91440" bIns="45720" rtlCol="0" anchor="ctr">
+            <a:noAutofit/>
+          </a:bodyPr>
+          <a:lstStyle/>
+          <a:p>
+            <a:pPr lvl="0"/>
+            <a:r>
+              <a:rPr lang="en-US" sz="8000" dirty="0">
+                <a:solidFill>
+                  <a:schemeClr val="tx1"/>
+                </a:solidFill>
+                <a:effectLst/>
+              </a:rPr>
+              <a:t>“</a:t>
+            </a:r>
+          </a:p>
+        </p:txBody>
+      </p:sp>
+      <p:sp>
+        <p:nvSpPr>
+          <p:cNvPr id="15" name="TextBox 14"/>
+          <p:cNvSpPr txBox="1"/>
+          <p:nvPr/>
+        </p:nvSpPr>
+        <p:spPr>
+          <a:xfrm>
+            <a:off x="10285412" y="2768601"/>
+            <a:ext cx="609600" cy="584776"/>
+          </a:xfrm>
+          <a:prstGeom prst="rect">
+            <a:avLst/>
+          </a:prstGeom>
+        </p:spPr>
+        <p:txBody>
+          <a:bodyPr vert="horz" lIns="91440" tIns="45720" rIns="91440" bIns="45720" rtlCol="0" anchor="ctr">
+            <a:noAutofit/>
+          </a:bodyPr>
+          <a:lstStyle/>
+          <a:p>
+            <a:pPr lvl="0" algn="r"/>
+            <a:r>
+              <a:rPr lang="en-US" sz="8000" dirty="0">
+                <a:solidFill>
+                  <a:schemeClr val="tx1"/>
+                </a:solidFill>
+                <a:effectLst/>
+              </a:rPr>
+              <a:t>”</a:t>
+            </a:r>
+          </a:p>
+        </p:txBody>
+      </p:sp>
+    </p:spTree>
+    <p:extLst>
+      <p:ext uri="{BB962C8B-B14F-4D97-AF65-F5344CB8AC3E}">
+        <p14:creationId xmlns:p14="http://schemas.microsoft.com/office/powerpoint/2010/main" val="4099659271"/>
+      </p:ext>
+    </p:extLst>
+  </p:cSld>
+  <p:clrMapOvr>
+    <a:masterClrMapping/>
+  </p:clrMapOvr>
+</p:sldLayout>
+</file>
+
+<file path=ppt/slideLayouts/slideLayout13.xml><?xml version="1.0" encoding="utf-8"?>
+<p:sldLayout xmlns:a="http://schemas.openxmlformats.org/drawingml/2006/main" xmlns:r="http://schemas.openxmlformats.org/officeDocument/2006/relationships" xmlns:p="http://schemas.openxmlformats.org/presentationml/2006/main" preserve="1">
+  <p:cSld name="名札">
+    <p:spTree>
+      <p:nvGrpSpPr>
+        <p:cNvPr id="1" name=""/>
+        <p:cNvGrpSpPr/>
+        <p:nvPr/>
+      </p:nvGrpSpPr>
+      <p:grpSpPr>
+        <a:xfrm>
+          <a:off x="0" y="0"/>
+          <a:ext cx="0" cy="0"/>
+          <a:chOff x="0" y="0"/>
+          <a:chExt cx="0" cy="0"/>
+        </a:xfrm>
+      </p:grpSpPr>
+      <p:sp>
+        <p:nvSpPr>
+          <p:cNvPr id="2" name="Title 1"/>
+          <p:cNvSpPr>
+            <a:spLocks noGrp="1"/>
+          </p:cNvSpPr>
+          <p:nvPr>
+            <p:ph type="title"/>
+          </p:nvPr>
+        </p:nvSpPr>
+        <p:spPr>
+          <a:xfrm>
+            <a:off x="684212" y="3429000"/>
+            <a:ext cx="8534400" cy="1697400"/>
+          </a:xfrm>
+        </p:spPr>
+        <p:txBody>
+          <a:bodyPr anchor="b">
+            <a:normAutofit/>
+          </a:bodyPr>
+          <a:lstStyle>
+            <a:lvl1pPr algn="l">
+              <a:defRPr sz="3200" b="0" cap="all"/>
+            </a:lvl1pPr>
+          </a:lstStyle>
+          <a:p>
+            <a:r>
+              <a:rPr lang="ja-JP" altLang="en-US"/>
+              <a:t>マスター タイトルの書式設定</a:t>
+            </a:r>
+            <a:endParaRPr lang="en-US" dirty="0"/>
+          </a:p>
+        </p:txBody>
+      </p:sp>
+      <p:sp>
+        <p:nvSpPr>
+          <p:cNvPr id="3" name="Text Placeholder 2"/>
+          <p:cNvSpPr>
+            <a:spLocks noGrp="1"/>
+          </p:cNvSpPr>
+          <p:nvPr>
+            <p:ph type="body" idx="1"/>
+          </p:nvPr>
+        </p:nvSpPr>
+        <p:spPr>
+          <a:xfrm>
+            <a:off x="684211" y="5132981"/>
+            <a:ext cx="8535990" cy="860400"/>
+          </a:xfrm>
+        </p:spPr>
+        <p:txBody>
+          <a:bodyPr anchor="t">
+            <a:normAutofit/>
+          </a:bodyPr>
+          <a:lstStyle>
+            <a:lvl1pPr marL="0" indent="0" algn="l">
+              <a:buNone/>
+              <a:defRPr sz="2000">
+                <a:solidFill>
+                  <a:schemeClr val="bg2">
+                    <a:lumMod val="75000"/>
+                  </a:schemeClr>
+                </a:solidFill>
+              </a:defRPr>
+            </a:lvl1pPr>
+            <a:lvl2pPr marL="457200" indent="0">
+              <a:buNone/>
+              <a:defRPr sz="1800">
+                <a:solidFill>
+                  <a:schemeClr val="tx1">
+                    <a:tint val="75000"/>
+                  </a:schemeClr>
+                </a:solidFill>
+              </a:defRPr>
+            </a:lvl2pPr>
+            <a:lvl3pPr marL="914400" indent="0">
+              <a:buNone/>
+              <a:defRPr sz="1600">
+                <a:solidFill>
+                  <a:schemeClr val="tx1">
+                    <a:tint val="75000"/>
+                  </a:schemeClr>
+                </a:solidFill>
+              </a:defRPr>
+            </a:lvl3pPr>
+            <a:lvl4pPr marL="1371600" indent="0">
+              <a:buNone/>
+              <a:defRPr sz="1400">
+                <a:solidFill>
+                  <a:schemeClr val="tx1">
+                    <a:tint val="75000"/>
+                  </a:schemeClr>
+                </a:solidFill>
+              </a:defRPr>
+            </a:lvl4pPr>
+            <a:lvl5pPr marL="1828800" indent="0">
+              <a:buNone/>
+              <a:defRPr sz="1400">
+                <a:solidFill>
+                  <a:schemeClr val="tx1">
+                    <a:tint val="75000"/>
+                  </a:schemeClr>
+                </a:solidFill>
+              </a:defRPr>
+            </a:lvl5pPr>
+            <a:lvl6pPr marL="2286000" indent="0">
+              <a:buNone/>
+              <a:defRPr sz="1400">
+                <a:solidFill>
+                  <a:schemeClr val="tx1">
+                    <a:tint val="75000"/>
+                  </a:schemeClr>
+                </a:solidFill>
+              </a:defRPr>
+            </a:lvl6pPr>
+            <a:lvl7pPr marL="2743200" indent="0">
+              <a:buNone/>
+              <a:defRPr sz="1400">
+                <a:solidFill>
+                  <a:schemeClr val="tx1">
+                    <a:tint val="75000"/>
+                  </a:schemeClr>
+                </a:solidFill>
+              </a:defRPr>
+            </a:lvl7pPr>
+            <a:lvl8pPr marL="3200400" indent="0">
+              <a:buNone/>
+              <a:defRPr sz="1400">
+                <a:solidFill>
+                  <a:schemeClr val="tx1">
+                    <a:tint val="75000"/>
+                  </a:schemeClr>
+                </a:solidFill>
+              </a:defRPr>
+            </a:lvl8pPr>
+            <a:lvl9pPr marL="3657600" indent="0">
+              <a:buNone/>
+              <a:defRPr sz="1400">
+                <a:solidFill>
+                  <a:schemeClr val="tx1">
+                    <a:tint val="75000"/>
+                  </a:schemeClr>
+                </a:solidFill>
+              </a:defRPr>
+            </a:lvl9pPr>
+          </a:lstStyle>
+          <a:p>
+            <a:pPr lvl="0"/>
+            <a:r>
+              <a:rPr lang="ja-JP" altLang="en-US"/>
+              <a:t>マスター テキストの書式設定</a:t>
+            </a:r>
+          </a:p>
+        </p:txBody>
+      </p:sp>
+      <p:sp>
+        <p:nvSpPr>
+          <p:cNvPr id="4" name="Date Placeholder 3"/>
+          <p:cNvSpPr>
+            <a:spLocks noGrp="1"/>
+          </p:cNvSpPr>
+          <p:nvPr>
+            <p:ph type="dt" sz="half" idx="10"/>
+          </p:nvPr>
+        </p:nvSpPr>
+        <p:spPr/>
+        <p:txBody>
+          <a:bodyPr/>
+          <a:lstStyle/>
+          <a:p>
+            <a:fld id="{48A87A34-81AB-432B-8DAE-1953F412C126}" type="datetimeFigureOut">
+              <a:rPr lang="en-US" smtClean="0"/>
+              <a:pPr/>
+              <a:t>3/27/2026</a:t>
+            </a:fld>
+            <a:endParaRPr lang="en-US" dirty="0"/>
+          </a:p>
+        </p:txBody>
+      </p:sp>
+      <p:sp>
+        <p:nvSpPr>
+          <p:cNvPr id="5" name="Footer Placeholder 4"/>
+          <p:cNvSpPr>
+            <a:spLocks noGrp="1"/>
+          </p:cNvSpPr>
+          <p:nvPr>
+            <p:ph type="ftr" sz="quarter" idx="11"/>
+          </p:nvPr>
+        </p:nvSpPr>
+        <p:spPr/>
+        <p:txBody>
+          <a:bodyPr/>
+          <a:lstStyle/>
+          <a:p>
+            <a:endParaRPr lang="en-US" dirty="0"/>
+          </a:p>
+        </p:txBody>
+      </p:sp>
+      <p:sp>
+        <p:nvSpPr>
+          <p:cNvPr id="6" name="Slide Number Placeholder 5"/>
+          <p:cNvSpPr>
+            <a:spLocks noGrp="1"/>
+          </p:cNvSpPr>
+          <p:nvPr>
+            <p:ph type="sldNum" sz="quarter" idx="12"/>
+          </p:nvPr>
+        </p:nvSpPr>
+        <p:spPr/>
+        <p:txBody>
+          <a:bodyPr/>
+          <a:lstStyle/>
+          <a:p>
+            <a:fld id="{6D22F896-40B5-4ADD-8801-0D06FADFA095}" type="slidenum">
+              <a:rPr lang="en-US" smtClean="0"/>
+              <a:pPr/>
+              <a:t>‹#›</a:t>
+            </a:fld>
+            <a:endParaRPr lang="en-US" dirty="0"/>
+          </a:p>
+        </p:txBody>
+      </p:sp>
+    </p:spTree>
+    <p:extLst>
+      <p:ext uri="{BB962C8B-B14F-4D97-AF65-F5344CB8AC3E}">
+        <p14:creationId xmlns:p14="http://schemas.microsoft.com/office/powerpoint/2010/main" val="4057484627"/>
+      </p:ext>
+    </p:extLst>
+  </p:cSld>
+  <p:clrMapOvr>
+    <a:masterClrMapping/>
+  </p:clrMapOvr>
+</p:sldLayout>
+</file>
+
+<file path=ppt/slideLayouts/slideLayout14.xml><?xml version="1.0" encoding="utf-8"?>
+<p:sldLayout xmlns:a="http://schemas.openxmlformats.org/drawingml/2006/main" xmlns:r="http://schemas.openxmlformats.org/officeDocument/2006/relationships" xmlns:p="http://schemas.openxmlformats.org/presentationml/2006/main" preserve="1">
+  <p:cSld name="引用付きの名札">
+    <p:spTree>
+      <p:nvGrpSpPr>
+        <p:cNvPr id="1" name=""/>
+        <p:cNvGrpSpPr/>
+        <p:nvPr/>
+      </p:nvGrpSpPr>
+      <p:grpSpPr>
+        <a:xfrm>
+          <a:off x="0" y="0"/>
+          <a:ext cx="0" cy="0"/>
+          <a:chOff x="0" y="0"/>
+          <a:chExt cx="0" cy="0"/>
+        </a:xfrm>
+      </p:grpSpPr>
+      <p:sp>
+        <p:nvSpPr>
+          <p:cNvPr id="2" name="Title 1"/>
+          <p:cNvSpPr>
+            <a:spLocks noGrp="1"/>
+          </p:cNvSpPr>
+          <p:nvPr>
+            <p:ph type="title"/>
+          </p:nvPr>
+        </p:nvSpPr>
+        <p:spPr>
+          <a:xfrm>
+            <a:off x="1141413" y="685800"/>
+            <a:ext cx="9144000" cy="2743200"/>
+          </a:xfrm>
+        </p:spPr>
+        <p:txBody>
+          <a:bodyPr anchor="ctr">
+            <a:normAutofit/>
+          </a:bodyPr>
+          <a:lstStyle>
+            <a:lvl1pPr algn="l">
+              <a:defRPr sz="3200" b="0" cap="all">
+                <a:solidFill>
+                  <a:schemeClr val="tx1"/>
+                </a:solidFill>
+              </a:defRPr>
+            </a:lvl1pPr>
+          </a:lstStyle>
+          <a:p>
+            <a:r>
+              <a:rPr lang="ja-JP" altLang="en-US"/>
+              <a:t>マスター タイトルの書式設定</a:t>
+            </a:r>
+            <a:endParaRPr lang="en-US" dirty="0"/>
+          </a:p>
+        </p:txBody>
+      </p:sp>
+      <p:sp>
+        <p:nvSpPr>
+          <p:cNvPr id="10" name="Text Placeholder 9"/>
+          <p:cNvSpPr>
+            <a:spLocks noGrp="1"/>
+          </p:cNvSpPr>
+          <p:nvPr>
+            <p:ph type="body" sz="quarter" idx="13"/>
+          </p:nvPr>
+        </p:nvSpPr>
+        <p:spPr>
+          <a:xfrm>
+            <a:off x="684212" y="3928534"/>
+            <a:ext cx="8534401" cy="1049866"/>
+          </a:xfrm>
+        </p:spPr>
+        <p:txBody>
+          <a:bodyPr vert="horz" lIns="91440" tIns="45720" rIns="91440" bIns="45720" rtlCol="0" anchor="b">
+            <a:normAutofit/>
+          </a:bodyPr>
+          <a:lstStyle>
+            <a:lvl1pPr>
+              <a:buNone/>
+              <a:defRPr lang="en-US" sz="2400" b="0" cap="all" dirty="0">
+                <a:ln w="3175" cmpd="sng">
+                  <a:noFill/>
+                </a:ln>
+                <a:solidFill>
+                  <a:schemeClr val="tx1"/>
+                </a:solidFill>
+                <a:effectLst/>
+              </a:defRPr>
+            </a:lvl1pPr>
+          </a:lstStyle>
+          <a:p>
+            <a:pPr marL="0" lvl="0">
+              <a:spcBef>
+                <a:spcPct val="0"/>
+              </a:spcBef>
+              <a:buNone/>
+            </a:pPr>
+            <a:r>
+              <a:rPr lang="ja-JP" altLang="en-US"/>
+              <a:t>マスター テキストの書式設定</a:t>
+            </a:r>
+          </a:p>
+        </p:txBody>
+      </p:sp>
+      <p:sp>
+        <p:nvSpPr>
+          <p:cNvPr id="3" name="Text Placeholder 2"/>
+          <p:cNvSpPr>
+            <a:spLocks noGrp="1"/>
+          </p:cNvSpPr>
+          <p:nvPr>
+            <p:ph type="body" idx="1"/>
+          </p:nvPr>
+        </p:nvSpPr>
+        <p:spPr>
+          <a:xfrm>
+            <a:off x="684211" y="4978400"/>
+            <a:ext cx="8534401" cy="1016000"/>
+          </a:xfrm>
+        </p:spPr>
+        <p:txBody>
+          <a:bodyPr anchor="t">
+            <a:normAutofit/>
+          </a:bodyPr>
+          <a:lstStyle>
+            <a:lvl1pPr marL="0" indent="0" algn="l">
+              <a:buNone/>
+              <a:defRPr sz="1800">
+                <a:solidFill>
+                  <a:schemeClr val="bg2">
+                    <a:lumMod val="75000"/>
+                  </a:schemeClr>
+                </a:solidFill>
+              </a:defRPr>
+            </a:lvl1pPr>
+            <a:lvl2pPr marL="457200" indent="0">
+              <a:buNone/>
+              <a:defRPr sz="1800">
+                <a:solidFill>
+                  <a:schemeClr val="tx1">
+                    <a:tint val="75000"/>
+                  </a:schemeClr>
+                </a:solidFill>
+              </a:defRPr>
+            </a:lvl2pPr>
+            <a:lvl3pPr marL="914400" indent="0">
+              <a:buNone/>
+              <a:defRPr sz="1600">
+                <a:solidFill>
+                  <a:schemeClr val="tx1">
+                    <a:tint val="75000"/>
+                  </a:schemeClr>
+                </a:solidFill>
+              </a:defRPr>
+            </a:lvl3pPr>
+            <a:lvl4pPr marL="1371600" indent="0">
+              <a:buNone/>
+              <a:defRPr sz="1400">
+                <a:solidFill>
+                  <a:schemeClr val="tx1">
+                    <a:tint val="75000"/>
+                  </a:schemeClr>
+                </a:solidFill>
+              </a:defRPr>
+            </a:lvl4pPr>
+            <a:lvl5pPr marL="1828800" indent="0">
+              <a:buNone/>
+              <a:defRPr sz="1400">
+                <a:solidFill>
+                  <a:schemeClr val="tx1">
+                    <a:tint val="75000"/>
+                  </a:schemeClr>
+                </a:solidFill>
+              </a:defRPr>
+            </a:lvl5pPr>
+            <a:lvl6pPr marL="2286000" indent="0">
+              <a:buNone/>
+              <a:defRPr sz="1400">
+                <a:solidFill>
+                  <a:schemeClr val="tx1">
+                    <a:tint val="75000"/>
+                  </a:schemeClr>
+                </a:solidFill>
+              </a:defRPr>
+            </a:lvl6pPr>
+            <a:lvl7pPr marL="2743200" indent="0">
+              <a:buNone/>
+              <a:defRPr sz="1400">
+                <a:solidFill>
+                  <a:schemeClr val="tx1">
+                    <a:tint val="75000"/>
+                  </a:schemeClr>
+                </a:solidFill>
+              </a:defRPr>
+            </a:lvl7pPr>
+            <a:lvl8pPr marL="3200400" indent="0">
+              <a:buNone/>
+              <a:defRPr sz="1400">
+                <a:solidFill>
+                  <a:schemeClr val="tx1">
+                    <a:tint val="75000"/>
+                  </a:schemeClr>
+                </a:solidFill>
+              </a:defRPr>
+            </a:lvl8pPr>
+            <a:lvl9pPr marL="3657600" indent="0">
+              <a:buNone/>
+              <a:defRPr sz="1400">
+                <a:solidFill>
+                  <a:schemeClr val="tx1">
+                    <a:tint val="75000"/>
+                  </a:schemeClr>
+                </a:solidFill>
+              </a:defRPr>
+            </a:lvl9pPr>
+          </a:lstStyle>
+          <a:p>
+            <a:pPr lvl="0"/>
+            <a:r>
+              <a:rPr lang="ja-JP" altLang="en-US"/>
+              <a:t>マスター テキストの書式設定</a:t>
+            </a:r>
+          </a:p>
+        </p:txBody>
+      </p:sp>
+      <p:sp>
+        <p:nvSpPr>
+          <p:cNvPr id="4" name="Date Placeholder 3"/>
+          <p:cNvSpPr>
+            <a:spLocks noGrp="1"/>
+          </p:cNvSpPr>
+          <p:nvPr>
+            <p:ph type="dt" sz="half" idx="10"/>
+          </p:nvPr>
+        </p:nvSpPr>
+        <p:spPr/>
+        <p:txBody>
+          <a:bodyPr/>
+          <a:lstStyle/>
+          <a:p>
+            <a:fld id="{48A87A34-81AB-432B-8DAE-1953F412C126}" type="datetimeFigureOut">
+              <a:rPr lang="en-US" smtClean="0"/>
+              <a:pPr/>
+              <a:t>3/27/2026</a:t>
+            </a:fld>
+            <a:endParaRPr lang="en-US" dirty="0"/>
+          </a:p>
+        </p:txBody>
+      </p:sp>
+      <p:sp>
+        <p:nvSpPr>
+          <p:cNvPr id="5" name="Footer Placeholder 4"/>
+          <p:cNvSpPr>
+            <a:spLocks noGrp="1"/>
+          </p:cNvSpPr>
+          <p:nvPr>
+            <p:ph type="ftr" sz="quarter" idx="11"/>
+          </p:nvPr>
+        </p:nvSpPr>
+        <p:spPr/>
+        <p:txBody>
+          <a:bodyPr/>
+          <a:lstStyle/>
+          <a:p>
+            <a:endParaRPr lang="en-US" dirty="0"/>
+          </a:p>
+        </p:txBody>
+      </p:sp>
+      <p:sp>
+        <p:nvSpPr>
+          <p:cNvPr id="6" name="Slide Number Placeholder 5"/>
+          <p:cNvSpPr>
+            <a:spLocks noGrp="1"/>
+          </p:cNvSpPr>
+          <p:nvPr>
+            <p:ph type="sldNum" sz="quarter" idx="12"/>
+          </p:nvPr>
+        </p:nvSpPr>
+        <p:spPr/>
+        <p:txBody>
+          <a:bodyPr/>
+          <a:lstStyle/>
+          <a:p>
+            <a:fld id="{6D22F896-40B5-4ADD-8801-0D06FADFA095}" type="slidenum">
+              <a:rPr lang="en-US" smtClean="0"/>
+              <a:pPr/>
+              <a:t>‹#›</a:t>
+            </a:fld>
+            <a:endParaRPr lang="en-US" dirty="0"/>
+          </a:p>
+        </p:txBody>
+      </p:sp>
+      <p:sp>
+        <p:nvSpPr>
+          <p:cNvPr id="11" name="TextBox 10"/>
+          <p:cNvSpPr txBox="1"/>
+          <p:nvPr/>
+        </p:nvSpPr>
+        <p:spPr>
+          <a:xfrm>
+            <a:off x="531812" y="812222"/>
+            <a:ext cx="609600" cy="584776"/>
+          </a:xfrm>
+          <a:prstGeom prst="rect">
+            <a:avLst/>
+          </a:prstGeom>
+        </p:spPr>
+        <p:txBody>
+          <a:bodyPr vert="horz" lIns="91440" tIns="45720" rIns="91440" bIns="45720" rtlCol="0" anchor="ctr">
+            <a:noAutofit/>
+          </a:bodyPr>
+          <a:lstStyle/>
+          <a:p>
+            <a:pPr lvl="0"/>
+            <a:r>
+              <a:rPr lang="en-US" sz="8000" dirty="0">
+                <a:solidFill>
+                  <a:schemeClr val="tx1"/>
+                </a:solidFill>
+                <a:effectLst/>
+              </a:rPr>
+              <a:t>“</a:t>
+            </a:r>
+          </a:p>
+        </p:txBody>
+      </p:sp>
+      <p:sp>
+        <p:nvSpPr>
+          <p:cNvPr id="12" name="TextBox 11"/>
+          <p:cNvSpPr txBox="1"/>
+          <p:nvPr/>
+        </p:nvSpPr>
+        <p:spPr>
+          <a:xfrm>
+            <a:off x="10285412" y="2768601"/>
+            <a:ext cx="609600" cy="584776"/>
+          </a:xfrm>
+          <a:prstGeom prst="rect">
+            <a:avLst/>
+          </a:prstGeom>
+        </p:spPr>
+        <p:txBody>
+          <a:bodyPr vert="horz" lIns="91440" tIns="45720" rIns="91440" bIns="45720" rtlCol="0" anchor="ctr">
+            <a:noAutofit/>
+          </a:bodyPr>
+          <a:lstStyle/>
+          <a:p>
+            <a:pPr lvl="0" algn="r"/>
+            <a:r>
+              <a:rPr lang="en-US" sz="8000" dirty="0">
+                <a:solidFill>
+                  <a:schemeClr val="tx1"/>
+                </a:solidFill>
+                <a:effectLst/>
+              </a:rPr>
+              <a:t>”</a:t>
+            </a:r>
+          </a:p>
+        </p:txBody>
+      </p:sp>
+    </p:spTree>
+    <p:extLst>
+      <p:ext uri="{BB962C8B-B14F-4D97-AF65-F5344CB8AC3E}">
+        <p14:creationId xmlns:p14="http://schemas.microsoft.com/office/powerpoint/2010/main" val="3387084246"/>
+      </p:ext>
+    </p:extLst>
+  </p:cSld>
+  <p:clrMapOvr>
+    <a:masterClrMapping/>
+  </p:clrMapOvr>
+</p:sldLayout>
+</file>
+
+<file path=ppt/slideLayouts/slideLayout15.xml><?xml version="1.0" encoding="utf-8"?>
+<p:sldLayout xmlns:a="http://schemas.openxmlformats.org/drawingml/2006/main" xmlns:r="http://schemas.openxmlformats.org/officeDocument/2006/relationships" xmlns:p="http://schemas.openxmlformats.org/presentationml/2006/main" preserve="1">
+  <p:cSld name="真または偽">
+    <p:spTree>
+      <p:nvGrpSpPr>
+        <p:cNvPr id="1" name=""/>
+        <p:cNvGrpSpPr/>
+        <p:nvPr/>
+      </p:nvGrpSpPr>
+      <p:grpSpPr>
+        <a:xfrm>
+          <a:off x="0" y="0"/>
+          <a:ext cx="0" cy="0"/>
+          <a:chOff x="0" y="0"/>
+          <a:chExt cx="0" cy="0"/>
+        </a:xfrm>
+      </p:grpSpPr>
+      <p:sp>
+        <p:nvSpPr>
+          <p:cNvPr id="2" name="Title 1"/>
+          <p:cNvSpPr>
+            <a:spLocks noGrp="1"/>
+          </p:cNvSpPr>
+          <p:nvPr>
+            <p:ph type="title"/>
+          </p:nvPr>
+        </p:nvSpPr>
+        <p:spPr>
+          <a:xfrm>
+            <a:off x="684213" y="685800"/>
+            <a:ext cx="10058400" cy="2743200"/>
+          </a:xfrm>
+        </p:spPr>
+        <p:txBody>
+          <a:bodyPr vert="horz" lIns="91440" tIns="45720" rIns="91440" bIns="45720" rtlCol="0" anchor="ctr">
+            <a:normAutofit/>
+          </a:bodyPr>
+          <a:lstStyle>
+            <a:lvl1pPr>
+              <a:defRPr lang="en-US" b="0" dirty="0"/>
+            </a:lvl1pPr>
+          </a:lstStyle>
+          <a:p>
+            <a:pPr marL="0" lvl="0"/>
+            <a:r>
+              <a:rPr lang="ja-JP" altLang="en-US"/>
+              <a:t>マスター タイトルの書式設定</a:t>
+            </a:r>
+            <a:endParaRPr lang="en-US" dirty="0"/>
+          </a:p>
+        </p:txBody>
+      </p:sp>
+      <p:sp>
+        <p:nvSpPr>
+          <p:cNvPr id="10" name="Text Placeholder 9"/>
+          <p:cNvSpPr>
+            <a:spLocks noGrp="1"/>
+          </p:cNvSpPr>
+          <p:nvPr>
+            <p:ph type="body" sz="quarter" idx="13"/>
+          </p:nvPr>
+        </p:nvSpPr>
+        <p:spPr>
+          <a:xfrm>
+            <a:off x="684212" y="3928534"/>
+            <a:ext cx="8534400" cy="838200"/>
+          </a:xfrm>
+        </p:spPr>
+        <p:txBody>
+          <a:bodyPr vert="horz" lIns="91440" tIns="45720" rIns="91440" bIns="45720" rtlCol="0" anchor="b">
+            <a:normAutofit/>
+          </a:bodyPr>
+          <a:lstStyle>
+            <a:lvl1pPr>
+              <a:buNone/>
+              <a:defRPr lang="en-US" sz="2400" b="0" cap="all" dirty="0">
+                <a:ln w="3175" cmpd="sng">
+                  <a:noFill/>
+                </a:ln>
+                <a:solidFill>
+                  <a:schemeClr val="tx1"/>
+                </a:solidFill>
+                <a:effectLst/>
+              </a:defRPr>
+            </a:lvl1pPr>
+          </a:lstStyle>
+          <a:p>
+            <a:pPr marL="0" lvl="0">
+              <a:spcBef>
+                <a:spcPct val="0"/>
+              </a:spcBef>
+              <a:buNone/>
+            </a:pPr>
+            <a:r>
+              <a:rPr lang="ja-JP" altLang="en-US"/>
+              <a:t>マスター テキストの書式設定</a:t>
+            </a:r>
+          </a:p>
+        </p:txBody>
+      </p:sp>
+      <p:sp>
+        <p:nvSpPr>
+          <p:cNvPr id="3" name="Text Placeholder 2"/>
+          <p:cNvSpPr>
+            <a:spLocks noGrp="1"/>
+          </p:cNvSpPr>
+          <p:nvPr>
+            <p:ph type="body" idx="1"/>
+          </p:nvPr>
+        </p:nvSpPr>
+        <p:spPr>
+          <a:xfrm>
+            <a:off x="684211" y="4766732"/>
+            <a:ext cx="8534401" cy="1227667"/>
+          </a:xfrm>
+        </p:spPr>
+        <p:txBody>
+          <a:bodyPr anchor="t">
+            <a:normAutofit/>
+          </a:bodyPr>
+          <a:lstStyle>
+            <a:lvl1pPr marL="0" indent="0" algn="l">
+              <a:buNone/>
+              <a:defRPr sz="1800">
+                <a:solidFill>
+                  <a:schemeClr val="bg2">
+                    <a:lumMod val="75000"/>
+                  </a:schemeClr>
+                </a:solidFill>
+              </a:defRPr>
+            </a:lvl1pPr>
+            <a:lvl2pPr marL="457200" indent="0">
+              <a:buNone/>
+              <a:defRPr sz="1800">
+                <a:solidFill>
+                  <a:schemeClr val="tx1">
+                    <a:tint val="75000"/>
+                  </a:schemeClr>
+                </a:solidFill>
+              </a:defRPr>
+            </a:lvl2pPr>
+            <a:lvl3pPr marL="914400" indent="0">
+              <a:buNone/>
+              <a:defRPr sz="1600">
+                <a:solidFill>
+                  <a:schemeClr val="tx1">
+                    <a:tint val="75000"/>
+                  </a:schemeClr>
+                </a:solidFill>
+              </a:defRPr>
+            </a:lvl3pPr>
+            <a:lvl4pPr marL="1371600" indent="0">
+              <a:buNone/>
+              <a:defRPr sz="1400">
+                <a:solidFill>
+                  <a:schemeClr val="tx1">
+                    <a:tint val="75000"/>
+                  </a:schemeClr>
+                </a:solidFill>
+              </a:defRPr>
+            </a:lvl4pPr>
+            <a:lvl5pPr marL="1828800" indent="0">
+              <a:buNone/>
+              <a:defRPr sz="1400">
+                <a:solidFill>
+                  <a:schemeClr val="tx1">
+                    <a:tint val="75000"/>
+                  </a:schemeClr>
+                </a:solidFill>
+              </a:defRPr>
+            </a:lvl5pPr>
+            <a:lvl6pPr marL="2286000" indent="0">
+              <a:buNone/>
+              <a:defRPr sz="1400">
+                <a:solidFill>
+                  <a:schemeClr val="tx1">
+                    <a:tint val="75000"/>
+                  </a:schemeClr>
+                </a:solidFill>
+              </a:defRPr>
+            </a:lvl6pPr>
+            <a:lvl7pPr marL="2743200" indent="0">
+              <a:buNone/>
+              <a:defRPr sz="1400">
+                <a:solidFill>
+                  <a:schemeClr val="tx1">
+                    <a:tint val="75000"/>
+                  </a:schemeClr>
+                </a:solidFill>
+              </a:defRPr>
+            </a:lvl7pPr>
+            <a:lvl8pPr marL="3200400" indent="0">
+              <a:buNone/>
+              <a:defRPr sz="1400">
+                <a:solidFill>
+                  <a:schemeClr val="tx1">
+                    <a:tint val="75000"/>
+                  </a:schemeClr>
+                </a:solidFill>
+              </a:defRPr>
+            </a:lvl8pPr>
+            <a:lvl9pPr marL="3657600" indent="0">
+              <a:buNone/>
+              <a:defRPr sz="1400">
+                <a:solidFill>
+                  <a:schemeClr val="tx1">
+                    <a:tint val="75000"/>
+                  </a:schemeClr>
+                </a:solidFill>
+              </a:defRPr>
+            </a:lvl9pPr>
+          </a:lstStyle>
+          <a:p>
+            <a:pPr lvl="0"/>
+            <a:r>
+              <a:rPr lang="ja-JP" altLang="en-US"/>
+              <a:t>マスター テキストの書式設定</a:t>
+            </a:r>
+          </a:p>
+        </p:txBody>
+      </p:sp>
+      <p:sp>
+        <p:nvSpPr>
+          <p:cNvPr id="4" name="Date Placeholder 3"/>
+          <p:cNvSpPr>
+            <a:spLocks noGrp="1"/>
+          </p:cNvSpPr>
+          <p:nvPr>
+            <p:ph type="dt" sz="half" idx="10"/>
+          </p:nvPr>
+        </p:nvSpPr>
+        <p:spPr/>
+        <p:txBody>
+          <a:bodyPr/>
+          <a:lstStyle/>
+          <a:p>
+            <a:fld id="{48A87A34-81AB-432B-8DAE-1953F412C126}" type="datetimeFigureOut">
+              <a:rPr lang="en-US" smtClean="0"/>
+              <a:pPr/>
+              <a:t>3/27/2026</a:t>
+            </a:fld>
+            <a:endParaRPr lang="en-US" dirty="0"/>
+          </a:p>
+        </p:txBody>
+      </p:sp>
+      <p:sp>
+        <p:nvSpPr>
+          <p:cNvPr id="5" name="Footer Placeholder 4"/>
+          <p:cNvSpPr>
+            <a:spLocks noGrp="1"/>
+          </p:cNvSpPr>
+          <p:nvPr>
+            <p:ph type="ftr" sz="quarter" idx="11"/>
+          </p:nvPr>
+        </p:nvSpPr>
+        <p:spPr/>
+        <p:txBody>
+          <a:bodyPr/>
+          <a:lstStyle/>
+          <a:p>
+            <a:endParaRPr lang="en-US" dirty="0"/>
+          </a:p>
+        </p:txBody>
+      </p:sp>
+      <p:sp>
+        <p:nvSpPr>
+          <p:cNvPr id="6" name="Slide Number Placeholder 5"/>
+          <p:cNvSpPr>
+            <a:spLocks noGrp="1"/>
+          </p:cNvSpPr>
+          <p:nvPr>
+            <p:ph type="sldNum" sz="quarter" idx="12"/>
+          </p:nvPr>
+        </p:nvSpPr>
+        <p:spPr/>
+        <p:txBody>
+          <a:bodyPr/>
+          <a:lstStyle/>
+          <a:p>
+            <a:fld id="{6D22F896-40B5-4ADD-8801-0D06FADFA095}" type="slidenum">
+              <a:rPr lang="en-US" smtClean="0"/>
+              <a:pPr/>
+              <a:t>‹#›</a:t>
+            </a:fld>
+            <a:endParaRPr lang="en-US" dirty="0"/>
+          </a:p>
+        </p:txBody>
+      </p:sp>
+    </p:spTree>
+    <p:extLst>
+      <p:ext uri="{BB962C8B-B14F-4D97-AF65-F5344CB8AC3E}">
+        <p14:creationId xmlns:p14="http://schemas.microsoft.com/office/powerpoint/2010/main" val="1694615091"/>
+      </p:ext>
+    </p:extLst>
+  </p:cSld>
+  <p:clrMapOvr>
+    <a:masterClrMapping/>
+  </p:clrMapOvr>
+</p:sldLayout>
+</file>
+
+<file path=ppt/slideLayouts/slideLayout16.xml><?xml version="1.0" encoding="utf-8"?>
 <p:sldLayout xmlns:a="http://schemas.openxmlformats.org/drawingml/2006/main" xmlns:r="http://schemas.openxmlformats.org/officeDocument/2006/relationships" xmlns:p="http://schemas.openxmlformats.org/presentationml/2006/main" type="vertTx" preserve="1">
   <p:cSld name="タイトルと縦書きテキスト">
     <p:spTree>
@@ -373,7 +2390,11 @@
         <p:spPr/>
         <p:txBody>
           <a:bodyPr/>
-          <a:lstStyle/>
+          <a:lstStyle>
+            <a:lvl1pPr algn="l">
+              <a:defRPr/>
+            </a:lvl1pPr>
+          </a:lstStyle>
           <a:p>
             <a:r>
               <a:rPr lang="ja-JP" altLang="en-US"/>
@@ -395,7 +2416,7 @@
         </p:nvSpPr>
         <p:spPr/>
         <p:txBody>
-          <a:bodyPr vert="eaVert"/>
+          <a:bodyPr vert="eaVert" anchor="t"/>
           <a:lstStyle/>
           <a:p>
             <a:pPr lvl="0"/>
@@ -483,8 +2504,8 @@
           <a:lstStyle/>
           <a:p>
             <a:fld id="{48A87A34-81AB-432B-8DAE-1953F412C126}" type="datetimeFigureOut">
-              <a:rPr lang="en-US" dirty="0"/>
-              <a:t>3/26/26</a:t>
+              <a:rPr lang="en-US" smtClean="0"/>
+              <a:t>3/27/2026</a:t>
             </a:fld>
             <a:endParaRPr lang="en-US" dirty="0"/>
           </a:p>
@@ -525,45 +2546,19 @@
           <a:lstStyle/>
           <a:p>
             <a:fld id="{6D22F896-40B5-4ADD-8801-0D06FADFA095}" type="slidenum">
-              <a:rPr lang="en-US" dirty="0"/>
+              <a:rPr lang="en-US" smtClean="0"/>
               <a:t>‹#›</a:t>
             </a:fld>
             <a:endParaRPr lang="en-US" dirty="0"/>
           </a:p>
         </p:txBody>
       </p:sp>
-      <p:cxnSp>
-        <p:nvCxnSpPr>
-          <p:cNvPr id="26" name="Straight Connector 25"/>
-          <p:cNvCxnSpPr/>
-          <p:nvPr/>
-        </p:nvCxnSpPr>
-        <p:spPr>
-          <a:xfrm>
-            <a:off x="1453896" y="1847088"/>
-            <a:ext cx="9607522" cy="0"/>
-          </a:xfrm>
-          <a:prstGeom prst="line">
-            <a:avLst/>
-          </a:prstGeom>
-          <a:ln w="31750"/>
-        </p:spPr>
-        <p:style>
-          <a:lnRef idx="3">
-            <a:schemeClr val="accent1"/>
-          </a:lnRef>
-          <a:fillRef idx="0">
-            <a:schemeClr val="accent1"/>
-          </a:fillRef>
-          <a:effectRef idx="2">
-            <a:schemeClr val="accent1"/>
-          </a:effectRef>
-          <a:fontRef idx="minor">
-            <a:schemeClr val="tx1"/>
-          </a:fontRef>
-        </p:style>
-      </p:cxnSp>
     </p:spTree>
+    <p:extLst>
+      <p:ext uri="{BB962C8B-B14F-4D97-AF65-F5344CB8AC3E}">
+        <p14:creationId xmlns:p14="http://schemas.microsoft.com/office/powerpoint/2010/main" val="3946407998"/>
+      </p:ext>
+    </p:extLst>
   </p:cSld>
   <p:clrMapOvr>
     <a:masterClrMapping/>
@@ -571,7 +2566,7 @@
 </p:sldLayout>
 </file>
 
-<file path=ppt/slideLayouts/slideLayout11.xml><?xml version="1.0" encoding="utf-8"?>
+<file path=ppt/slideLayouts/slideLayout17.xml><?xml version="1.0" encoding="utf-8"?>
 <p:sldLayout xmlns:a="http://schemas.openxmlformats.org/drawingml/2006/main" xmlns:r="http://schemas.openxmlformats.org/officeDocument/2006/relationships" xmlns:p="http://schemas.openxmlformats.org/presentationml/2006/main" type="vertTitleAndTx" preserve="1">
   <p:cSld name="縦書きタイトルと&#10;縦書きテキスト">
     <p:spTree>
@@ -600,17 +2595,13 @@
         </p:nvSpPr>
         <p:spPr>
           <a:xfrm>
-            <a:off x="9439111" y="798973"/>
-            <a:ext cx="1615742" cy="4659889"/>
+            <a:off x="8685212" y="685800"/>
+            <a:ext cx="2057400" cy="4572000"/>
           </a:xfrm>
         </p:spPr>
         <p:txBody>
           <a:bodyPr vert="eaVert"/>
-          <a:lstStyle>
-            <a:lvl1pPr algn="l">
-              <a:defRPr/>
-            </a:lvl1pPr>
-          </a:lstStyle>
+          <a:lstStyle/>
           <a:p>
             <a:r>
               <a:rPr lang="ja-JP" altLang="en-US"/>
@@ -632,12 +2623,12 @@
         </p:nvSpPr>
         <p:spPr>
           <a:xfrm>
-            <a:off x="1444672" y="798973"/>
-            <a:ext cx="7828830" cy="4659889"/>
+            <a:off x="685800" y="685800"/>
+            <a:ext cx="7823200" cy="5308600"/>
           </a:xfrm>
         </p:spPr>
         <p:txBody>
-          <a:bodyPr vert="eaVert"/>
+          <a:bodyPr vert="eaVert" anchor="t"/>
           <a:lstStyle/>
           <a:p>
             <a:pPr lvl="0"/>
@@ -725,8 +2716,8 @@
           <a:lstStyle/>
           <a:p>
             <a:fld id="{48A87A34-81AB-432B-8DAE-1953F412C126}" type="datetimeFigureOut">
-              <a:rPr lang="en-US" dirty="0"/>
-              <a:t>3/26/26</a:t>
+              <a:rPr lang="en-US" smtClean="0"/>
+              <a:t>3/27/2026</a:t>
             </a:fld>
             <a:endParaRPr lang="en-US" dirty="0"/>
           </a:p>
@@ -767,45 +2758,19 @@
           <a:lstStyle/>
           <a:p>
             <a:fld id="{6D22F896-40B5-4ADD-8801-0D06FADFA095}" type="slidenum">
-              <a:rPr lang="en-US" dirty="0"/>
+              <a:rPr lang="en-US" smtClean="0"/>
               <a:t>‹#›</a:t>
             </a:fld>
             <a:endParaRPr lang="en-US" dirty="0"/>
           </a:p>
         </p:txBody>
       </p:sp>
-      <p:cxnSp>
-        <p:nvCxnSpPr>
-          <p:cNvPr id="15" name="Straight Connector 14"/>
-          <p:cNvCxnSpPr/>
-          <p:nvPr/>
-        </p:nvCxnSpPr>
-        <p:spPr>
-          <a:xfrm>
-            <a:off x="9439111" y="798973"/>
-            <a:ext cx="0" cy="4659889"/>
-          </a:xfrm>
-          <a:prstGeom prst="line">
-            <a:avLst/>
-          </a:prstGeom>
-          <a:ln w="31750"/>
-        </p:spPr>
-        <p:style>
-          <a:lnRef idx="3">
-            <a:schemeClr val="accent1"/>
-          </a:lnRef>
-          <a:fillRef idx="0">
-            <a:schemeClr val="accent1"/>
-          </a:fillRef>
-          <a:effectRef idx="2">
-            <a:schemeClr val="accent1"/>
-          </a:effectRef>
-          <a:fontRef idx="minor">
-            <a:schemeClr val="tx1"/>
-          </a:fontRef>
-        </p:style>
-      </p:cxnSp>
     </p:spTree>
+    <p:extLst>
+      <p:ext uri="{BB962C8B-B14F-4D97-AF65-F5344CB8AC3E}">
+        <p14:creationId xmlns:p14="http://schemas.microsoft.com/office/powerpoint/2010/main" val="439989304"/>
+      </p:ext>
+    </p:extLst>
   </p:cSld>
   <p:clrMapOvr>
     <a:masterClrMapping/>
@@ -865,7 +2830,7 @@
         </p:nvSpPr>
         <p:spPr/>
         <p:txBody>
-          <a:bodyPr anchor="t"/>
+          <a:bodyPr anchor="ctr"/>
           <a:lstStyle/>
           <a:p>
             <a:pPr lvl="0"/>
@@ -953,8 +2918,9 @@
           <a:lstStyle/>
           <a:p>
             <a:fld id="{48A87A34-81AB-432B-8DAE-1953F412C126}" type="datetimeFigureOut">
-              <a:rPr lang="en-US" dirty="0"/>
-              <a:t>3/26/26</a:t>
+              <a:rPr lang="en-US" smtClean="0"/>
+              <a:pPr/>
+              <a:t>3/27/2026</a:t>
             </a:fld>
             <a:endParaRPr lang="en-US" dirty="0"/>
           </a:p>
@@ -995,45 +2961,20 @@
           <a:lstStyle/>
           <a:p>
             <a:fld id="{6D22F896-40B5-4ADD-8801-0D06FADFA095}" type="slidenum">
-              <a:rPr lang="en-US" dirty="0"/>
+              <a:rPr lang="en-US" smtClean="0"/>
+              <a:pPr/>
               <a:t>‹#›</a:t>
             </a:fld>
             <a:endParaRPr lang="en-US" dirty="0"/>
           </a:p>
         </p:txBody>
       </p:sp>
-      <p:cxnSp>
-        <p:nvCxnSpPr>
-          <p:cNvPr id="33" name="Straight Connector 32"/>
-          <p:cNvCxnSpPr/>
-          <p:nvPr/>
-        </p:nvCxnSpPr>
-        <p:spPr>
-          <a:xfrm>
-            <a:off x="1453896" y="1847088"/>
-            <a:ext cx="9607522" cy="0"/>
-          </a:xfrm>
-          <a:prstGeom prst="line">
-            <a:avLst/>
-          </a:prstGeom>
-          <a:ln w="31750"/>
-        </p:spPr>
-        <p:style>
-          <a:lnRef idx="3">
-            <a:schemeClr val="accent1"/>
-          </a:lnRef>
-          <a:fillRef idx="0">
-            <a:schemeClr val="accent1"/>
-          </a:fillRef>
-          <a:effectRef idx="2">
-            <a:schemeClr val="accent1"/>
-          </a:effectRef>
-          <a:fontRef idx="minor">
-            <a:schemeClr val="tx1"/>
-          </a:fontRef>
-        </p:style>
-      </p:cxnSp>
     </p:spTree>
+    <p:extLst>
+      <p:ext uri="{BB962C8B-B14F-4D97-AF65-F5344CB8AC3E}">
+        <p14:creationId xmlns:p14="http://schemas.microsoft.com/office/powerpoint/2010/main" val="2948620026"/>
+      </p:ext>
+    </p:extLst>
   </p:cSld>
   <p:clrMapOvr>
     <a:masterClrMapping/>
@@ -1070,8 +3011,8 @@
         </p:nvSpPr>
         <p:spPr>
           <a:xfrm>
-            <a:off x="1454239" y="1756130"/>
-            <a:ext cx="8643154" cy="1887950"/>
+            <a:off x="684211" y="2006600"/>
+            <a:ext cx="8534401" cy="2281600"/>
           </a:xfrm>
         </p:spPr>
         <p:txBody>
@@ -1080,7 +3021,7 @@
           </a:bodyPr>
           <a:lstStyle>
             <a:lvl1pPr algn="l">
-              <a:defRPr sz="3600"/>
+              <a:defRPr sz="3600" b="0" cap="all"/>
             </a:lvl1pPr>
           </a:lstStyle>
           <a:p>
@@ -1104,12 +3045,12 @@
         </p:nvSpPr>
         <p:spPr>
           <a:xfrm>
-            <a:off x="1454239" y="3806195"/>
-            <a:ext cx="8630446" cy="1012929"/>
+            <a:off x="684213" y="4495800"/>
+            <a:ext cx="8534400" cy="1498600"/>
           </a:xfrm>
         </p:spPr>
         <p:txBody>
-          <a:bodyPr tIns="91440">
+          <a:bodyPr anchor="t">
             <a:normAutofit/>
           </a:bodyPr>
           <a:lstStyle>
@@ -1117,7 +3058,9 @@
               <a:buNone/>
               <a:defRPr sz="1800">
                 <a:solidFill>
-                  <a:schemeClr val="tx1"/>
+                  <a:schemeClr val="bg2">
+                    <a:lumMod val="75000"/>
+                  </a:schemeClr>
                 </a:solidFill>
               </a:defRPr>
             </a:lvl1pPr>
@@ -1133,7 +3076,7 @@
             </a:lvl2pPr>
             <a:lvl3pPr marL="914400" indent="0">
               <a:buNone/>
-              <a:defRPr sz="1800">
+              <a:defRPr sz="1600">
                 <a:solidFill>
                   <a:schemeClr val="tx1">
                     <a:tint val="75000"/>
@@ -1143,7 +3086,7 @@
             </a:lvl3pPr>
             <a:lvl4pPr marL="1371600" indent="0">
               <a:buNone/>
-              <a:defRPr sz="1600">
+              <a:defRPr sz="1400">
                 <a:solidFill>
                   <a:schemeClr val="tx1">
                     <a:tint val="75000"/>
@@ -1153,7 +3096,7 @@
             </a:lvl4pPr>
             <a:lvl5pPr marL="1828800" indent="0">
               <a:buNone/>
-              <a:defRPr sz="1600">
+              <a:defRPr sz="1400">
                 <a:solidFill>
                   <a:schemeClr val="tx1">
                     <a:tint val="75000"/>
@@ -1163,7 +3106,7 @@
             </a:lvl5pPr>
             <a:lvl6pPr marL="2286000" indent="0">
               <a:buNone/>
-              <a:defRPr sz="1600">
+              <a:defRPr sz="1400">
                 <a:solidFill>
                   <a:schemeClr val="tx1">
                     <a:tint val="75000"/>
@@ -1173,7 +3116,7 @@
             </a:lvl6pPr>
             <a:lvl7pPr marL="2743200" indent="0">
               <a:buNone/>
-              <a:defRPr sz="1600">
+              <a:defRPr sz="1400">
                 <a:solidFill>
                   <a:schemeClr val="tx1">
                     <a:tint val="75000"/>
@@ -1183,7 +3126,7 @@
             </a:lvl7pPr>
             <a:lvl8pPr marL="3200400" indent="0">
               <a:buNone/>
-              <a:defRPr sz="1600">
+              <a:defRPr sz="1400">
                 <a:solidFill>
                   <a:schemeClr val="tx1">
                     <a:tint val="75000"/>
@@ -1193,7 +3136,7 @@
             </a:lvl8pPr>
             <a:lvl9pPr marL="3657600" indent="0">
               <a:buNone/>
-              <a:defRPr sz="1600">
+              <a:defRPr sz="1400">
                 <a:solidFill>
                   <a:schemeClr val="tx1">
                     <a:tint val="75000"/>
@@ -1227,8 +3170,9 @@
           <a:lstStyle/>
           <a:p>
             <a:fld id="{48A87A34-81AB-432B-8DAE-1953F412C126}" type="datetimeFigureOut">
-              <a:rPr lang="en-US" dirty="0"/>
-              <a:t>3/26/26</a:t>
+              <a:rPr lang="en-US" smtClean="0"/>
+              <a:pPr/>
+              <a:t>3/27/2026</a:t>
             </a:fld>
             <a:endParaRPr lang="en-US" dirty="0"/>
           </a:p>
@@ -1269,45 +3213,20 @@
           <a:lstStyle/>
           <a:p>
             <a:fld id="{6D22F896-40B5-4ADD-8801-0D06FADFA095}" type="slidenum">
-              <a:rPr lang="en-US" dirty="0"/>
+              <a:rPr lang="en-US" smtClean="0"/>
+              <a:pPr/>
               <a:t>‹#›</a:t>
             </a:fld>
             <a:endParaRPr lang="en-US" dirty="0"/>
           </a:p>
         </p:txBody>
       </p:sp>
-      <p:cxnSp>
-        <p:nvCxnSpPr>
-          <p:cNvPr id="15" name="Straight Connector 14"/>
-          <p:cNvCxnSpPr/>
-          <p:nvPr/>
-        </p:nvCxnSpPr>
-        <p:spPr>
-          <a:xfrm>
-            <a:off x="1454239" y="3804985"/>
-            <a:ext cx="8630446" cy="0"/>
-          </a:xfrm>
-          <a:prstGeom prst="line">
-            <a:avLst/>
-          </a:prstGeom>
-          <a:ln w="31750"/>
-        </p:spPr>
-        <p:style>
-          <a:lnRef idx="3">
-            <a:schemeClr val="accent1"/>
-          </a:lnRef>
-          <a:fillRef idx="0">
-            <a:schemeClr val="accent1"/>
-          </a:fillRef>
-          <a:effectRef idx="2">
-            <a:schemeClr val="accent1"/>
-          </a:effectRef>
-          <a:fontRef idx="minor">
-            <a:schemeClr val="tx1"/>
-          </a:fontRef>
-        </p:style>
-      </p:cxnSp>
     </p:spTree>
+    <p:extLst>
+      <p:ext uri="{BB962C8B-B14F-4D97-AF65-F5344CB8AC3E}">
+        <p14:creationId xmlns:p14="http://schemas.microsoft.com/office/powerpoint/2010/main" val="3684552577"/>
+      </p:ext>
+    </p:extLst>
   </p:cSld>
   <p:clrMapOvr>
     <a:masterClrMapping/>
@@ -1342,42 +3261,130 @@
             <p:ph type="title"/>
           </p:nvPr>
         </p:nvSpPr>
+        <p:spPr/>
+        <p:txBody>
+          <a:bodyPr/>
+          <a:lstStyle/>
+          <a:p>
+            <a:r>
+              <a:rPr lang="ja-JP" altLang="en-US"/>
+              <a:t>マスター タイトルの書式設定</a:t>
+            </a:r>
+            <a:endParaRPr lang="en-US" dirty="0"/>
+          </a:p>
+        </p:txBody>
+      </p:sp>
+      <p:sp>
+        <p:nvSpPr>
+          <p:cNvPr id="3" name="Content Placeholder 2"/>
+          <p:cNvSpPr>
+            <a:spLocks noGrp="1"/>
+          </p:cNvSpPr>
+          <p:nvPr>
+            <p:ph sz="half" idx="1"/>
+          </p:nvPr>
+        </p:nvSpPr>
         <p:spPr>
           <a:xfrm>
-            <a:off x="1449217" y="804889"/>
-            <a:ext cx="9605635" cy="1059305"/>
+            <a:off x="684211" y="685800"/>
+            <a:ext cx="4937655" cy="3615267"/>
           </a:xfrm>
         </p:spPr>
         <p:txBody>
-          <a:bodyPr/>
-          <a:lstStyle/>
-          <a:p>
-            <a:r>
-              <a:rPr lang="ja-JP" altLang="en-US"/>
-              <a:t>マスター タイトルの書式設定</a:t>
-            </a:r>
-            <a:endParaRPr lang="en-US" dirty="0"/>
-          </a:p>
-        </p:txBody>
-      </p:sp>
-      <p:sp>
-        <p:nvSpPr>
-          <p:cNvPr id="3" name="Content Placeholder 2"/>
-          <p:cNvSpPr>
-            <a:spLocks noGrp="1"/>
-          </p:cNvSpPr>
-          <p:nvPr>
-            <p:ph sz="half" idx="1"/>
+          <a:bodyPr>
+            <a:normAutofit/>
+          </a:bodyPr>
+          <a:lstStyle/>
+          <a:p>
+            <a:pPr lvl="0"/>
+            <a:r>
+              <a:rPr lang="ja-JP" altLang="en-US"/>
+              <a:t>マスター テキストの書式設定</a:t>
+            </a:r>
+          </a:p>
+          <a:p>
+            <a:pPr lvl="1"/>
+            <a:r>
+              <a:rPr lang="ja-JP" altLang="en-US"/>
+              <a:t>第 </a:t>
+            </a:r>
+            <a:r>
+              <a:rPr lang="en-US" altLang="ja-JP"/>
+              <a:t>2 </a:t>
+            </a:r>
+            <a:r>
+              <a:rPr lang="ja-JP" altLang="en-US"/>
+              <a:t>レベル</a:t>
+            </a:r>
+          </a:p>
+          <a:p>
+            <a:pPr lvl="2"/>
+            <a:r>
+              <a:rPr lang="ja-JP" altLang="en-US"/>
+              <a:t>第 </a:t>
+            </a:r>
+            <a:r>
+              <a:rPr lang="en-US" altLang="ja-JP"/>
+              <a:t>3 </a:t>
+            </a:r>
+            <a:r>
+              <a:rPr lang="ja-JP" altLang="en-US"/>
+              <a:t>レベル</a:t>
+            </a:r>
+          </a:p>
+          <a:p>
+            <a:pPr lvl="3"/>
+            <a:r>
+              <a:rPr lang="ja-JP" altLang="en-US"/>
+              <a:t>第 </a:t>
+            </a:r>
+            <a:r>
+              <a:rPr lang="en-US" altLang="ja-JP"/>
+              <a:t>4 </a:t>
+            </a:r>
+            <a:r>
+              <a:rPr lang="ja-JP" altLang="en-US"/>
+              <a:t>レベル</a:t>
+            </a:r>
+          </a:p>
+          <a:p>
+            <a:pPr lvl="4"/>
+            <a:r>
+              <a:rPr lang="ja-JP" altLang="en-US"/>
+              <a:t>第 </a:t>
+            </a:r>
+            <a:r>
+              <a:rPr lang="en-US" altLang="ja-JP"/>
+              <a:t>5 </a:t>
+            </a:r>
+            <a:r>
+              <a:rPr lang="ja-JP" altLang="en-US"/>
+              <a:t>レベル</a:t>
+            </a:r>
+            <a:endParaRPr lang="en-US" dirty="0"/>
+          </a:p>
+        </p:txBody>
+      </p:sp>
+      <p:sp>
+        <p:nvSpPr>
+          <p:cNvPr id="4" name="Content Placeholder 3"/>
+          <p:cNvSpPr>
+            <a:spLocks noGrp="1"/>
+          </p:cNvSpPr>
+          <p:nvPr>
+            <p:ph sz="half" idx="2"/>
           </p:nvPr>
         </p:nvSpPr>
         <p:spPr>
           <a:xfrm>
-            <a:off x="1447331" y="2010878"/>
-            <a:ext cx="4645152" cy="3448595"/>
+            <a:off x="5808133" y="685801"/>
+            <a:ext cx="4934479" cy="3615266"/>
           </a:xfrm>
         </p:spPr>
         <p:txBody>
-          <a:bodyPr/>
+          <a:bodyPr>
+            <a:normAutofit/>
+          </a:bodyPr>
           <a:lstStyle/>
           <a:p>
             <a:pPr lvl="0"/>
@@ -1451,101 +3458,36 @@
       </p:sp>
       <p:sp>
         <p:nvSpPr>
-          <p:cNvPr id="4" name="Content Placeholder 3"/>
-          <p:cNvSpPr>
-            <a:spLocks noGrp="1"/>
-          </p:cNvSpPr>
-          <p:nvPr>
-            <p:ph sz="half" idx="2"/>
-          </p:nvPr>
-        </p:nvSpPr>
-        <p:spPr>
-          <a:xfrm>
-            <a:off x="6413771" y="2017343"/>
-            <a:ext cx="4645152" cy="3441520"/>
-          </a:xfrm>
-        </p:spPr>
+          <p:cNvPr id="5" name="Date Placeholder 4"/>
+          <p:cNvSpPr>
+            <a:spLocks noGrp="1"/>
+          </p:cNvSpPr>
+          <p:nvPr>
+            <p:ph type="dt" sz="half" idx="10"/>
+          </p:nvPr>
+        </p:nvSpPr>
+        <p:spPr/>
         <p:txBody>
           <a:bodyPr/>
           <a:lstStyle/>
           <a:p>
-            <a:pPr lvl="0"/>
-            <a:r>
-              <a:rPr lang="ja-JP" altLang="en-US"/>
-              <a:t>マスター テキストの書式設定</a:t>
-            </a:r>
-          </a:p>
-          <a:p>
-            <a:pPr lvl="1"/>
-            <a:r>
-              <a:rPr lang="ja-JP" altLang="en-US"/>
-              <a:t>第 </a:t>
-            </a:r>
-            <a:r>
-              <a:rPr lang="en-US" altLang="ja-JP"/>
-              <a:t>2 </a:t>
-            </a:r>
-            <a:r>
-              <a:rPr lang="ja-JP" altLang="en-US"/>
-              <a:t>レベル</a:t>
-            </a:r>
-          </a:p>
-          <a:p>
-            <a:pPr lvl="2"/>
-            <a:r>
-              <a:rPr lang="ja-JP" altLang="en-US"/>
-              <a:t>第 </a:t>
-            </a:r>
-            <a:r>
-              <a:rPr lang="en-US" altLang="ja-JP"/>
-              <a:t>3 </a:t>
-            </a:r>
-            <a:r>
-              <a:rPr lang="ja-JP" altLang="en-US"/>
-              <a:t>レベル</a:t>
-            </a:r>
-          </a:p>
-          <a:p>
-            <a:pPr lvl="3"/>
-            <a:r>
-              <a:rPr lang="ja-JP" altLang="en-US"/>
-              <a:t>第 </a:t>
-            </a:r>
-            <a:r>
-              <a:rPr lang="en-US" altLang="ja-JP"/>
-              <a:t>4 </a:t>
-            </a:r>
-            <a:r>
-              <a:rPr lang="ja-JP" altLang="en-US"/>
-              <a:t>レベル</a:t>
-            </a:r>
-          </a:p>
-          <a:p>
-            <a:pPr lvl="4"/>
-            <a:r>
-              <a:rPr lang="ja-JP" altLang="en-US"/>
-              <a:t>第 </a:t>
-            </a:r>
-            <a:r>
-              <a:rPr lang="en-US" altLang="ja-JP"/>
-              <a:t>5 </a:t>
-            </a:r>
-            <a:r>
-              <a:rPr lang="ja-JP" altLang="en-US"/>
-              <a:t>レベル</a:t>
-            </a:r>
-            <a:endParaRPr lang="en-US" dirty="0"/>
-          </a:p>
-        </p:txBody>
-      </p:sp>
-      <p:sp>
-        <p:nvSpPr>
-          <p:cNvPr id="5" name="Date Placeholder 4"/>
-          <p:cNvSpPr>
-            <a:spLocks noGrp="1"/>
-          </p:cNvSpPr>
-          <p:nvPr>
-            <p:ph type="dt" sz="half" idx="10"/>
+            <a:fld id="{48A87A34-81AB-432B-8DAE-1953F412C126}" type="datetimeFigureOut">
+              <a:rPr lang="en-US" smtClean="0"/>
+              <a:pPr/>
+              <a:t>3/27/2026</a:t>
+            </a:fld>
+            <a:endParaRPr lang="en-US" dirty="0"/>
+          </a:p>
+        </p:txBody>
+      </p:sp>
+      <p:sp>
+        <p:nvSpPr>
+          <p:cNvPr id="6" name="Footer Placeholder 5"/>
+          <p:cNvSpPr>
+            <a:spLocks noGrp="1"/>
+          </p:cNvSpPr>
+          <p:nvPr>
+            <p:ph type="ftr" sz="quarter" idx="11"/>
           </p:nvPr>
         </p:nvSpPr>
         <p:spPr/>
@@ -1553,22 +3495,18 @@
           <a:bodyPr/>
           <a:lstStyle/>
           <a:p>
-            <a:fld id="{48A87A34-81AB-432B-8DAE-1953F412C126}" type="datetimeFigureOut">
-              <a:rPr lang="en-US" dirty="0"/>
-              <a:t>3/26/26</a:t>
-            </a:fld>
-            <a:endParaRPr lang="en-US" dirty="0"/>
-          </a:p>
-        </p:txBody>
-      </p:sp>
-      <p:sp>
-        <p:nvSpPr>
-          <p:cNvPr id="6" name="Footer Placeholder 5"/>
-          <p:cNvSpPr>
-            <a:spLocks noGrp="1"/>
-          </p:cNvSpPr>
-          <p:nvPr>
-            <p:ph type="ftr" sz="quarter" idx="11"/>
+            <a:endParaRPr lang="en-US" dirty="0"/>
+          </a:p>
+        </p:txBody>
+      </p:sp>
+      <p:sp>
+        <p:nvSpPr>
+          <p:cNvPr id="7" name="Slide Number Placeholder 6"/>
+          <p:cNvSpPr>
+            <a:spLocks noGrp="1"/>
+          </p:cNvSpPr>
+          <p:nvPr>
+            <p:ph type="sldNum" sz="quarter" idx="12"/>
           </p:nvPr>
         </p:nvSpPr>
         <p:spPr/>
@@ -1576,65 +3514,21 @@
           <a:bodyPr/>
           <a:lstStyle/>
           <a:p>
-            <a:endParaRPr lang="en-US" dirty="0"/>
-          </a:p>
-        </p:txBody>
-      </p:sp>
-      <p:sp>
-        <p:nvSpPr>
-          <p:cNvPr id="7" name="Slide Number Placeholder 6"/>
-          <p:cNvSpPr>
-            <a:spLocks noGrp="1"/>
-          </p:cNvSpPr>
-          <p:nvPr>
-            <p:ph type="sldNum" sz="quarter" idx="12"/>
-          </p:nvPr>
-        </p:nvSpPr>
-        <p:spPr/>
-        <p:txBody>
-          <a:bodyPr/>
-          <a:lstStyle/>
-          <a:p>
             <a:fld id="{6D22F896-40B5-4ADD-8801-0D06FADFA095}" type="slidenum">
-              <a:rPr lang="en-US" dirty="0"/>
+              <a:rPr lang="en-US" smtClean="0"/>
+              <a:pPr/>
               <a:t>‹#›</a:t>
             </a:fld>
             <a:endParaRPr lang="en-US" dirty="0"/>
           </a:p>
         </p:txBody>
       </p:sp>
-      <p:cxnSp>
-        <p:nvCxnSpPr>
-          <p:cNvPr id="35" name="Straight Connector 34"/>
-          <p:cNvCxnSpPr/>
-          <p:nvPr/>
-        </p:nvCxnSpPr>
-        <p:spPr>
-          <a:xfrm>
-            <a:off x="1453896" y="1847088"/>
-            <a:ext cx="9607522" cy="0"/>
-          </a:xfrm>
-          <a:prstGeom prst="line">
-            <a:avLst/>
-          </a:prstGeom>
-          <a:ln w="31750"/>
-        </p:spPr>
-        <p:style>
-          <a:lnRef idx="3">
-            <a:schemeClr val="accent1"/>
-          </a:lnRef>
-          <a:fillRef idx="0">
-            <a:schemeClr val="accent1"/>
-          </a:fillRef>
-          <a:effectRef idx="2">
-            <a:schemeClr val="accent1"/>
-          </a:effectRef>
-          <a:fontRef idx="minor">
-            <a:schemeClr val="tx1"/>
-          </a:fontRef>
-        </p:style>
-      </p:cxnSp>
     </p:spTree>
+    <p:extLst>
+      <p:ext uri="{BB962C8B-B14F-4D97-AF65-F5344CB8AC3E}">
+        <p14:creationId xmlns:p14="http://schemas.microsoft.com/office/powerpoint/2010/main" val="2603366017"/>
+      </p:ext>
+    </p:extLst>
   </p:cSld>
   <p:clrMapOvr>
     <a:masterClrMapping/>
@@ -1669,53 +3563,49 @@
             <p:ph type="title"/>
           </p:nvPr>
         </p:nvSpPr>
+        <p:spPr/>
+        <p:txBody>
+          <a:bodyPr/>
+          <a:lstStyle>
+            <a:lvl1pPr>
+              <a:defRPr/>
+            </a:lvl1pPr>
+          </a:lstStyle>
+          <a:p>
+            <a:r>
+              <a:rPr lang="ja-JP" altLang="en-US"/>
+              <a:t>マスター タイトルの書式設定</a:t>
+            </a:r>
+            <a:endParaRPr lang="en-US" dirty="0"/>
+          </a:p>
+        </p:txBody>
+      </p:sp>
+      <p:sp>
+        <p:nvSpPr>
+          <p:cNvPr id="3" name="Text Placeholder 2"/>
+          <p:cNvSpPr>
+            <a:spLocks noGrp="1"/>
+          </p:cNvSpPr>
+          <p:nvPr>
+            <p:ph type="body" idx="1"/>
+          </p:nvPr>
+        </p:nvSpPr>
         <p:spPr>
           <a:xfrm>
-            <a:off x="1447191" y="804163"/>
-            <a:ext cx="9607661" cy="1056319"/>
+            <a:off x="972080" y="685800"/>
+            <a:ext cx="4649787" cy="576262"/>
           </a:xfrm>
         </p:spPr>
         <p:txBody>
-          <a:bodyPr/>
-          <a:lstStyle/>
-          <a:p>
-            <a:r>
-              <a:rPr lang="ja-JP" altLang="en-US"/>
-              <a:t>マスター タイトルの書式設定</a:t>
-            </a:r>
-            <a:endParaRPr lang="en-US" dirty="0"/>
-          </a:p>
-        </p:txBody>
-      </p:sp>
-      <p:sp>
-        <p:nvSpPr>
-          <p:cNvPr id="3" name="Text Placeholder 2"/>
-          <p:cNvSpPr>
-            <a:spLocks noGrp="1"/>
-          </p:cNvSpPr>
-          <p:nvPr>
-            <p:ph type="body" idx="1"/>
-          </p:nvPr>
-        </p:nvSpPr>
-        <p:spPr>
-          <a:xfrm>
-            <a:off x="1447191" y="2019549"/>
-            <a:ext cx="4645152" cy="801943"/>
-          </a:xfrm>
-        </p:spPr>
-        <p:txBody>
           <a:bodyPr anchor="b">
-            <a:normAutofit/>
+            <a:noAutofit/>
           </a:bodyPr>
           <a:lstStyle>
             <a:lvl1pPr marL="0" indent="0">
-              <a:lnSpc>
-                <a:spcPct val="100000"/>
-              </a:lnSpc>
-              <a:buNone/>
-              <a:defRPr sz="2200" b="0" cap="all" baseline="0">
-                <a:solidFill>
-                  <a:schemeClr val="accent1"/>
+              <a:buNone/>
+              <a:defRPr sz="2800" b="0">
+                <a:solidFill>
+                  <a:schemeClr val="tx1"/>
                 </a:solidFill>
               </a:defRPr>
             </a:lvl1pPr>
@@ -1773,12 +3663,14 @@
         </p:nvSpPr>
         <p:spPr>
           <a:xfrm>
-            <a:off x="1447191" y="2824269"/>
-            <a:ext cx="4645152" cy="2644457"/>
+            <a:off x="684211" y="1270529"/>
+            <a:ext cx="4937655" cy="3030538"/>
           </a:xfrm>
         </p:spPr>
         <p:txBody>
-          <a:bodyPr/>
+          <a:bodyPr anchor="t">
+            <a:normAutofit/>
+          </a:bodyPr>
           <a:lstStyle/>
           <a:p>
             <a:pPr lvl="0"/>
@@ -1862,23 +3754,20 @@
         </p:nvSpPr>
         <p:spPr>
           <a:xfrm>
-            <a:off x="6412362" y="2023003"/>
-            <a:ext cx="4645152" cy="802237"/>
+            <a:off x="6079066" y="685800"/>
+            <a:ext cx="4665134" cy="576262"/>
           </a:xfrm>
         </p:spPr>
         <p:txBody>
           <a:bodyPr anchor="b">
-            <a:normAutofit/>
+            <a:noAutofit/>
           </a:bodyPr>
           <a:lstStyle>
             <a:lvl1pPr marL="0" indent="0">
-              <a:lnSpc>
-                <a:spcPct val="100000"/>
-              </a:lnSpc>
-              <a:buNone/>
-              <a:defRPr sz="2200" b="0" cap="all" baseline="0">
-                <a:solidFill>
-                  <a:schemeClr val="accent1"/>
+              <a:buNone/>
+              <a:defRPr sz="2800" b="0">
+                <a:solidFill>
+                  <a:schemeClr val="tx1"/>
                 </a:solidFill>
               </a:defRPr>
             </a:lvl1pPr>
@@ -1936,12 +3825,14 @@
         </p:nvSpPr>
         <p:spPr>
           <a:xfrm>
-            <a:off x="6412362" y="2821491"/>
-            <a:ext cx="4645152" cy="2637371"/>
+            <a:off x="5806545" y="1262062"/>
+            <a:ext cx="4929188" cy="3030538"/>
           </a:xfrm>
         </p:spPr>
         <p:txBody>
-          <a:bodyPr/>
+          <a:bodyPr anchor="t">
+            <a:normAutofit/>
+          </a:bodyPr>
           <a:lstStyle/>
           <a:p>
             <a:pPr lvl="0"/>
@@ -2029,8 +3920,9 @@
           <a:lstStyle/>
           <a:p>
             <a:fld id="{48A87A34-81AB-432B-8DAE-1953F412C126}" type="datetimeFigureOut">
-              <a:rPr lang="en-US" dirty="0"/>
-              <a:t>3/26/26</a:t>
+              <a:rPr lang="en-US" smtClean="0"/>
+              <a:pPr/>
+              <a:t>3/27/2026</a:t>
             </a:fld>
             <a:endParaRPr lang="en-US" dirty="0"/>
           </a:p>
@@ -2071,45 +3963,20 @@
           <a:lstStyle/>
           <a:p>
             <a:fld id="{6D22F896-40B5-4ADD-8801-0D06FADFA095}" type="slidenum">
-              <a:rPr lang="en-US" dirty="0"/>
+              <a:rPr lang="en-US" smtClean="0"/>
+              <a:pPr/>
               <a:t>‹#›</a:t>
             </a:fld>
             <a:endParaRPr lang="en-US" dirty="0"/>
           </a:p>
         </p:txBody>
       </p:sp>
-      <p:cxnSp>
-        <p:nvCxnSpPr>
-          <p:cNvPr id="29" name="Straight Connector 28"/>
-          <p:cNvCxnSpPr/>
-          <p:nvPr/>
-        </p:nvCxnSpPr>
-        <p:spPr>
-          <a:xfrm>
-            <a:off x="1453896" y="1847088"/>
-            <a:ext cx="9607522" cy="0"/>
-          </a:xfrm>
-          <a:prstGeom prst="line">
-            <a:avLst/>
-          </a:prstGeom>
-          <a:ln w="31750"/>
-        </p:spPr>
-        <p:style>
-          <a:lnRef idx="3">
-            <a:schemeClr val="accent1"/>
-          </a:lnRef>
-          <a:fillRef idx="0">
-            <a:schemeClr val="accent1"/>
-          </a:fillRef>
-          <a:effectRef idx="2">
-            <a:schemeClr val="accent1"/>
-          </a:effectRef>
-          <a:fontRef idx="minor">
-            <a:schemeClr val="tx1"/>
-          </a:fontRef>
-        </p:style>
-      </p:cxnSp>
     </p:spTree>
+    <p:extLst>
+      <p:ext uri="{BB962C8B-B14F-4D97-AF65-F5344CB8AC3E}">
+        <p14:creationId xmlns:p14="http://schemas.microsoft.com/office/powerpoint/2010/main" val="1080330656"/>
+      </p:ext>
+    </p:extLst>
   </p:cSld>
   <p:clrMapOvr>
     <a:masterClrMapping/>
@@ -2173,8 +4040,8 @@
           <a:lstStyle/>
           <a:p>
             <a:fld id="{48A87A34-81AB-432B-8DAE-1953F412C126}" type="datetimeFigureOut">
-              <a:rPr lang="en-US" dirty="0"/>
-              <a:t>3/26/26</a:t>
+              <a:rPr lang="en-US" smtClean="0"/>
+              <a:t>3/27/2026</a:t>
             </a:fld>
             <a:endParaRPr lang="en-US" dirty="0"/>
           </a:p>
@@ -2215,45 +4082,19 @@
           <a:lstStyle/>
           <a:p>
             <a:fld id="{6D22F896-40B5-4ADD-8801-0D06FADFA095}" type="slidenum">
-              <a:rPr lang="en-US" dirty="0"/>
+              <a:rPr lang="en-US" smtClean="0"/>
               <a:t>‹#›</a:t>
             </a:fld>
             <a:endParaRPr lang="en-US" dirty="0"/>
           </a:p>
         </p:txBody>
       </p:sp>
-      <p:cxnSp>
-        <p:nvCxnSpPr>
-          <p:cNvPr id="25" name="Straight Connector 24"/>
-          <p:cNvCxnSpPr/>
-          <p:nvPr/>
-        </p:nvCxnSpPr>
-        <p:spPr>
-          <a:xfrm>
-            <a:off x="1453896" y="1847088"/>
-            <a:ext cx="9607522" cy="0"/>
-          </a:xfrm>
-          <a:prstGeom prst="line">
-            <a:avLst/>
-          </a:prstGeom>
-          <a:ln w="31750"/>
-        </p:spPr>
-        <p:style>
-          <a:lnRef idx="3">
-            <a:schemeClr val="accent1"/>
-          </a:lnRef>
-          <a:fillRef idx="0">
-            <a:schemeClr val="accent1"/>
-          </a:fillRef>
-          <a:effectRef idx="2">
-            <a:schemeClr val="accent1"/>
-          </a:effectRef>
-          <a:fontRef idx="minor">
-            <a:schemeClr val="tx1"/>
-          </a:fontRef>
-        </p:style>
-      </p:cxnSp>
     </p:spTree>
+    <p:extLst>
+      <p:ext uri="{BB962C8B-B14F-4D97-AF65-F5344CB8AC3E}">
+        <p14:creationId xmlns:p14="http://schemas.microsoft.com/office/powerpoint/2010/main" val="3672742053"/>
+      </p:ext>
+    </p:extLst>
   </p:cSld>
   <p:clrMapOvr>
     <a:masterClrMapping/>
@@ -2294,8 +4135,8 @@
           <a:lstStyle/>
           <a:p>
             <a:fld id="{48A87A34-81AB-432B-8DAE-1953F412C126}" type="datetimeFigureOut">
-              <a:rPr lang="en-US" dirty="0"/>
-              <a:t>3/26/26</a:t>
+              <a:rPr lang="en-US" smtClean="0"/>
+              <a:t>3/27/2026</a:t>
             </a:fld>
             <a:endParaRPr lang="en-US" dirty="0"/>
           </a:p>
@@ -2336,7 +4177,7 @@
           <a:lstStyle/>
           <a:p>
             <a:fld id="{6D22F896-40B5-4ADD-8801-0D06FADFA095}" type="slidenum">
-              <a:rPr lang="en-US" dirty="0"/>
+              <a:rPr lang="en-US" smtClean="0"/>
               <a:t>‹#›</a:t>
             </a:fld>
             <a:endParaRPr lang="en-US" dirty="0"/>
@@ -2344,6 +4185,11 @@
         </p:txBody>
       </p:sp>
     </p:spTree>
+    <p:extLst>
+      <p:ext uri="{BB962C8B-B14F-4D97-AF65-F5344CB8AC3E}">
+        <p14:creationId xmlns:p14="http://schemas.microsoft.com/office/powerpoint/2010/main" val="1479172935"/>
+      </p:ext>
+    </p:extLst>
   </p:cSld>
   <p:clrMapOvr>
     <a:masterClrMapping/>
@@ -2380,8 +4226,8 @@
         </p:nvSpPr>
         <p:spPr>
           <a:xfrm>
-            <a:off x="1444671" y="798973"/>
-            <a:ext cx="3273099" cy="2247117"/>
+            <a:off x="7085012" y="685800"/>
+            <a:ext cx="3657600" cy="1371600"/>
           </a:xfrm>
         </p:spPr>
         <p:txBody>
@@ -2390,7 +4236,7 @@
           </a:bodyPr>
           <a:lstStyle>
             <a:lvl1pPr algn="l">
-              <a:defRPr sz="2400"/>
+              <a:defRPr sz="2400" b="0"/>
             </a:lvl1pPr>
           </a:lstStyle>
           <a:p>
@@ -2414,12 +4260,14 @@
         </p:nvSpPr>
         <p:spPr>
           <a:xfrm>
-            <a:off x="5043714" y="798974"/>
-            <a:ext cx="6012470" cy="4658826"/>
+            <a:off x="684212" y="685800"/>
+            <a:ext cx="5943601" cy="5308600"/>
           </a:xfrm>
         </p:spPr>
         <p:txBody>
-          <a:bodyPr anchor="ctr"/>
+          <a:bodyPr anchor="ctr">
+            <a:normAutofit/>
+          </a:bodyPr>
           <a:lstStyle/>
           <a:p>
             <a:pPr lvl="0"/>
@@ -2503,48 +4351,50 @@
         </p:nvSpPr>
         <p:spPr>
           <a:xfrm>
-            <a:off x="1444671" y="3205491"/>
-            <a:ext cx="3275013" cy="2248181"/>
+            <a:off x="7085012" y="2209799"/>
+            <a:ext cx="3657600" cy="2091267"/>
           </a:xfrm>
         </p:spPr>
         <p:txBody>
-          <a:bodyPr/>
+          <a:bodyPr anchor="t">
+            <a:normAutofit/>
+          </a:bodyPr>
           <a:lstStyle>
-            <a:lvl1pPr marL="0" indent="0" algn="l">
+            <a:lvl1pPr marL="0" indent="0">
               <a:buNone/>
               <a:defRPr sz="1600"/>
             </a:lvl1pPr>
             <a:lvl2pPr marL="457200" indent="0">
               <a:buNone/>
-              <a:defRPr sz="1400"/>
+              <a:defRPr sz="1200"/>
             </a:lvl2pPr>
             <a:lvl3pPr marL="914400" indent="0">
               <a:buNone/>
-              <a:defRPr sz="1200"/>
+              <a:defRPr sz="1000"/>
             </a:lvl3pPr>
             <a:lvl4pPr marL="1371600" indent="0">
               <a:buNone/>
-              <a:defRPr sz="1000"/>
+              <a:defRPr sz="900"/>
             </a:lvl4pPr>
             <a:lvl5pPr marL="1828800" indent="0">
               <a:buNone/>
-              <a:defRPr sz="1000"/>
+              <a:defRPr sz="900"/>
             </a:lvl5pPr>
             <a:lvl6pPr marL="2286000" indent="0">
               <a:buNone/>
-              <a:defRPr sz="1000"/>
+              <a:defRPr sz="900"/>
             </a:lvl6pPr>
             <a:lvl7pPr marL="2743200" indent="0">
               <a:buNone/>
-              <a:defRPr sz="1000"/>
+              <a:defRPr sz="900"/>
             </a:lvl7pPr>
             <a:lvl8pPr marL="3200400" indent="0">
               <a:buNone/>
-              <a:defRPr sz="1000"/>
+              <a:defRPr sz="900"/>
             </a:lvl8pPr>
             <a:lvl9pPr marL="3657600" indent="0">
               <a:buNone/>
-              <a:defRPr sz="1000"/>
+              <a:defRPr sz="900"/>
             </a:lvl9pPr>
           </a:lstStyle>
           <a:p>
@@ -2572,8 +4422,8 @@
           <a:lstStyle/>
           <a:p>
             <a:fld id="{48A87A34-81AB-432B-8DAE-1953F412C126}" type="datetimeFigureOut">
-              <a:rPr lang="en-US" dirty="0"/>
-              <a:t>3/26/26</a:t>
+              <a:rPr lang="en-US" smtClean="0"/>
+              <a:t>3/27/2026</a:t>
             </a:fld>
             <a:endParaRPr lang="en-US" dirty="0"/>
           </a:p>
@@ -2614,45 +4464,19 @@
           <a:lstStyle/>
           <a:p>
             <a:fld id="{6D22F896-40B5-4ADD-8801-0D06FADFA095}" type="slidenum">
-              <a:rPr lang="en-US" dirty="0"/>
+              <a:rPr lang="en-US" smtClean="0"/>
               <a:t>‹#›</a:t>
             </a:fld>
             <a:endParaRPr lang="en-US" dirty="0"/>
           </a:p>
         </p:txBody>
       </p:sp>
-      <p:cxnSp>
-        <p:nvCxnSpPr>
-          <p:cNvPr id="17" name="Straight Connector 16"/>
-          <p:cNvCxnSpPr/>
-          <p:nvPr/>
-        </p:nvCxnSpPr>
-        <p:spPr>
-          <a:xfrm>
-            <a:off x="1448280" y="3205491"/>
-            <a:ext cx="3269490" cy="0"/>
-          </a:xfrm>
-          <a:prstGeom prst="line">
-            <a:avLst/>
-          </a:prstGeom>
-          <a:ln w="31750"/>
-        </p:spPr>
-        <p:style>
-          <a:lnRef idx="3">
-            <a:schemeClr val="accent1"/>
-          </a:lnRef>
-          <a:fillRef idx="0">
-            <a:schemeClr val="accent1"/>
-          </a:fillRef>
-          <a:effectRef idx="2">
-            <a:schemeClr val="accent1"/>
-          </a:effectRef>
-          <a:fontRef idx="minor">
-            <a:schemeClr val="tx1"/>
-          </a:fontRef>
-        </p:style>
-      </p:cxnSp>
     </p:spTree>
+    <p:extLst>
+      <p:ext uri="{BB962C8B-B14F-4D97-AF65-F5344CB8AC3E}">
+        <p14:creationId xmlns:p14="http://schemas.microsoft.com/office/powerpoint/2010/main" val="1573381979"/>
+      </p:ext>
+    </p:extLst>
   </p:cSld>
   <p:clrMapOvr>
     <a:masterClrMapping/>
@@ -2677,140 +4501,6 @@
           <a:chExt cx="0" cy="0"/>
         </a:xfrm>
       </p:grpSpPr>
-      <p:grpSp>
-        <p:nvGrpSpPr>
-          <p:cNvPr id="8" name="Group 7"/>
-          <p:cNvGrpSpPr/>
-          <p:nvPr/>
-        </p:nvGrpSpPr>
-        <p:grpSpPr>
-          <a:xfrm>
-            <a:off x="7477387" y="482170"/>
-            <a:ext cx="4074533" cy="5149101"/>
-            <a:chOff x="7477387" y="482170"/>
-            <a:chExt cx="4074533" cy="5149101"/>
-          </a:xfrm>
-        </p:grpSpPr>
-        <p:sp>
-          <p:nvSpPr>
-            <p:cNvPr id="18" name="Rectangle 17"/>
-            <p:cNvSpPr/>
-            <p:nvPr/>
-          </p:nvSpPr>
-          <p:spPr bwMode="black">
-            <a:xfrm>
-              <a:off x="7477387" y="482170"/>
-              <a:ext cx="4074533" cy="5149101"/>
-            </a:xfrm>
-            <a:prstGeom prst="rect">
-              <a:avLst/>
-            </a:prstGeom>
-            <a:gradFill>
-              <a:gsLst>
-                <a:gs pos="0">
-                  <a:srgbClr val="000001"/>
-                </a:gs>
-                <a:gs pos="100000">
-                  <a:srgbClr val="191919"/>
-                </a:gs>
-              </a:gsLst>
-            </a:gradFill>
-            <a:ln w="76200" cmpd="sng">
-              <a:noFill/>
-              <a:miter lim="800000"/>
-            </a:ln>
-            <a:effectLst>
-              <a:outerShdw blurRad="127000" dist="228600" dir="4740000" sx="98000" sy="98000" algn="tl" rotWithShape="0">
-                <a:srgbClr val="000000">
-                  <a:alpha val="34000"/>
-                </a:srgbClr>
-              </a:outerShdw>
-            </a:effectLst>
-            <a:scene3d>
-              <a:camera prst="orthographicFront"/>
-              <a:lightRig rig="threePt" dir="t"/>
-            </a:scene3d>
-            <a:sp3d>
-              <a:bevelT w="152400" h="50800" prst="softRound"/>
-            </a:sp3d>
-          </p:spPr>
-          <p:style>
-            <a:lnRef idx="1">
-              <a:schemeClr val="accent1"/>
-            </a:lnRef>
-            <a:fillRef idx="3">
-              <a:schemeClr val="accent1"/>
-            </a:fillRef>
-            <a:effectRef idx="2">
-              <a:schemeClr val="accent1"/>
-            </a:effectRef>
-            <a:fontRef idx="minor">
-              <a:schemeClr val="lt1"/>
-            </a:fontRef>
-          </p:style>
-        </p:sp>
-        <p:sp>
-          <p:nvSpPr>
-            <p:cNvPr id="19" name="Rectangle 18"/>
-            <p:cNvSpPr/>
-            <p:nvPr/>
-          </p:nvSpPr>
-          <p:spPr bwMode="blackWhite">
-            <a:xfrm>
-              <a:off x="7790446" y="812506"/>
-              <a:ext cx="3450289" cy="4466452"/>
-            </a:xfrm>
-            <a:prstGeom prst="rect">
-              <a:avLst/>
-            </a:prstGeom>
-            <a:gradFill>
-              <a:gsLst>
-                <a:gs pos="0">
-                  <a:srgbClr val="DADADA"/>
-                </a:gs>
-                <a:gs pos="100000">
-                  <a:srgbClr val="FFFFFE"/>
-                </a:gs>
-              </a:gsLst>
-              <a:lin ang="16200000" scaled="0"/>
-            </a:gradFill>
-            <a:ln w="50800" cmpd="sng">
-              <a:solidFill>
-                <a:srgbClr val="191919"/>
-              </a:solidFill>
-              <a:miter lim="800000"/>
-            </a:ln>
-            <a:effectLst>
-              <a:innerShdw blurRad="63500" dist="88900" dir="14100000">
-                <a:srgbClr val="000000">
-                  <a:alpha val="30000"/>
-                </a:srgbClr>
-              </a:innerShdw>
-            </a:effectLst>
-            <a:scene3d>
-              <a:camera prst="orthographicFront"/>
-              <a:lightRig rig="threePt" dir="t"/>
-            </a:scene3d>
-            <a:sp3d>
-              <a:bevelT prst="relaxedInset"/>
-            </a:sp3d>
-          </p:spPr>
-          <p:style>
-            <a:lnRef idx="1">
-              <a:schemeClr val="accent1"/>
-            </a:lnRef>
-            <a:fillRef idx="3">
-              <a:schemeClr val="accent1"/>
-            </a:fillRef>
-            <a:effectRef idx="2">
-              <a:schemeClr val="accent1"/>
-            </a:effectRef>
-            <a:fontRef idx="minor">
-              <a:schemeClr val="lt1"/>
-            </a:fontRef>
-          </p:style>
-        </p:sp>
-      </p:grpSp>
       <p:sp>
         <p:nvSpPr>
           <p:cNvPr id="2" name="Title 1"/>
@@ -2823,8 +4513,8 @@
         </p:nvSpPr>
         <p:spPr>
           <a:xfrm>
-            <a:off x="1451206" y="1129513"/>
-            <a:ext cx="5532328" cy="1830584"/>
+            <a:off x="4722812" y="1447800"/>
+            <a:ext cx="6019800" cy="1143000"/>
           </a:xfrm>
         </p:spPr>
         <p:txBody>
@@ -2832,8 +4522,8 @@
             <a:normAutofit/>
           </a:bodyPr>
           <a:lstStyle>
-            <a:lvl1pPr>
-              <a:defRPr sz="3200"/>
+            <a:lvl1pPr algn="l">
+              <a:defRPr sz="2800" b="0"/>
             </a:lvl1pPr>
           </a:lstStyle>
           <a:p>
@@ -2847,7 +4537,7 @@
       </p:sp>
       <p:sp>
         <p:nvSpPr>
-          <p:cNvPr id="3" name="Picture Placeholder 2"/>
+          <p:cNvPr id="14" name="Picture Placeholder 2"/>
           <p:cNvSpPr>
             <a:spLocks noGrp="1" noChangeAspect="1"/>
           </p:cNvSpPr>
@@ -2857,125 +4547,137 @@
         </p:nvSpPr>
         <p:spPr>
           <a:xfrm>
-            <a:off x="8124389" y="1122542"/>
-            <a:ext cx="2791171" cy="3866327"/>
+            <a:off x="989012" y="914400"/>
+            <a:ext cx="3280974" cy="4572000"/>
           </a:xfrm>
-          <a:solidFill>
-            <a:schemeClr val="bg1">
-              <a:lumMod val="85000"/>
-            </a:schemeClr>
-          </a:solidFill>
-          <a:ln w="9525" cap="sq">
-            <a:noFill/>
-            <a:miter lim="800000"/>
+          <a:prstGeom prst="snip2DiagRect">
+            <a:avLst>
+              <a:gd name="adj1" fmla="val 10815"/>
+              <a:gd name="adj2" fmla="val 0"/>
+            </a:avLst>
+          </a:prstGeom>
+          <a:ln w="15875">
+            <a:solidFill>
+              <a:schemeClr val="tx1">
+                <a:alpha val="40000"/>
+              </a:schemeClr>
+            </a:solidFill>
           </a:ln>
-          <a:effectLst/>
+          <a:effectLst>
+            <a:innerShdw blurRad="57150" dist="38100" dir="14460000">
+              <a:srgbClr val="000000">
+                <a:alpha val="70000"/>
+              </a:srgbClr>
+            </a:innerShdw>
+          </a:effectLst>
         </p:spPr>
         <p:txBody>
-          <a:bodyPr anchor="t"/>
-          <a:lstStyle>
-            <a:lvl1pPr marL="0" indent="0" algn="ctr">
-              <a:buNone/>
-              <a:defRPr sz="3200"/>
-            </a:lvl1pPr>
-            <a:lvl2pPr marL="457200" indent="0">
-              <a:buNone/>
-              <a:defRPr sz="2800"/>
-            </a:lvl2pPr>
-            <a:lvl3pPr marL="914400" indent="0">
-              <a:buNone/>
-              <a:defRPr sz="2400"/>
-            </a:lvl3pPr>
-            <a:lvl4pPr marL="1371600" indent="0">
-              <a:buNone/>
-              <a:defRPr sz="2000"/>
-            </a:lvl4pPr>
-            <a:lvl5pPr marL="1828800" indent="0">
-              <a:buNone/>
-              <a:defRPr sz="2000"/>
-            </a:lvl5pPr>
-            <a:lvl6pPr marL="2286000" indent="0">
-              <a:buNone/>
-              <a:defRPr sz="2000"/>
-            </a:lvl6pPr>
-            <a:lvl7pPr marL="2743200" indent="0">
-              <a:buNone/>
-              <a:defRPr sz="2000"/>
-            </a:lvl7pPr>
-            <a:lvl8pPr marL="3200400" indent="0">
-              <a:buNone/>
-              <a:defRPr sz="2000"/>
-            </a:lvl8pPr>
-            <a:lvl9pPr marL="3657600" indent="0">
-              <a:buNone/>
-              <a:defRPr sz="2000"/>
-            </a:lvl9pPr>
-          </a:lstStyle>
-          <a:p>
-            <a:r>
-              <a:rPr lang="ja-JP" altLang="en-US"/>
-              <a:t>アイコンをクリックして図を追加</a:t>
-            </a:r>
-            <a:endParaRPr lang="en-US" dirty="0"/>
-          </a:p>
-        </p:txBody>
-      </p:sp>
-      <p:sp>
-        <p:nvSpPr>
-          <p:cNvPr id="4" name="Text Placeholder 3"/>
-          <p:cNvSpPr>
-            <a:spLocks noGrp="1"/>
-          </p:cNvSpPr>
-          <p:nvPr>
-            <p:ph type="body" sz="half" idx="2"/>
-          </p:nvPr>
-        </p:nvSpPr>
-        <p:spPr>
-          <a:xfrm>
-            <a:off x="1450329" y="3145992"/>
-            <a:ext cx="5524404" cy="2003742"/>
-          </a:xfrm>
-        </p:spPr>
-        <p:txBody>
-          <a:bodyPr>
+          <a:bodyPr anchor="t">
             <a:normAutofit/>
           </a:bodyPr>
           <a:lstStyle>
-            <a:lvl1pPr marL="0" indent="0" algn="l">
+            <a:lvl1pPr marL="0" indent="0" algn="ctr">
+              <a:buNone/>
+              <a:defRPr sz="1600"/>
+            </a:lvl1pPr>
+            <a:lvl2pPr marL="457200" indent="0">
+              <a:buNone/>
+              <a:defRPr sz="1600"/>
+            </a:lvl2pPr>
+            <a:lvl3pPr marL="914400" indent="0">
+              <a:buNone/>
+              <a:defRPr sz="1600"/>
+            </a:lvl3pPr>
+            <a:lvl4pPr marL="1371600" indent="0">
+              <a:buNone/>
+              <a:defRPr sz="1600"/>
+            </a:lvl4pPr>
+            <a:lvl5pPr marL="1828800" indent="0">
+              <a:buNone/>
+              <a:defRPr sz="1600"/>
+            </a:lvl5pPr>
+            <a:lvl6pPr marL="2286000" indent="0">
+              <a:buNone/>
+              <a:defRPr sz="1600"/>
+            </a:lvl6pPr>
+            <a:lvl7pPr marL="2743200" indent="0">
+              <a:buNone/>
+              <a:defRPr sz="1600"/>
+            </a:lvl7pPr>
+            <a:lvl8pPr marL="3200400" indent="0">
+              <a:buNone/>
+              <a:defRPr sz="1600"/>
+            </a:lvl8pPr>
+            <a:lvl9pPr marL="3657600" indent="0">
+              <a:buNone/>
+              <a:defRPr sz="1600"/>
+            </a:lvl9pPr>
+          </a:lstStyle>
+          <a:p>
+            <a:r>
+              <a:rPr lang="ja-JP" altLang="en-US"/>
+              <a:t>アイコンをクリックして図を追加</a:t>
+            </a:r>
+            <a:endParaRPr lang="en-US" dirty="0"/>
+          </a:p>
+        </p:txBody>
+      </p:sp>
+      <p:sp>
+        <p:nvSpPr>
+          <p:cNvPr id="4" name="Text Placeholder 3"/>
+          <p:cNvSpPr>
+            <a:spLocks noGrp="1"/>
+          </p:cNvSpPr>
+          <p:nvPr>
+            <p:ph type="body" sz="half" idx="2"/>
+          </p:nvPr>
+        </p:nvSpPr>
+        <p:spPr>
+          <a:xfrm>
+            <a:off x="4722812" y="2777066"/>
+            <a:ext cx="6021388" cy="2048933"/>
+          </a:xfrm>
+        </p:spPr>
+        <p:txBody>
+          <a:bodyPr anchor="t">
+            <a:normAutofit/>
+          </a:bodyPr>
+          <a:lstStyle>
+            <a:lvl1pPr marL="0" indent="0">
               <a:buNone/>
               <a:defRPr sz="1800"/>
             </a:lvl1pPr>
             <a:lvl2pPr marL="457200" indent="0">
               <a:buNone/>
-              <a:defRPr sz="1400"/>
+              <a:defRPr sz="1200"/>
             </a:lvl2pPr>
             <a:lvl3pPr marL="914400" indent="0">
               <a:buNone/>
-              <a:defRPr sz="1200"/>
+              <a:defRPr sz="1000"/>
             </a:lvl3pPr>
             <a:lvl4pPr marL="1371600" indent="0">
               <a:buNone/>
-              <a:defRPr sz="1000"/>
+              <a:defRPr sz="900"/>
             </a:lvl4pPr>
             <a:lvl5pPr marL="1828800" indent="0">
               <a:buNone/>
-              <a:defRPr sz="1000"/>
+              <a:defRPr sz="900"/>
             </a:lvl5pPr>
             <a:lvl6pPr marL="2286000" indent="0">
               <a:buNone/>
-              <a:defRPr sz="1000"/>
+              <a:defRPr sz="900"/>
             </a:lvl6pPr>
             <a:lvl7pPr marL="2743200" indent="0">
               <a:buNone/>
-              <a:defRPr sz="1000"/>
+              <a:defRPr sz="900"/>
             </a:lvl7pPr>
             <a:lvl8pPr marL="3200400" indent="0">
               <a:buNone/>
-              <a:defRPr sz="1000"/>
+              <a:defRPr sz="900"/>
             </a:lvl8pPr>
             <a:lvl9pPr marL="3657600" indent="0">
               <a:buNone/>
-              <a:defRPr sz="1000"/>
+              <a:defRPr sz="900"/>
             </a:lvl9pPr>
           </a:lstStyle>
           <a:p>
@@ -2997,24 +4699,15 @@
             <p:ph type="dt" sz="half" idx="10"/>
           </p:nvPr>
         </p:nvSpPr>
-        <p:spPr>
-          <a:xfrm>
-            <a:off x="1447382" y="5469856"/>
-            <a:ext cx="5527351" cy="320123"/>
-          </a:xfrm>
-        </p:spPr>
+        <p:spPr/>
         <p:txBody>
           <a:bodyPr/>
-          <a:lstStyle>
-            <a:lvl1pPr algn="l">
-              <a:defRPr/>
-            </a:lvl1pPr>
-          </a:lstStyle>
+          <a:lstStyle/>
           <a:p>
             <a:fld id="{48A87A34-81AB-432B-8DAE-1953F412C126}" type="datetimeFigureOut">
-              <a:rPr lang="en-US" dirty="0"/>
+              <a:rPr lang="en-US" smtClean="0"/>
               <a:pPr/>
-              <a:t>3/26/26</a:t>
+              <a:t>3/27/2026</a:t>
             </a:fld>
             <a:endParaRPr lang="en-US" dirty="0"/>
           </a:p>
@@ -3030,12 +4723,7 @@
             <p:ph type="ftr" sz="quarter" idx="11"/>
           </p:nvPr>
         </p:nvSpPr>
-        <p:spPr>
-          <a:xfrm>
-            <a:off x="1447382" y="318640"/>
-            <a:ext cx="5541004" cy="320931"/>
-          </a:xfrm>
-        </p:spPr>
+        <p:spPr/>
         <p:txBody>
           <a:bodyPr/>
           <a:lstStyle/>
@@ -3060,45 +4748,19 @@
           <a:lstStyle/>
           <a:p>
             <a:fld id="{6D22F896-40B5-4ADD-8801-0D06FADFA095}" type="slidenum">
-              <a:rPr lang="en-US" dirty="0"/>
+              <a:rPr lang="en-US" smtClean="0"/>
               <a:t>‹#›</a:t>
             </a:fld>
             <a:endParaRPr lang="en-US" dirty="0"/>
           </a:p>
         </p:txBody>
       </p:sp>
-      <p:cxnSp>
-        <p:nvCxnSpPr>
-          <p:cNvPr id="31" name="Straight Connector 30"/>
-          <p:cNvCxnSpPr/>
-          <p:nvPr/>
-        </p:nvCxnSpPr>
-        <p:spPr>
-          <a:xfrm>
-            <a:off x="1447382" y="3143605"/>
-            <a:ext cx="5527351" cy="0"/>
-          </a:xfrm>
-          <a:prstGeom prst="line">
-            <a:avLst/>
-          </a:prstGeom>
-          <a:ln w="31750"/>
-        </p:spPr>
-        <p:style>
-          <a:lnRef idx="3">
-            <a:schemeClr val="accent1"/>
-          </a:lnRef>
-          <a:fillRef idx="0">
-            <a:schemeClr val="accent1"/>
-          </a:fillRef>
-          <a:effectRef idx="2">
-            <a:schemeClr val="accent1"/>
-          </a:effectRef>
-          <a:fontRef idx="minor">
-            <a:schemeClr val="tx1"/>
-          </a:fontRef>
-        </p:style>
-      </p:cxnSp>
     </p:spTree>
+    <p:extLst>
+      <p:ext uri="{BB962C8B-B14F-4D97-AF65-F5344CB8AC3E}">
+        <p14:creationId xmlns:p14="http://schemas.microsoft.com/office/powerpoint/2010/main" val="2297743277"/>
+      </p:ext>
+    </p:extLst>
   </p:cSld>
   <p:clrMapOvr>
     <a:masterClrMapping/>
@@ -3110,7 +4772,7 @@
 <p:sldMaster xmlns:a="http://schemas.openxmlformats.org/drawingml/2006/main" xmlns:r="http://schemas.openxmlformats.org/officeDocument/2006/relationships" xmlns:p="http://schemas.openxmlformats.org/presentationml/2006/main">
   <p:cSld>
     <p:bg>
-      <p:bgRef idx="1003">
+      <p:bgRef idx="1002">
         <a:schemeClr val="bg2"/>
       </p:bgRef>
     </p:bg>
@@ -3128,323 +4790,444 @@
           <a:chExt cx="0" cy="0"/>
         </a:xfrm>
       </p:grpSpPr>
-      <p:sp>
-        <p:nvSpPr>
-          <p:cNvPr id="8" name="Rectangle 7"/>
-          <p:cNvSpPr/>
+      <p:grpSp>
+        <p:nvGrpSpPr>
+          <p:cNvPr id="7" name="Group 6"/>
+          <p:cNvGrpSpPr/>
           <p:nvPr/>
+        </p:nvGrpSpPr>
+        <p:grpSpPr>
+          <a:xfrm>
+            <a:off x="9206969" y="2963333"/>
+            <a:ext cx="2981858" cy="3208867"/>
+            <a:chOff x="9206969" y="2963333"/>
+            <a:chExt cx="2981858" cy="3208867"/>
+          </a:xfrm>
+        </p:grpSpPr>
+        <p:cxnSp>
+          <p:nvCxnSpPr>
+            <p:cNvPr id="8" name="Straight Connector 7"/>
+            <p:cNvCxnSpPr/>
+            <p:nvPr/>
+          </p:nvCxnSpPr>
+          <p:spPr>
+            <a:xfrm flipH="1">
+              <a:off x="11276012" y="2963333"/>
+              <a:ext cx="912814" cy="912812"/>
+            </a:xfrm>
+            <a:prstGeom prst="line">
+              <a:avLst/>
+            </a:prstGeom>
+            <a:ln w="9525">
+              <a:solidFill>
+                <a:schemeClr val="tx1"/>
+              </a:solidFill>
+            </a:ln>
+          </p:spPr>
+          <p:style>
+            <a:lnRef idx="2">
+              <a:schemeClr val="accent1"/>
+            </a:lnRef>
+            <a:fillRef idx="0">
+              <a:schemeClr val="accent1"/>
+            </a:fillRef>
+            <a:effectRef idx="1">
+              <a:schemeClr val="accent1"/>
+            </a:effectRef>
+            <a:fontRef idx="minor">
+              <a:schemeClr val="tx1"/>
+            </a:fontRef>
+          </p:style>
+        </p:cxnSp>
+        <p:cxnSp>
+          <p:nvCxnSpPr>
+            <p:cNvPr id="9" name="Straight Connector 8"/>
+            <p:cNvCxnSpPr/>
+            <p:nvPr/>
+          </p:nvCxnSpPr>
+          <p:spPr>
+            <a:xfrm flipH="1">
+              <a:off x="9206969" y="3190344"/>
+              <a:ext cx="2981857" cy="2981856"/>
+            </a:xfrm>
+            <a:prstGeom prst="line">
+              <a:avLst/>
+            </a:prstGeom>
+            <a:ln w="9525">
+              <a:solidFill>
+                <a:schemeClr val="tx1"/>
+              </a:solidFill>
+            </a:ln>
+          </p:spPr>
+          <p:style>
+            <a:lnRef idx="2">
+              <a:schemeClr val="accent1"/>
+            </a:lnRef>
+            <a:fillRef idx="0">
+              <a:schemeClr val="accent1"/>
+            </a:fillRef>
+            <a:effectRef idx="1">
+              <a:schemeClr val="accent1"/>
+            </a:effectRef>
+            <a:fontRef idx="minor">
+              <a:schemeClr val="tx1"/>
+            </a:fontRef>
+          </p:style>
+        </p:cxnSp>
+        <p:cxnSp>
+          <p:nvCxnSpPr>
+            <p:cNvPr id="10" name="Straight Connector 9"/>
+            <p:cNvCxnSpPr/>
+            <p:nvPr/>
+          </p:nvCxnSpPr>
+          <p:spPr>
+            <a:xfrm flipH="1">
+              <a:off x="10292292" y="3285067"/>
+              <a:ext cx="1896534" cy="1896533"/>
+            </a:xfrm>
+            <a:prstGeom prst="line">
+              <a:avLst/>
+            </a:prstGeom>
+            <a:ln w="9525">
+              <a:solidFill>
+                <a:schemeClr val="tx1"/>
+              </a:solidFill>
+            </a:ln>
+          </p:spPr>
+          <p:style>
+            <a:lnRef idx="2">
+              <a:schemeClr val="accent1"/>
+            </a:lnRef>
+            <a:fillRef idx="0">
+              <a:schemeClr val="accent1"/>
+            </a:fillRef>
+            <a:effectRef idx="1">
+              <a:schemeClr val="accent1"/>
+            </a:effectRef>
+            <a:fontRef idx="minor">
+              <a:schemeClr val="tx1"/>
+            </a:fontRef>
+          </p:style>
+        </p:cxnSp>
+        <p:cxnSp>
+          <p:nvCxnSpPr>
+            <p:cNvPr id="11" name="Straight Connector 10"/>
+            <p:cNvCxnSpPr/>
+            <p:nvPr/>
+          </p:nvCxnSpPr>
+          <p:spPr>
+            <a:xfrm flipH="1">
+              <a:off x="10443103" y="3131080"/>
+              <a:ext cx="1745722" cy="1745720"/>
+            </a:xfrm>
+            <a:prstGeom prst="line">
+              <a:avLst/>
+            </a:prstGeom>
+            <a:ln w="28575">
+              <a:solidFill>
+                <a:schemeClr val="tx1"/>
+              </a:solidFill>
+            </a:ln>
+          </p:spPr>
+          <p:style>
+            <a:lnRef idx="2">
+              <a:schemeClr val="accent1"/>
+            </a:lnRef>
+            <a:fillRef idx="0">
+              <a:schemeClr val="accent1"/>
+            </a:fillRef>
+            <a:effectRef idx="1">
+              <a:schemeClr val="accent1"/>
+            </a:effectRef>
+            <a:fontRef idx="minor">
+              <a:schemeClr val="tx1"/>
+            </a:fontRef>
+          </p:style>
+        </p:cxnSp>
+        <p:cxnSp>
+          <p:nvCxnSpPr>
+            <p:cNvPr id="12" name="Straight Connector 11"/>
+            <p:cNvCxnSpPr/>
+            <p:nvPr/>
+          </p:nvCxnSpPr>
+          <p:spPr>
+            <a:xfrm flipH="1">
+              <a:off x="10918826" y="3683001"/>
+              <a:ext cx="1270001" cy="1269999"/>
+            </a:xfrm>
+            <a:prstGeom prst="line">
+              <a:avLst/>
+            </a:prstGeom>
+            <a:ln w="28575">
+              <a:solidFill>
+                <a:schemeClr val="tx1"/>
+              </a:solidFill>
+            </a:ln>
+          </p:spPr>
+          <p:style>
+            <a:lnRef idx="2">
+              <a:schemeClr val="accent1"/>
+            </a:lnRef>
+            <a:fillRef idx="0">
+              <a:schemeClr val="accent1"/>
+            </a:fillRef>
+            <a:effectRef idx="1">
+              <a:schemeClr val="accent1"/>
+            </a:effectRef>
+            <a:fontRef idx="minor">
+              <a:schemeClr val="tx1"/>
+            </a:fontRef>
+          </p:style>
+        </p:cxnSp>
+      </p:grpSp>
+      <p:sp>
+        <p:nvSpPr>
+          <p:cNvPr id="2" name="Title Placeholder 1"/>
+          <p:cNvSpPr>
+            <a:spLocks noGrp="1"/>
+          </p:cNvSpPr>
+          <p:nvPr>
+            <p:ph type="title"/>
+          </p:nvPr>
         </p:nvSpPr>
         <p:spPr>
           <a:xfrm>
-            <a:off x="0" y="2019476"/>
-            <a:ext cx="12192000" cy="4105941"/>
+            <a:off x="684212" y="4487332"/>
+            <a:ext cx="8534400" cy="1507067"/>
           </a:xfrm>
           <a:prstGeom prst="rect">
             <a:avLst/>
           </a:prstGeom>
-          <a:gradFill flip="none" rotWithShape="1">
-            <a:gsLst>
-              <a:gs pos="0">
-                <a:schemeClr val="bg2">
-                  <a:alpha val="0"/>
-                </a:schemeClr>
-              </a:gs>
-              <a:gs pos="100000">
-                <a:schemeClr val="bg2"/>
-              </a:gs>
-            </a:gsLst>
-            <a:lin ang="5400000" scaled="0"/>
-            <a:tileRect/>
-          </a:gradFill>
-          <a:ln>
-            <a:noFill/>
-          </a:ln>
+          <a:effectLst/>
         </p:spPr>
-        <p:style>
-          <a:lnRef idx="2">
-            <a:schemeClr val="accent1">
-              <a:shade val="50000"/>
-            </a:schemeClr>
-          </a:lnRef>
-          <a:fillRef idx="1">
-            <a:schemeClr val="accent1"/>
-          </a:fillRef>
-          <a:effectRef idx="0">
-            <a:schemeClr val="accent1"/>
-          </a:effectRef>
-          <a:fontRef idx="minor">
-            <a:schemeClr val="lt1"/>
-          </a:fontRef>
-        </p:style>
-      </p:sp>
-      <p:pic>
-        <p:nvPicPr>
-          <p:cNvPr id="7" name="Picture 6"/>
-          <p:cNvPicPr>
-            <a:picLocks noChangeAspect="1"/>
-          </p:cNvPicPr>
-          <p:nvPr/>
-        </p:nvPicPr>
-        <p:blipFill rotWithShape="1">
-          <a:blip r:embed="rId13">
-            <a:extLst>
-              <a:ext uri="{28A0092B-C50C-407E-A947-70E740481C1C}">
-                <a14:useLocalDpi xmlns:a14="http://schemas.microsoft.com/office/drawing/2010/main" val="0"/>
-              </a:ext>
-            </a:extLst>
-          </a:blip>
-          <a:srcRect t="1538" b="-1538"/>
-          <a:stretch/>
-        </p:blipFill>
-        <p:spPr bwMode="black">
+        <p:txBody>
+          <a:bodyPr vert="horz" lIns="91440" tIns="45720" rIns="91440" bIns="45720" rtlCol="0" anchor="ctr">
+            <a:normAutofit/>
+          </a:bodyPr>
+          <a:lstStyle/>
+          <a:p>
+            <a:r>
+              <a:rPr lang="ja-JP" altLang="en-US"/>
+              <a:t>マスター タイトルの書式設定</a:t>
+            </a:r>
+            <a:endParaRPr lang="en-US" dirty="0"/>
+          </a:p>
+        </p:txBody>
+      </p:sp>
+      <p:sp>
+        <p:nvSpPr>
+          <p:cNvPr id="3" name="Text Placeholder 2"/>
+          <p:cNvSpPr>
+            <a:spLocks noGrp="1"/>
+          </p:cNvSpPr>
+          <p:nvPr>
+            <p:ph type="body" idx="1"/>
+          </p:nvPr>
+        </p:nvSpPr>
+        <p:spPr>
           <a:xfrm>
-            <a:off x="0" y="6126480"/>
-            <a:ext cx="12192000" cy="742950"/>
+            <a:off x="684212" y="685800"/>
+            <a:ext cx="8534400" cy="3615267"/>
           </a:xfrm>
           <a:prstGeom prst="rect">
             <a:avLst/>
           </a:prstGeom>
         </p:spPr>
-      </p:pic>
-      <p:sp>
-        <p:nvSpPr>
-          <p:cNvPr id="2" name="Title Placeholder 1"/>
-          <p:cNvSpPr>
-            <a:spLocks noGrp="1"/>
-          </p:cNvSpPr>
-          <p:nvPr>
-            <p:ph type="title"/>
+        <p:txBody>
+          <a:bodyPr vert="horz" lIns="91440" tIns="45720" rIns="91440" bIns="45720" rtlCol="0" anchor="ctr">
+            <a:normAutofit/>
+          </a:bodyPr>
+          <a:lstStyle/>
+          <a:p>
+            <a:pPr lvl="0"/>
+            <a:r>
+              <a:rPr lang="ja-JP" altLang="en-US"/>
+              <a:t>マスター テキストの書式設定</a:t>
+            </a:r>
+          </a:p>
+          <a:p>
+            <a:pPr lvl="1"/>
+            <a:r>
+              <a:rPr lang="ja-JP" altLang="en-US"/>
+              <a:t>第 </a:t>
+            </a:r>
+            <a:r>
+              <a:rPr lang="en-US" altLang="ja-JP"/>
+              <a:t>2 </a:t>
+            </a:r>
+            <a:r>
+              <a:rPr lang="ja-JP" altLang="en-US"/>
+              <a:t>レベル</a:t>
+            </a:r>
+          </a:p>
+          <a:p>
+            <a:pPr lvl="2"/>
+            <a:r>
+              <a:rPr lang="ja-JP" altLang="en-US"/>
+              <a:t>第 </a:t>
+            </a:r>
+            <a:r>
+              <a:rPr lang="en-US" altLang="ja-JP"/>
+              <a:t>3 </a:t>
+            </a:r>
+            <a:r>
+              <a:rPr lang="ja-JP" altLang="en-US"/>
+              <a:t>レベル</a:t>
+            </a:r>
+          </a:p>
+          <a:p>
+            <a:pPr lvl="3"/>
+            <a:r>
+              <a:rPr lang="ja-JP" altLang="en-US"/>
+              <a:t>第 </a:t>
+            </a:r>
+            <a:r>
+              <a:rPr lang="en-US" altLang="ja-JP"/>
+              <a:t>4 </a:t>
+            </a:r>
+            <a:r>
+              <a:rPr lang="ja-JP" altLang="en-US"/>
+              <a:t>レベル</a:t>
+            </a:r>
+          </a:p>
+          <a:p>
+            <a:pPr lvl="4"/>
+            <a:r>
+              <a:rPr lang="ja-JP" altLang="en-US"/>
+              <a:t>第 </a:t>
+            </a:r>
+            <a:r>
+              <a:rPr lang="en-US" altLang="ja-JP"/>
+              <a:t>5 </a:t>
+            </a:r>
+            <a:r>
+              <a:rPr lang="ja-JP" altLang="en-US"/>
+              <a:t>レベル</a:t>
+            </a:r>
+            <a:endParaRPr lang="en-US" dirty="0"/>
+          </a:p>
+        </p:txBody>
+      </p:sp>
+      <p:sp>
+        <p:nvSpPr>
+          <p:cNvPr id="4" name="Date Placeholder 3"/>
+          <p:cNvSpPr>
+            <a:spLocks noGrp="1"/>
+          </p:cNvSpPr>
+          <p:nvPr>
+            <p:ph type="dt" sz="half" idx="2"/>
           </p:nvPr>
         </p:nvSpPr>
         <p:spPr>
           <a:xfrm>
-            <a:off x="1451579" y="804519"/>
-            <a:ext cx="9603275" cy="1049235"/>
+            <a:off x="9904412" y="6172200"/>
+            <a:ext cx="1600200" cy="365125"/>
           </a:xfrm>
           <a:prstGeom prst="rect">
             <a:avLst/>
           </a:prstGeom>
         </p:spPr>
         <p:txBody>
-          <a:bodyPr vert="horz" lIns="91440" tIns="45720" rIns="91440" bIns="45720" rtlCol="0" anchor="t">
-            <a:normAutofit/>
-          </a:bodyPr>
-          <a:lstStyle/>
-          <a:p>
-            <a:r>
-              <a:rPr lang="ja-JP" altLang="en-US"/>
-              <a:t>マスター タイトルの書式設定</a:t>
-            </a:r>
-            <a:endParaRPr lang="en-US" dirty="0"/>
-          </a:p>
-        </p:txBody>
-      </p:sp>
-      <p:sp>
-        <p:nvSpPr>
-          <p:cNvPr id="3" name="Text Placeholder 2"/>
-          <p:cNvSpPr>
-            <a:spLocks noGrp="1"/>
-          </p:cNvSpPr>
-          <p:nvPr>
-            <p:ph type="body" idx="1"/>
+          <a:bodyPr vert="horz" lIns="91440" tIns="45720" rIns="91440" bIns="45720" rtlCol="0" anchor="t"/>
+          <a:lstStyle>
+            <a:lvl1pPr algn="r">
+              <a:defRPr sz="1000" b="0" i="0">
+                <a:solidFill>
+                  <a:schemeClr val="bg2">
+                    <a:lumMod val="50000"/>
+                  </a:schemeClr>
+                </a:solidFill>
+                <a:effectLst/>
+                <a:latin typeface="+mn-lt"/>
+              </a:defRPr>
+            </a:lvl1pPr>
+          </a:lstStyle>
+          <a:p>
+            <a:fld id="{48A87A34-81AB-432B-8DAE-1953F412C126}" type="datetimeFigureOut">
+              <a:rPr lang="en-US" smtClean="0"/>
+              <a:pPr/>
+              <a:t>3/27/2026</a:t>
+            </a:fld>
+            <a:endParaRPr lang="en-US" dirty="0"/>
+          </a:p>
+        </p:txBody>
+      </p:sp>
+      <p:sp>
+        <p:nvSpPr>
+          <p:cNvPr id="5" name="Footer Placeholder 4"/>
+          <p:cNvSpPr>
+            <a:spLocks noGrp="1"/>
+          </p:cNvSpPr>
+          <p:nvPr>
+            <p:ph type="ftr" sz="quarter" idx="3"/>
           </p:nvPr>
         </p:nvSpPr>
         <p:spPr>
           <a:xfrm>
-            <a:off x="1451579" y="2015732"/>
-            <a:ext cx="9603275" cy="3450613"/>
+            <a:off x="684212" y="6172200"/>
+            <a:ext cx="7543800" cy="365125"/>
           </a:xfrm>
           <a:prstGeom prst="rect">
             <a:avLst/>
           </a:prstGeom>
         </p:spPr>
         <p:txBody>
-          <a:bodyPr vert="horz" lIns="91440" tIns="45720" rIns="91440" bIns="45720" rtlCol="0">
-            <a:normAutofit/>
-          </a:bodyPr>
-          <a:lstStyle/>
-          <a:p>
-            <a:pPr lvl="0"/>
-            <a:r>
-              <a:rPr lang="ja-JP" altLang="en-US"/>
-              <a:t>マスター テキストの書式設定</a:t>
-            </a:r>
-          </a:p>
-          <a:p>
-            <a:pPr lvl="1"/>
-            <a:r>
-              <a:rPr lang="ja-JP" altLang="en-US"/>
-              <a:t>第 </a:t>
-            </a:r>
-            <a:r>
-              <a:rPr lang="en-US" altLang="ja-JP"/>
-              <a:t>2 </a:t>
-            </a:r>
-            <a:r>
-              <a:rPr lang="ja-JP" altLang="en-US"/>
-              <a:t>レベル</a:t>
-            </a:r>
-          </a:p>
-          <a:p>
-            <a:pPr lvl="2"/>
-            <a:r>
-              <a:rPr lang="ja-JP" altLang="en-US"/>
-              <a:t>第 </a:t>
-            </a:r>
-            <a:r>
-              <a:rPr lang="en-US" altLang="ja-JP"/>
-              <a:t>3 </a:t>
-            </a:r>
-            <a:r>
-              <a:rPr lang="ja-JP" altLang="en-US"/>
-              <a:t>レベル</a:t>
-            </a:r>
-          </a:p>
-          <a:p>
-            <a:pPr lvl="3"/>
-            <a:r>
-              <a:rPr lang="ja-JP" altLang="en-US"/>
-              <a:t>第 </a:t>
-            </a:r>
-            <a:r>
-              <a:rPr lang="en-US" altLang="ja-JP"/>
-              <a:t>4 </a:t>
-            </a:r>
-            <a:r>
-              <a:rPr lang="ja-JP" altLang="en-US"/>
-              <a:t>レベル</a:t>
-            </a:r>
-          </a:p>
-          <a:p>
-            <a:pPr lvl="4"/>
-            <a:r>
-              <a:rPr lang="ja-JP" altLang="en-US"/>
-              <a:t>第 </a:t>
-            </a:r>
-            <a:r>
-              <a:rPr lang="en-US" altLang="ja-JP"/>
-              <a:t>5 </a:t>
-            </a:r>
-            <a:r>
-              <a:rPr lang="ja-JP" altLang="en-US"/>
-              <a:t>レベル</a:t>
-            </a:r>
-            <a:endParaRPr lang="en-US" dirty="0"/>
-          </a:p>
-        </p:txBody>
-      </p:sp>
-      <p:sp>
-        <p:nvSpPr>
-          <p:cNvPr id="4" name="Date Placeholder 3"/>
-          <p:cNvSpPr>
-            <a:spLocks noGrp="1"/>
-          </p:cNvSpPr>
-          <p:nvPr>
-            <p:ph type="dt" sz="half" idx="2"/>
+          <a:bodyPr vert="horz" lIns="91440" tIns="45720" rIns="91440" bIns="45720" rtlCol="0" anchor="t"/>
+          <a:lstStyle>
+            <a:lvl1pPr algn="l">
+              <a:defRPr sz="1000" b="0" i="0">
+                <a:solidFill>
+                  <a:schemeClr val="bg2">
+                    <a:lumMod val="50000"/>
+                  </a:schemeClr>
+                </a:solidFill>
+                <a:effectLst/>
+                <a:latin typeface="+mn-lt"/>
+              </a:defRPr>
+            </a:lvl1pPr>
+          </a:lstStyle>
+          <a:p>
+            <a:endParaRPr lang="en-US" dirty="0"/>
+          </a:p>
+        </p:txBody>
+      </p:sp>
+      <p:sp>
+        <p:nvSpPr>
+          <p:cNvPr id="6" name="Slide Number Placeholder 5"/>
+          <p:cNvSpPr>
+            <a:spLocks noGrp="1"/>
+          </p:cNvSpPr>
+          <p:nvPr>
+            <p:ph type="sldNum" sz="quarter" idx="4"/>
           </p:nvPr>
         </p:nvSpPr>
         <p:spPr>
           <a:xfrm>
-            <a:off x="7554138" y="330370"/>
-            <a:ext cx="3500715" cy="309201"/>
+            <a:off x="10363200" y="5578475"/>
+            <a:ext cx="1142245" cy="669925"/>
           </a:xfrm>
           <a:prstGeom prst="rect">
             <a:avLst/>
           </a:prstGeom>
         </p:spPr>
         <p:txBody>
-          <a:bodyPr vert="horz" lIns="91440" tIns="45720" rIns="91440" bIns="45720" rtlCol="0" anchor="ctr"/>
+          <a:bodyPr vert="horz" lIns="91440" tIns="45720" rIns="91440" bIns="45720" rtlCol="0" anchor="b"/>
           <a:lstStyle>
             <a:lvl1pPr algn="r">
-              <a:defRPr sz="1000">
-                <a:solidFill>
-                  <a:schemeClr val="tx1">
-                    <a:tint val="75000"/>
-                  </a:schemeClr>
-                </a:solidFill>
+              <a:defRPr sz="3200" b="0" i="0">
+                <a:solidFill>
+                  <a:schemeClr val="bg2">
+                    <a:lumMod val="50000"/>
+                  </a:schemeClr>
+                </a:solidFill>
+                <a:effectLst/>
+                <a:latin typeface="+mn-lt"/>
               </a:defRPr>
             </a:lvl1pPr>
           </a:lstStyle>
           <a:p>
-            <a:fld id="{48A87A34-81AB-432B-8DAE-1953F412C126}" type="datetimeFigureOut">
-              <a:rPr lang="en-US" dirty="0"/>
-              <a:pPr/>
-              <a:t>3/26/26</a:t>
-            </a:fld>
-            <a:endParaRPr lang="en-US" dirty="0"/>
-          </a:p>
-        </p:txBody>
-      </p:sp>
-      <p:sp>
-        <p:nvSpPr>
-          <p:cNvPr id="5" name="Footer Placeholder 4"/>
-          <p:cNvSpPr>
-            <a:spLocks noGrp="1"/>
-          </p:cNvSpPr>
-          <p:nvPr>
-            <p:ph type="ftr" sz="quarter" idx="3"/>
-          </p:nvPr>
-        </p:nvSpPr>
-        <p:spPr>
-          <a:xfrm>
-            <a:off x="1451579" y="329307"/>
-            <a:ext cx="5938836" cy="309201"/>
-          </a:xfrm>
-          <a:prstGeom prst="rect">
-            <a:avLst/>
-          </a:prstGeom>
-        </p:spPr>
-        <p:txBody>
-          <a:bodyPr vert="horz" lIns="91440" tIns="45720" rIns="91440" bIns="45720" rtlCol="0" anchor="ctr"/>
-          <a:lstStyle>
-            <a:lvl1pPr algn="l">
-              <a:defRPr sz="1000">
-                <a:solidFill>
-                  <a:schemeClr val="tx1">
-                    <a:tint val="75000"/>
-                  </a:schemeClr>
-                </a:solidFill>
-              </a:defRPr>
-            </a:lvl1pPr>
-          </a:lstStyle>
-          <a:p>
-            <a:endParaRPr lang="en-US" dirty="0"/>
-          </a:p>
-        </p:txBody>
-      </p:sp>
-      <p:sp>
-        <p:nvSpPr>
-          <p:cNvPr id="6" name="Slide Number Placeholder 5"/>
-          <p:cNvSpPr>
-            <a:spLocks noGrp="1"/>
-          </p:cNvSpPr>
-          <p:nvPr>
-            <p:ph type="sldNum" sz="quarter" idx="4"/>
-          </p:nvPr>
-        </p:nvSpPr>
-        <p:spPr>
-          <a:xfrm>
-            <a:off x="480060" y="798973"/>
-            <a:ext cx="811019" cy="503578"/>
-          </a:xfrm>
-          <a:prstGeom prst="rect">
-            <a:avLst/>
-          </a:prstGeom>
-        </p:spPr>
-        <p:txBody>
-          <a:bodyPr vert="horz" lIns="91440" tIns="45720" rIns="91440" bIns="45720" rtlCol="0" anchor="t"/>
-          <a:lstStyle>
-            <a:lvl1pPr algn="r">
-              <a:defRPr sz="2800">
-                <a:solidFill>
-                  <a:schemeClr val="accent1"/>
-                </a:solidFill>
-              </a:defRPr>
-            </a:lvl1pPr>
-          </a:lstStyle>
-          <a:p>
             <a:fld id="{6D22F896-40B5-4ADD-8801-0D06FADFA095}" type="slidenum">
-              <a:rPr lang="en-US" dirty="0"/>
+              <a:rPr lang="en-US" smtClean="0"/>
               <a:pPr/>
               <a:t>‹#›</a:t>
             </a:fld>
@@ -3452,70 +5235,44 @@
           </a:p>
         </p:txBody>
       </p:sp>
-      <p:cxnSp>
-        <p:nvCxnSpPr>
-          <p:cNvPr id="10" name="Straight Connector 9"/>
-          <p:cNvCxnSpPr/>
-          <p:nvPr/>
-        </p:nvCxnSpPr>
-        <p:spPr>
-          <a:xfrm>
-            <a:off x="0" y="6128413"/>
-            <a:ext cx="12192000" cy="0"/>
-          </a:xfrm>
-          <a:prstGeom prst="line">
-            <a:avLst/>
-          </a:prstGeom>
-          <a:ln w="12700">
-            <a:solidFill>
-              <a:srgbClr val="000001">
-                <a:alpha val="20000"/>
-              </a:srgbClr>
-            </a:solidFill>
-          </a:ln>
-        </p:spPr>
-        <p:style>
-          <a:lnRef idx="1">
-            <a:schemeClr val="accent1"/>
-          </a:lnRef>
-          <a:fillRef idx="0">
-            <a:schemeClr val="accent1"/>
-          </a:fillRef>
-          <a:effectRef idx="0">
-            <a:schemeClr val="accent1"/>
-          </a:effectRef>
-          <a:fontRef idx="minor">
-            <a:schemeClr val="tx1"/>
-          </a:fontRef>
-        </p:style>
-      </p:cxnSp>
     </p:spTree>
+    <p:extLst>
+      <p:ext uri="{BB962C8B-B14F-4D97-AF65-F5344CB8AC3E}">
+        <p14:creationId xmlns:p14="http://schemas.microsoft.com/office/powerpoint/2010/main" val="1558600970"/>
+      </p:ext>
+    </p:extLst>
   </p:cSld>
-  <p:clrMap bg1="lt1" tx1="dk1" bg2="lt2" tx2="dk2" accent1="accent1" accent2="accent2" accent3="accent3" accent4="accent4" accent5="accent5" accent6="accent6" hlink="hlink" folHlink="folHlink"/>
+  <p:clrMap bg1="dk1" tx1="lt1" bg2="dk2" tx2="lt2" accent1="accent1" accent2="accent2" accent3="accent3" accent4="accent4" accent5="accent5" accent6="accent6" hlink="hlink" folHlink="folHlink"/>
   <p:sldLayoutIdLst>
-    <p:sldLayoutId id="2147483649" r:id="rId1"/>
-    <p:sldLayoutId id="2147483650" r:id="rId2"/>
-    <p:sldLayoutId id="2147483651" r:id="rId3"/>
-    <p:sldLayoutId id="2147483652" r:id="rId4"/>
-    <p:sldLayoutId id="2147483653" r:id="rId5"/>
-    <p:sldLayoutId id="2147483654" r:id="rId6"/>
-    <p:sldLayoutId id="2147483655" r:id="rId7"/>
-    <p:sldLayoutId id="2147483656" r:id="rId8"/>
-    <p:sldLayoutId id="2147483657" r:id="rId9"/>
-    <p:sldLayoutId id="2147483658" r:id="rId10"/>
-    <p:sldLayoutId id="2147483659" r:id="rId11"/>
+    <p:sldLayoutId id="2147483661" r:id="rId1"/>
+    <p:sldLayoutId id="2147483662" r:id="rId2"/>
+    <p:sldLayoutId id="2147483663" r:id="rId3"/>
+    <p:sldLayoutId id="2147483664" r:id="rId4"/>
+    <p:sldLayoutId id="2147483665" r:id="rId5"/>
+    <p:sldLayoutId id="2147483666" r:id="rId6"/>
+    <p:sldLayoutId id="2147483667" r:id="rId7"/>
+    <p:sldLayoutId id="2147483668" r:id="rId8"/>
+    <p:sldLayoutId id="2147483669" r:id="rId9"/>
+    <p:sldLayoutId id="2147483670" r:id="rId10"/>
+    <p:sldLayoutId id="2147483671" r:id="rId11"/>
+    <p:sldLayoutId id="2147483672" r:id="rId12"/>
+    <p:sldLayoutId id="2147483673" r:id="rId13"/>
+    <p:sldLayoutId id="2147483674" r:id="rId14"/>
+    <p:sldLayoutId id="2147483675" r:id="rId15"/>
+    <p:sldLayoutId id="2147483676" r:id="rId16"/>
+    <p:sldLayoutId id="2147483677" r:id="rId17"/>
   </p:sldLayoutIdLst>
   <p:txStyles>
     <p:titleStyle>
-      <a:lvl1pPr algn="l" defTabSz="914400" rtl="0" eaLnBrk="1" latinLnBrk="0" hangingPunct="1">
-        <a:lnSpc>
-          <a:spcPct val="90000"/>
-        </a:lnSpc>
+      <a:lvl1pPr algn="l" defTabSz="457200" rtl="0" eaLnBrk="1" latinLnBrk="0" hangingPunct="1">
         <a:spcBef>
           <a:spcPct val="0"/>
         </a:spcBef>
         <a:buNone/>
-        <a:defRPr kumimoji="1" sz="3200" b="0" i="0" kern="1200" cap="all">
+        <a:defRPr kumimoji="1" sz="3600" kern="1200" cap="all">
+          <a:ln w="3175" cmpd="sng">
+            <a:noFill/>
+          </a:ln>
           <a:solidFill>
             <a:schemeClr val="tx1"/>
           </a:solidFill>
@@ -3525,24 +5282,82 @@
           <a:cs typeface="+mj-cs"/>
         </a:defRPr>
       </a:lvl1pPr>
+      <a:lvl2pPr eaLnBrk="1" hangingPunct="1">
+        <a:defRPr kumimoji="1">
+          <a:solidFill>
+            <a:schemeClr val="tx2"/>
+          </a:solidFill>
+        </a:defRPr>
+      </a:lvl2pPr>
+      <a:lvl3pPr eaLnBrk="1" hangingPunct="1">
+        <a:defRPr kumimoji="1">
+          <a:solidFill>
+            <a:schemeClr val="tx2"/>
+          </a:solidFill>
+        </a:defRPr>
+      </a:lvl3pPr>
+      <a:lvl4pPr eaLnBrk="1" hangingPunct="1">
+        <a:defRPr kumimoji="1">
+          <a:solidFill>
+            <a:schemeClr val="tx2"/>
+          </a:solidFill>
+        </a:defRPr>
+      </a:lvl4pPr>
+      <a:lvl5pPr eaLnBrk="1" hangingPunct="1">
+        <a:defRPr kumimoji="1">
+          <a:solidFill>
+            <a:schemeClr val="tx2"/>
+          </a:solidFill>
+        </a:defRPr>
+      </a:lvl5pPr>
+      <a:lvl6pPr eaLnBrk="1" hangingPunct="1">
+        <a:defRPr kumimoji="1">
+          <a:solidFill>
+            <a:schemeClr val="tx2"/>
+          </a:solidFill>
+        </a:defRPr>
+      </a:lvl6pPr>
+      <a:lvl7pPr eaLnBrk="1" hangingPunct="1">
+        <a:defRPr kumimoji="1">
+          <a:solidFill>
+            <a:schemeClr val="tx2"/>
+          </a:solidFill>
+        </a:defRPr>
+      </a:lvl7pPr>
+      <a:lvl8pPr eaLnBrk="1" hangingPunct="1">
+        <a:defRPr kumimoji="1">
+          <a:solidFill>
+            <a:schemeClr val="tx2"/>
+          </a:solidFill>
+        </a:defRPr>
+      </a:lvl8pPr>
+      <a:lvl9pPr eaLnBrk="1" hangingPunct="1">
+        <a:defRPr kumimoji="1">
+          <a:solidFill>
+            <a:schemeClr val="tx2"/>
+          </a:solidFill>
+        </a:defRPr>
+      </a:lvl9pPr>
     </p:titleStyle>
     <p:bodyStyle>
-      <a:lvl1pPr marL="228600" indent="-228600" algn="l" defTabSz="914400" rtl="0" eaLnBrk="1" latinLnBrk="0" hangingPunct="1">
-        <a:lnSpc>
-          <a:spcPct val="120000"/>
-        </a:lnSpc>
+      <a:lvl1pPr marL="285750" indent="-285750" algn="l" defTabSz="457200" rtl="0" eaLnBrk="1" latinLnBrk="0" hangingPunct="1">
         <a:spcBef>
-          <a:spcPts val="1000"/>
+          <a:spcPct val="20000"/>
         </a:spcBef>
+        <a:spcAft>
+          <a:spcPts val="600"/>
+        </a:spcAft>
         <a:buClr>
-          <a:schemeClr val="accent1"/>
+          <a:schemeClr val="tx1"/>
         </a:buClr>
-        <a:buSzPct val="100000"/>
-        <a:buFont typeface="Arial" panose="020B0604020202020204" pitchFamily="34" charset="0"/>
-        <a:buChar char="•"/>
-        <a:defRPr kumimoji="1" sz="2000" kern="1200">
+        <a:buSzPct val="80000"/>
+        <a:buFont typeface="Wingdings 3" panose="05040102010807070707" pitchFamily="18" charset="2"/>
+        <a:buChar char=""/>
+        <a:defRPr kumimoji="1" sz="2000" kern="1200" cap="none">
           <a:solidFill>
-            <a:schemeClr val="tx1"/>
+            <a:schemeClr val="bg2">
+              <a:lumMod val="75000"/>
+            </a:schemeClr>
           </a:solidFill>
           <a:effectLst/>
           <a:latin typeface="+mn-lt"/>
@@ -3550,22 +5365,24 @@
           <a:cs typeface="+mn-cs"/>
         </a:defRPr>
       </a:lvl1pPr>
-      <a:lvl2pPr marL="685800" indent="-228600" algn="l" defTabSz="914400" rtl="0" eaLnBrk="1" latinLnBrk="0" hangingPunct="1">
-        <a:lnSpc>
-          <a:spcPct val="120000"/>
-        </a:lnSpc>
+      <a:lvl2pPr marL="742950" indent="-285750" algn="l" defTabSz="457200" rtl="0" eaLnBrk="1" latinLnBrk="0" hangingPunct="1">
         <a:spcBef>
-          <a:spcPts val="500"/>
+          <a:spcPct val="20000"/>
         </a:spcBef>
+        <a:spcAft>
+          <a:spcPts val="600"/>
+        </a:spcAft>
         <a:buClr>
-          <a:schemeClr val="accent1"/>
+          <a:schemeClr val="tx1"/>
         </a:buClr>
-        <a:buSzPct val="100000"/>
-        <a:buFont typeface="Arial" panose="020B0604020202020204" pitchFamily="34" charset="0"/>
-        <a:buChar char="•"/>
-        <a:defRPr kumimoji="1" sz="1800" kern="1200" cap="none" baseline="0">
+        <a:buSzPct val="80000"/>
+        <a:buFont typeface="Wingdings 3" panose="05040102010807070707" pitchFamily="18" charset="2"/>
+        <a:buChar char=""/>
+        <a:defRPr kumimoji="1" sz="1800" kern="1200" cap="none">
           <a:solidFill>
-            <a:schemeClr val="tx1"/>
+            <a:schemeClr val="bg2">
+              <a:lumMod val="75000"/>
+            </a:schemeClr>
           </a:solidFill>
           <a:effectLst/>
           <a:latin typeface="+mn-lt"/>
@@ -3573,22 +5390,24 @@
           <a:cs typeface="+mn-cs"/>
         </a:defRPr>
       </a:lvl2pPr>
-      <a:lvl3pPr marL="1143000" indent="-228600" algn="l" defTabSz="914400" rtl="0" eaLnBrk="1" latinLnBrk="0" hangingPunct="1">
-        <a:lnSpc>
-          <a:spcPct val="120000"/>
-        </a:lnSpc>
+      <a:lvl3pPr marL="1200150" indent="-285750" algn="l" defTabSz="457200" rtl="0" eaLnBrk="1" latinLnBrk="0" hangingPunct="1">
         <a:spcBef>
-          <a:spcPts val="500"/>
+          <a:spcPct val="20000"/>
         </a:spcBef>
+        <a:spcAft>
+          <a:spcPts val="600"/>
+        </a:spcAft>
         <a:buClr>
-          <a:schemeClr val="accent1"/>
+          <a:schemeClr val="tx1"/>
         </a:buClr>
-        <a:buSzPct val="100000"/>
-        <a:buFont typeface="Arial" panose="020B0604020202020204" pitchFamily="34" charset="0"/>
-        <a:buChar char="•"/>
-        <a:defRPr kumimoji="1" sz="1600" kern="1200">
+        <a:buSzPct val="80000"/>
+        <a:buFont typeface="Wingdings 3" panose="05040102010807070707" pitchFamily="18" charset="2"/>
+        <a:buChar char=""/>
+        <a:defRPr kumimoji="1" sz="1600" kern="1200" cap="none">
           <a:solidFill>
-            <a:schemeClr val="tx1"/>
+            <a:schemeClr val="bg2">
+              <a:lumMod val="75000"/>
+            </a:schemeClr>
           </a:solidFill>
           <a:effectLst/>
           <a:latin typeface="+mn-lt"/>
@@ -3596,22 +5415,24 @@
           <a:cs typeface="+mn-cs"/>
         </a:defRPr>
       </a:lvl3pPr>
-      <a:lvl4pPr marL="1600200" indent="-228600" algn="l" defTabSz="914400" rtl="0" eaLnBrk="1" latinLnBrk="0" hangingPunct="1">
-        <a:lnSpc>
-          <a:spcPct val="120000"/>
-        </a:lnSpc>
+      <a:lvl4pPr marL="1543050" indent="-171450" algn="l" defTabSz="457200" rtl="0" eaLnBrk="1" latinLnBrk="0" hangingPunct="1">
         <a:spcBef>
-          <a:spcPts val="500"/>
+          <a:spcPct val="20000"/>
         </a:spcBef>
+        <a:spcAft>
+          <a:spcPts val="600"/>
+        </a:spcAft>
         <a:buClr>
-          <a:schemeClr val="accent1"/>
+          <a:schemeClr val="tx1"/>
         </a:buClr>
-        <a:buSzPct val="100000"/>
-        <a:buFont typeface="Arial" panose="020B0604020202020204" pitchFamily="34" charset="0"/>
-        <a:buChar char="•"/>
-        <a:defRPr kumimoji="1" sz="1400" kern="1200" cap="none" baseline="0">
+        <a:buSzPct val="80000"/>
+        <a:buFont typeface="Wingdings 3" panose="05040102010807070707" pitchFamily="18" charset="2"/>
+        <a:buChar char=""/>
+        <a:defRPr kumimoji="1" sz="1400" kern="1200" cap="none">
           <a:solidFill>
-            <a:schemeClr val="tx1"/>
+            <a:schemeClr val="bg2">
+              <a:lumMod val="75000"/>
+            </a:schemeClr>
           </a:solidFill>
           <a:effectLst/>
           <a:latin typeface="+mn-lt"/>
@@ -3619,22 +5440,24 @@
           <a:cs typeface="+mn-cs"/>
         </a:defRPr>
       </a:lvl4pPr>
-      <a:lvl5pPr marL="2057400" indent="-228600" algn="l" defTabSz="914400" rtl="0" eaLnBrk="1" latinLnBrk="0" hangingPunct="1">
-        <a:lnSpc>
-          <a:spcPct val="120000"/>
-        </a:lnSpc>
+      <a:lvl5pPr marL="2000250" indent="-171450" algn="l" defTabSz="457200" rtl="0" eaLnBrk="1" latinLnBrk="0" hangingPunct="1">
         <a:spcBef>
-          <a:spcPts val="500"/>
+          <a:spcPct val="20000"/>
         </a:spcBef>
+        <a:spcAft>
+          <a:spcPts val="600"/>
+        </a:spcAft>
         <a:buClr>
-          <a:schemeClr val="accent1"/>
+          <a:schemeClr val="tx1"/>
         </a:buClr>
-        <a:buSzPct val="100000"/>
-        <a:buFont typeface="Arial" panose="020B0604020202020204" pitchFamily="34" charset="0"/>
-        <a:buChar char="•"/>
-        <a:defRPr kumimoji="1" sz="1200" kern="1200">
+        <a:buSzPct val="80000"/>
+        <a:buFont typeface="Wingdings 3" panose="05040102010807070707" pitchFamily="18" charset="2"/>
+        <a:buChar char=""/>
+        <a:defRPr kumimoji="1" sz="1400" kern="1200" cap="none">
           <a:solidFill>
-            <a:schemeClr val="tx1"/>
+            <a:schemeClr val="bg2">
+              <a:lumMod val="75000"/>
+            </a:schemeClr>
           </a:solidFill>
           <a:effectLst/>
           <a:latin typeface="+mn-lt"/>
@@ -3642,22 +5465,24 @@
           <a:cs typeface="+mn-cs"/>
         </a:defRPr>
       </a:lvl5pPr>
-      <a:lvl6pPr marL="2514600" indent="-228600" algn="l" defTabSz="914400" rtl="0" eaLnBrk="1" latinLnBrk="0" hangingPunct="1">
-        <a:lnSpc>
-          <a:spcPct val="120000"/>
-        </a:lnSpc>
+      <a:lvl6pPr marL="2514600" indent="-228600" algn="l" defTabSz="457200" rtl="0" eaLnBrk="1" latinLnBrk="0" hangingPunct="1">
         <a:spcBef>
-          <a:spcPts val="500"/>
+          <a:spcPct val="20000"/>
         </a:spcBef>
+        <a:spcAft>
+          <a:spcPts val="600"/>
+        </a:spcAft>
         <a:buClr>
-          <a:schemeClr val="accent1"/>
+          <a:schemeClr val="tx1"/>
         </a:buClr>
-        <a:buSzPct val="100000"/>
-        <a:buFont typeface="Arial" panose="020B0604020202020204" pitchFamily="34" charset="0"/>
-        <a:buChar char="•"/>
-        <a:defRPr kumimoji="1" sz="1200" kern="1200">
+        <a:buSzPct val="80000"/>
+        <a:buFont typeface="Wingdings 3" panose="05040102010807070707" pitchFamily="18" charset="2"/>
+        <a:buChar char=""/>
+        <a:defRPr kumimoji="1" sz="1400" kern="1200" cap="none">
           <a:solidFill>
-            <a:schemeClr val="tx1"/>
+            <a:schemeClr val="bg2">
+              <a:lumMod val="75000"/>
+            </a:schemeClr>
           </a:solidFill>
           <a:effectLst/>
           <a:latin typeface="+mn-lt"/>
@@ -3665,22 +5490,24 @@
           <a:cs typeface="+mn-cs"/>
         </a:defRPr>
       </a:lvl6pPr>
-      <a:lvl7pPr marL="2971800" indent="-228600" algn="l" defTabSz="914400" rtl="0" eaLnBrk="1" latinLnBrk="0" hangingPunct="1">
-        <a:lnSpc>
-          <a:spcPct val="120000"/>
-        </a:lnSpc>
+      <a:lvl7pPr marL="2971800" indent="-228600" algn="l" defTabSz="457200" rtl="0" eaLnBrk="1" latinLnBrk="0" hangingPunct="1">
         <a:spcBef>
-          <a:spcPts val="500"/>
+          <a:spcPct val="20000"/>
         </a:spcBef>
+        <a:spcAft>
+          <a:spcPts val="600"/>
+        </a:spcAft>
         <a:buClr>
-          <a:schemeClr val="accent1"/>
+          <a:schemeClr val="tx1"/>
         </a:buClr>
-        <a:buSzPct val="100000"/>
-        <a:buFont typeface="Arial" panose="020B0604020202020204" pitchFamily="34" charset="0"/>
-        <a:buChar char="•"/>
-        <a:defRPr kumimoji="1" sz="1200" kern="1200">
+        <a:buSzPct val="80000"/>
+        <a:buFont typeface="Wingdings 3" panose="05040102010807070707" pitchFamily="18" charset="2"/>
+        <a:buChar char=""/>
+        <a:defRPr kumimoji="1" sz="1400" kern="1200" cap="none">
           <a:solidFill>
-            <a:schemeClr val="tx1"/>
+            <a:schemeClr val="bg2">
+              <a:lumMod val="75000"/>
+            </a:schemeClr>
           </a:solidFill>
           <a:effectLst/>
           <a:latin typeface="+mn-lt"/>
@@ -3688,22 +5515,24 @@
           <a:cs typeface="+mn-cs"/>
         </a:defRPr>
       </a:lvl7pPr>
-      <a:lvl8pPr marL="3429000" indent="-228600" algn="l" defTabSz="914400" rtl="0" eaLnBrk="1" latinLnBrk="0" hangingPunct="1">
-        <a:lnSpc>
-          <a:spcPct val="120000"/>
-        </a:lnSpc>
+      <a:lvl8pPr marL="3429000" indent="-228600" algn="l" defTabSz="457200" rtl="0" eaLnBrk="1" latinLnBrk="0" hangingPunct="1">
         <a:spcBef>
-          <a:spcPts val="500"/>
+          <a:spcPct val="20000"/>
         </a:spcBef>
+        <a:spcAft>
+          <a:spcPts val="600"/>
+        </a:spcAft>
         <a:buClr>
-          <a:schemeClr val="accent1"/>
+          <a:schemeClr val="tx1"/>
         </a:buClr>
-        <a:buSzPct val="100000"/>
-        <a:buFont typeface="Arial" panose="020B0604020202020204" pitchFamily="34" charset="0"/>
-        <a:buChar char="•"/>
-        <a:defRPr kumimoji="1" sz="1200" kern="1200" baseline="0">
+        <a:buSzPct val="80000"/>
+        <a:buFont typeface="Wingdings 3" panose="05040102010807070707" pitchFamily="18" charset="2"/>
+        <a:buChar char=""/>
+        <a:defRPr kumimoji="1" sz="1400" kern="1200" cap="none">
           <a:solidFill>
-            <a:schemeClr val="tx1"/>
+            <a:schemeClr val="bg2">
+              <a:lumMod val="75000"/>
+            </a:schemeClr>
           </a:solidFill>
           <a:effectLst/>
           <a:latin typeface="+mn-lt"/>
@@ -3711,22 +5540,24 @@
           <a:cs typeface="+mn-cs"/>
         </a:defRPr>
       </a:lvl8pPr>
-      <a:lvl9pPr marL="3886200" indent="-228600" algn="l" defTabSz="914400" rtl="0" eaLnBrk="1" latinLnBrk="0" hangingPunct="1">
-        <a:lnSpc>
-          <a:spcPct val="120000"/>
-        </a:lnSpc>
+      <a:lvl9pPr marL="3886200" indent="-228600" algn="l" defTabSz="457200" rtl="0" eaLnBrk="1" latinLnBrk="0" hangingPunct="1">
         <a:spcBef>
-          <a:spcPts val="500"/>
+          <a:spcPct val="20000"/>
         </a:spcBef>
+        <a:spcAft>
+          <a:spcPts val="600"/>
+        </a:spcAft>
         <a:buClr>
-          <a:schemeClr val="accent1"/>
+          <a:schemeClr val="tx1"/>
         </a:buClr>
-        <a:buSzPct val="100000"/>
-        <a:buFont typeface="Arial" panose="020B0604020202020204" pitchFamily="34" charset="0"/>
-        <a:buChar char="•"/>
-        <a:defRPr kumimoji="1" sz="1200" kern="1200" baseline="0">
+        <a:buSzPct val="80000"/>
+        <a:buFont typeface="Wingdings 3" panose="05040102010807070707" pitchFamily="18" charset="2"/>
+        <a:buChar char=""/>
+        <a:defRPr kumimoji="1" sz="1400" kern="1200" cap="none">
           <a:solidFill>
-            <a:schemeClr val="tx1"/>
+            <a:schemeClr val="bg2">
+              <a:lumMod val="75000"/>
+            </a:schemeClr>
           </a:solidFill>
           <a:effectLst/>
           <a:latin typeface="+mn-lt"/>
@@ -3739,7 +5570,7 @@
       <a:defPPr>
         <a:defRPr lang="en-US"/>
       </a:defPPr>
-      <a:lvl1pPr marL="0" algn="l" defTabSz="914400" rtl="0" eaLnBrk="1" latinLnBrk="0" hangingPunct="1">
+      <a:lvl1pPr marL="0" algn="l" defTabSz="457200" rtl="0" eaLnBrk="1" latinLnBrk="0" hangingPunct="1">
         <a:defRPr kumimoji="1" sz="1800" kern="1200">
           <a:solidFill>
             <a:schemeClr val="tx1"/>
@@ -3749,7 +5580,7 @@
           <a:cs typeface="+mn-cs"/>
         </a:defRPr>
       </a:lvl1pPr>
-      <a:lvl2pPr marL="457200" algn="l" defTabSz="914400" rtl="0" eaLnBrk="1" latinLnBrk="0" hangingPunct="1">
+      <a:lvl2pPr marL="457200" algn="l" defTabSz="457200" rtl="0" eaLnBrk="1" latinLnBrk="0" hangingPunct="1">
         <a:defRPr kumimoji="1" sz="1800" kern="1200">
           <a:solidFill>
             <a:schemeClr val="tx1"/>
@@ -3759,7 +5590,7 @@
           <a:cs typeface="+mn-cs"/>
         </a:defRPr>
       </a:lvl2pPr>
-      <a:lvl3pPr marL="914400" algn="l" defTabSz="914400" rtl="0" eaLnBrk="1" latinLnBrk="0" hangingPunct="1">
+      <a:lvl3pPr marL="914400" algn="l" defTabSz="457200" rtl="0" eaLnBrk="1" latinLnBrk="0" hangingPunct="1">
         <a:defRPr kumimoji="1" sz="1800" kern="1200">
           <a:solidFill>
             <a:schemeClr val="tx1"/>
@@ -3769,7 +5600,7 @@
           <a:cs typeface="+mn-cs"/>
         </a:defRPr>
       </a:lvl3pPr>
-      <a:lvl4pPr marL="1371600" algn="l" defTabSz="914400" rtl="0" eaLnBrk="1" latinLnBrk="0" hangingPunct="1">
+      <a:lvl4pPr marL="1371600" algn="l" defTabSz="457200" rtl="0" eaLnBrk="1" latinLnBrk="0" hangingPunct="1">
         <a:defRPr kumimoji="1" sz="1800" kern="1200">
           <a:solidFill>
             <a:schemeClr val="tx1"/>
@@ -3779,7 +5610,7 @@
           <a:cs typeface="+mn-cs"/>
         </a:defRPr>
       </a:lvl4pPr>
-      <a:lvl5pPr marL="1828800" algn="l" defTabSz="914400" rtl="0" eaLnBrk="1" latinLnBrk="0" hangingPunct="1">
+      <a:lvl5pPr marL="1828800" algn="l" defTabSz="457200" rtl="0" eaLnBrk="1" latinLnBrk="0" hangingPunct="1">
         <a:defRPr kumimoji="1" sz="1800" kern="1200">
           <a:solidFill>
             <a:schemeClr val="tx1"/>
@@ -3789,7 +5620,7 @@
           <a:cs typeface="+mn-cs"/>
         </a:defRPr>
       </a:lvl5pPr>
-      <a:lvl6pPr marL="2286000" algn="l" defTabSz="914400" rtl="0" eaLnBrk="1" latinLnBrk="0" hangingPunct="1">
+      <a:lvl6pPr marL="2286000" algn="l" defTabSz="457200" rtl="0" eaLnBrk="1" latinLnBrk="0" hangingPunct="1">
         <a:defRPr kumimoji="1" sz="1800" kern="1200">
           <a:solidFill>
             <a:schemeClr val="tx1"/>
@@ -3799,7 +5630,7 @@
           <a:cs typeface="+mn-cs"/>
         </a:defRPr>
       </a:lvl6pPr>
-      <a:lvl7pPr marL="2743200" algn="l" defTabSz="914400" rtl="0" eaLnBrk="1" latinLnBrk="0" hangingPunct="1">
+      <a:lvl7pPr marL="2743200" algn="l" defTabSz="457200" rtl="0" eaLnBrk="1" latinLnBrk="0" hangingPunct="1">
         <a:defRPr kumimoji="1" sz="1800" kern="1200">
           <a:solidFill>
             <a:schemeClr val="tx1"/>
@@ -3809,7 +5640,7 @@
           <a:cs typeface="+mn-cs"/>
         </a:defRPr>
       </a:lvl7pPr>
-      <a:lvl8pPr marL="3200400" algn="l" defTabSz="914400" rtl="0" eaLnBrk="1" latinLnBrk="0" hangingPunct="1">
+      <a:lvl8pPr marL="3200400" algn="l" defTabSz="457200" rtl="0" eaLnBrk="1" latinLnBrk="0" hangingPunct="1">
         <a:defRPr kumimoji="1" sz="1800" kern="1200">
           <a:solidFill>
             <a:schemeClr val="tx1"/>
@@ -3819,7 +5650,7 @@
           <a:cs typeface="+mn-cs"/>
         </a:defRPr>
       </a:lvl8pPr>
-      <a:lvl9pPr marL="3657600" algn="l" defTabSz="914400" rtl="0" eaLnBrk="1" latinLnBrk="0" hangingPunct="1">
+      <a:lvl9pPr marL="3657600" algn="l" defTabSz="457200" rtl="0" eaLnBrk="1" latinLnBrk="0" hangingPunct="1">
         <a:defRPr kumimoji="1" sz="1800" kern="1200">
           <a:solidFill>
             <a:schemeClr val="tx1"/>
@@ -3914,10 +5745,90 @@
 </p:sld>
 </file>
 
+<file path=ppt/slides/slide2.xml><?xml version="1.0" encoding="utf-8"?>
+<p:sld xmlns:a="http://schemas.openxmlformats.org/drawingml/2006/main" xmlns:r="http://schemas.openxmlformats.org/officeDocument/2006/relationships" xmlns:p="http://schemas.openxmlformats.org/presentationml/2006/main">
+  <p:cSld>
+    <p:spTree>
+      <p:nvGrpSpPr>
+        <p:cNvPr id="1" name=""/>
+        <p:cNvGrpSpPr/>
+        <p:nvPr/>
+      </p:nvGrpSpPr>
+      <p:grpSpPr>
+        <a:xfrm>
+          <a:off x="0" y="0"/>
+          <a:ext cx="0" cy="0"/>
+          <a:chOff x="0" y="0"/>
+          <a:chExt cx="0" cy="0"/>
+        </a:xfrm>
+      </p:grpSpPr>
+      <p:sp>
+        <p:nvSpPr>
+          <p:cNvPr id="2" name="タイトル 1">
+            <a:extLst>
+              <a:ext uri="{FF2B5EF4-FFF2-40B4-BE49-F238E27FC236}">
+                <a16:creationId xmlns:a16="http://schemas.microsoft.com/office/drawing/2014/main" id="{09813941-F963-F538-E995-4F463C713136}"/>
+              </a:ext>
+            </a:extLst>
+          </p:cNvPr>
+          <p:cNvSpPr>
+            <a:spLocks noGrp="1"/>
+          </p:cNvSpPr>
+          <p:nvPr>
+            <p:ph type="title"/>
+          </p:nvPr>
+        </p:nvSpPr>
+        <p:spPr/>
+        <p:txBody>
+          <a:bodyPr/>
+          <a:lstStyle/>
+          <a:p>
+            <a:endParaRPr kumimoji="1" lang="ja-JP" altLang="en-US"/>
+          </a:p>
+        </p:txBody>
+      </p:sp>
+      <p:sp>
+        <p:nvSpPr>
+          <p:cNvPr id="3" name="コンテンツ プレースホルダー 2">
+            <a:extLst>
+              <a:ext uri="{FF2B5EF4-FFF2-40B4-BE49-F238E27FC236}">
+                <a16:creationId xmlns:a16="http://schemas.microsoft.com/office/drawing/2014/main" id="{B7D5C76D-C29D-E7C4-AE06-38FD2E310BCE}"/>
+              </a:ext>
+            </a:extLst>
+          </p:cNvPr>
+          <p:cNvSpPr>
+            <a:spLocks noGrp="1"/>
+          </p:cNvSpPr>
+          <p:nvPr>
+            <p:ph idx="1"/>
+          </p:nvPr>
+        </p:nvSpPr>
+        <p:spPr/>
+        <p:txBody>
+          <a:bodyPr/>
+          <a:lstStyle/>
+          <a:p>
+            <a:endParaRPr kumimoji="1" lang="ja-JP" altLang="en-US"/>
+          </a:p>
+        </p:txBody>
+      </p:sp>
+    </p:spTree>
+    <p:extLst>
+      <p:ext uri="{BB962C8B-B14F-4D97-AF65-F5344CB8AC3E}">
+        <p14:creationId xmlns:p14="http://schemas.microsoft.com/office/powerpoint/2010/main" val="3238315022"/>
+      </p:ext>
+    </p:extLst>
+  </p:cSld>
+  <p:clrMapOvr>
+    <a:masterClrMapping/>
+  </p:clrMapOvr>
+</p:sld>
+</file>
+
 <file path=ppt/theme/theme1.xml><?xml version="1.0" encoding="utf-8"?>
-<a:theme xmlns:a="http://schemas.openxmlformats.org/drawingml/2006/main" name="ギャラリー">
+<a:theme xmlns:a="http://schemas.openxmlformats.org/drawingml/2006/main" name="スライス">
   <a:themeElements>
-    <a:clrScheme name="Gallery">
+    <a:clrScheme name="スライス">
       <a:dk1>
         <a:sysClr val="windowText" lastClr="000000"/>
       </a:dk1>
@@ -3925,83 +5836,48 @@
         <a:sysClr val="window" lastClr="FFFFFF"/>
       </a:lt1>
       <a:dk2>
-        <a:srgbClr val="454545"/>
+        <a:srgbClr val="146194"/>
       </a:dk2>
       <a:lt2>
-        <a:srgbClr val="DFDBD5"/>
+        <a:srgbClr val="76DBF4"/>
       </a:lt2>
       <a:accent1>
-        <a:srgbClr val="B71E42"/>
+        <a:srgbClr val="052F61"/>
       </a:accent1>
       <a:accent2>
-        <a:srgbClr val="DE478E"/>
+        <a:srgbClr val="A50E82"/>
       </a:accent2>
       <a:accent3>
-        <a:srgbClr val="BC72F0"/>
+        <a:srgbClr val="14967C"/>
       </a:accent3>
       <a:accent4>
-        <a:srgbClr val="795FAF"/>
+        <a:srgbClr val="6A9E1F"/>
       </a:accent4>
       <a:accent5>
-        <a:srgbClr val="586EA6"/>
+        <a:srgbClr val="E87D37"/>
       </a:accent5>
       <a:accent6>
-        <a:srgbClr val="6892A0"/>
+        <a:srgbClr val="C62324"/>
       </a:accent6>
       <a:hlink>
-        <a:srgbClr val="FA2B5C"/>
+        <a:srgbClr val="0D2E46"/>
       </a:hlink>
       <a:folHlink>
-        <a:srgbClr val="BC658E"/>
+        <a:srgbClr val="356A95"/>
       </a:folHlink>
     </a:clrScheme>
-    <a:fontScheme name="Gallery">
+    <a:fontScheme name="スライス">
       <a:majorFont>
-        <a:latin typeface="Gill Sans MT" panose="020B0502020104020203"/>
+        <a:latin typeface="Century Gothic" panose="020B0502020202020204"/>
         <a:ea typeface=""/>
         <a:cs typeface=""/>
-        <a:font script="Jpan" typeface="游ゴシック Light"/>
-        <a:font script="Hang" typeface="맑은 고딕"/>
-        <a:font script="Hans" typeface="等线 Light"/>
-        <a:font script="Hant" typeface="新細明體"/>
-        <a:font script="Arab" typeface="Times New Roman"/>
-        <a:font script="Hebr" typeface="Times New Roman"/>
-        <a:font script="Thai" typeface="Angsana New"/>
-        <a:font script="Ethi" typeface="Nyala"/>
-        <a:font script="Beng" typeface="Vrinda"/>
-        <a:font script="Gujr" typeface="Shruti"/>
-        <a:font script="Khmr" typeface="MoolBoran"/>
-        <a:font script="Knda" typeface="Tunga"/>
-        <a:font script="Guru" typeface="Raavi"/>
-        <a:font script="Cans" typeface="Euphemia"/>
-        <a:font script="Cher" typeface="Plantagenet Cherokee"/>
-        <a:font script="Yiii" typeface="Microsoft Yi Baiti"/>
-        <a:font script="Tibt" typeface="Microsoft Himalaya"/>
-        <a:font script="Thaa" typeface="MV Boli"/>
-        <a:font script="Deva" typeface="Mangal"/>
-        <a:font script="Telu" typeface="Gautami"/>
-        <a:font script="Taml" typeface="Latha"/>
-        <a:font script="Syrc" typeface="Estrangelo Edessa"/>
-        <a:font script="Orya" typeface="Kalinga"/>
-        <a:font script="Mlym" typeface="Kartika"/>
-        <a:font script="Laoo" typeface="DokChampa"/>
-        <a:font script="Sinh" typeface="Iskoola Pota"/>
-        <a:font script="Mong" typeface="Mongolian Baiti"/>
-        <a:font script="Viet" typeface="Times New Roman"/>
-        <a:font script="Uigh" typeface="Microsoft Uighur"/>
-        <a:font script="Geor" typeface="Sylfaen"/>
-      </a:majorFont>
-      <a:minorFont>
-        <a:latin typeface="Gill Sans MT" panose="020B0502020104020203"/>
-        <a:ea typeface=""/>
-        <a:cs typeface=""/>
-        <a:font script="Jpan" typeface="游ゴシック"/>
-        <a:font script="Hang" typeface="맑은 고딕"/>
-        <a:font script="Hans" typeface="等线"/>
-        <a:font script="Hant" typeface="新細明體"/>
-        <a:font script="Arab" typeface="Arial"/>
-        <a:font script="Hebr" typeface="Arial"/>
-        <a:font script="Thai" typeface="Cordia New"/>
+        <a:font script="Jpan" typeface="メイリオ"/>
+        <a:font script="Hang" typeface="HY중고딕"/>
+        <a:font script="Hans" typeface="幼圆"/>
+        <a:font script="Hant" typeface="微軟正黑體"/>
+        <a:font script="Arab" typeface="Tahoma"/>
+        <a:font script="Hebr" typeface="Gisha"/>
+        <a:font script="Thai" typeface="DilleniaUPC"/>
         <a:font script="Ethi" typeface="Nyala"/>
         <a:font script="Beng" typeface="Vrinda"/>
         <a:font script="Gujr" typeface="Shruti"/>
@@ -4022,12 +5898,47 @@
         <a:font script="Laoo" typeface="DokChampa"/>
         <a:font script="Sinh" typeface="Iskoola Pota"/>
         <a:font script="Mong" typeface="Mongolian Baiti"/>
-        <a:font script="Viet" typeface="Arial"/>
+        <a:font script="Viet" typeface="Tahoma"/>
+        <a:font script="Uigh" typeface="Microsoft Uighur"/>
+        <a:font script="Geor" typeface="Sylfaen"/>
+      </a:majorFont>
+      <a:minorFont>
+        <a:latin typeface="Century Gothic" panose="020B0502020202020204"/>
+        <a:ea typeface=""/>
+        <a:cs typeface=""/>
+        <a:font script="Jpan" typeface="メイリオ"/>
+        <a:font script="Hang" typeface="HY중고딕"/>
+        <a:font script="Hans" typeface="幼圆"/>
+        <a:font script="Hant" typeface="微軟正黑體"/>
+        <a:font script="Arab" typeface="Tahoma"/>
+        <a:font script="Hebr" typeface="Gisha"/>
+        <a:font script="Thai" typeface="DilleniaUPC"/>
+        <a:font script="Ethi" typeface="Nyala"/>
+        <a:font script="Beng" typeface="Vrinda"/>
+        <a:font script="Gujr" typeface="Shruti"/>
+        <a:font script="Khmr" typeface="DaunPenh"/>
+        <a:font script="Knda" typeface="Tunga"/>
+        <a:font script="Guru" typeface="Raavi"/>
+        <a:font script="Cans" typeface="Euphemia"/>
+        <a:font script="Cher" typeface="Plantagenet Cherokee"/>
+        <a:font script="Yiii" typeface="Microsoft Yi Baiti"/>
+        <a:font script="Tibt" typeface="Microsoft Himalaya"/>
+        <a:font script="Thaa" typeface="MV Boli"/>
+        <a:font script="Deva" typeface="Mangal"/>
+        <a:font script="Telu" typeface="Gautami"/>
+        <a:font script="Taml" typeface="Latha"/>
+        <a:font script="Syrc" typeface="Estrangelo Edessa"/>
+        <a:font script="Orya" typeface="Kalinga"/>
+        <a:font script="Mlym" typeface="Kartika"/>
+        <a:font script="Laoo" typeface="DokChampa"/>
+        <a:font script="Sinh" typeface="Iskoola Pota"/>
+        <a:font script="Mong" typeface="Mongolian Baiti"/>
+        <a:font script="Viet" typeface="Tahoma"/>
         <a:font script="Uigh" typeface="Microsoft Uighur"/>
         <a:font script="Geor" typeface="Sylfaen"/>
       </a:minorFont>
     </a:fontScheme>
-    <a:fmtScheme name="Gallery">
+    <a:fmtScheme name="スライス">
       <a:fillStyleLst>
         <a:solidFill>
           <a:schemeClr val="phClr"/>
@@ -4036,18 +5947,16 @@
           <a:gsLst>
             <a:gs pos="0">
               <a:schemeClr val="phClr">
-                <a:tint val="54000"/>
-                <a:alpha val="100000"/>
-                <a:satMod val="105000"/>
+                <a:tint val="62000"/>
+                <a:hueMod val="94000"/>
+                <a:satMod val="140000"/>
                 <a:lumMod val="110000"/>
               </a:schemeClr>
             </a:gs>
             <a:gs pos="100000">
               <a:schemeClr val="phClr">
-                <a:tint val="78000"/>
-                <a:alpha val="92000"/>
-                <a:satMod val="109000"/>
-                <a:lumMod val="100000"/>
+                <a:tint val="84000"/>
+                <a:satMod val="160000"/>
               </a:schemeClr>
             </a:gs>
           </a:gsLst>
@@ -4058,22 +5967,15 @@
             <a:gs pos="0">
               <a:schemeClr val="phClr">
                 <a:tint val="98000"/>
-                <a:satMod val="110000"/>
-                <a:lumMod val="104000"/>
-              </a:schemeClr>
-            </a:gs>
-            <a:gs pos="69000">
-              <a:schemeClr val="phClr">
-                <a:shade val="88000"/>
+                <a:hueMod val="94000"/>
                 <a:satMod val="130000"/>
-                <a:lumMod val="92000"/>
+                <a:lumMod val="128000"/>
               </a:schemeClr>
             </a:gs>
             <a:gs pos="100000">
               <a:schemeClr val="phClr">
-                <a:shade val="78000"/>
-                <a:satMod val="130000"/>
-                <a:lumMod val="92000"/>
+                <a:shade val="94000"/>
+                <a:lumMod val="88000"/>
               </a:schemeClr>
             </a:gs>
           </a:gsLst>
@@ -4081,19 +5983,25 @@
         </a:gradFill>
       </a:fillStyleLst>
       <a:lnStyleLst>
-        <a:ln w="9525" cap="flat" cmpd="sng" algn="ctr">
+        <a:ln w="9525" cap="rnd" cmpd="sng" algn="ctr">
           <a:solidFill>
-            <a:schemeClr val="phClr"/>
+            <a:schemeClr val="phClr">
+              <a:tint val="76000"/>
+              <a:alpha val="60000"/>
+              <a:hueMod val="94000"/>
+            </a:schemeClr>
           </a:solidFill>
           <a:prstDash val="solid"/>
         </a:ln>
-        <a:ln w="15875" cap="flat" cmpd="sng" algn="ctr">
+        <a:ln w="15875" cap="rnd" cmpd="sng" algn="ctr">
           <a:solidFill>
-            <a:schemeClr val="phClr"/>
+            <a:schemeClr val="phClr">
+              <a:hueMod val="94000"/>
+            </a:schemeClr>
           </a:solidFill>
           <a:prstDash val="solid"/>
         </a:ln>
-        <a:ln w="22225" cap="flat" cmpd="sng" algn="ctr">
+        <a:ln w="28575" cap="rnd" cmpd="sng" algn="ctr">
           <a:solidFill>
             <a:schemeClr val="phClr"/>
           </a:solidFill>
@@ -4105,13 +6013,19 @@
           <a:effectLst/>
         </a:effectStyle>
         <a:effectStyle>
-          <a:effectLst/>
+          <a:effectLst>
+            <a:innerShdw blurRad="25400" dist="12700" dir="13500000">
+              <a:srgbClr val="000000">
+                <a:alpha val="45000"/>
+              </a:srgbClr>
+            </a:innerShdw>
+          </a:effectLst>
         </a:effectStyle>
         <a:effectStyle>
           <a:effectLst>
-            <a:outerShdw blurRad="50800" dist="50800" dir="5400000" sx="96000" sy="96000" rotWithShape="0">
+            <a:outerShdw blurRad="50800" dist="38100" dir="5400000" rotWithShape="0">
               <a:srgbClr val="000000">
-                <a:alpha val="48000"/>
+                <a:alpha val="46000"/>
               </a:srgbClr>
             </a:outerShdw>
           </a:effectLst>
@@ -4119,12 +6033,10 @@
             <a:camera prst="orthographicFront">
               <a:rot lat="0" lon="0" rev="0"/>
             </a:camera>
-            <a:lightRig rig="balanced" dir="t">
-              <a:rot lat="0" lon="0" rev="1080000"/>
-            </a:lightRig>
+            <a:lightRig rig="threePt" dir="t"/>
           </a:scene3d>
-          <a:sp3d>
-            <a:bevelT w="38100" h="12700" prst="softRound"/>
+          <a:sp3d prstMaterial="plastic">
+            <a:bevelT w="25400" h="25400"/>
           </a:sp3d>
         </a:effectStyle>
       </a:effectStyleLst>
@@ -4132,26 +6044,46 @@
         <a:solidFill>
           <a:schemeClr val="phClr"/>
         </a:solidFill>
-        <a:solidFill>
-          <a:schemeClr val="phClr"/>
-        </a:solidFill>
+        <a:gradFill rotWithShape="1">
+          <a:gsLst>
+            <a:gs pos="10000">
+              <a:schemeClr val="phClr">
+                <a:tint val="97000"/>
+                <a:hueMod val="92000"/>
+                <a:satMod val="169000"/>
+                <a:lumMod val="164000"/>
+              </a:schemeClr>
+            </a:gs>
+            <a:gs pos="100000">
+              <a:schemeClr val="phClr">
+                <a:shade val="96000"/>
+                <a:satMod val="120000"/>
+                <a:lumMod val="90000"/>
+              </a:schemeClr>
+            </a:gs>
+          </a:gsLst>
+          <a:lin ang="6120000" scaled="1"/>
+        </a:gradFill>
         <a:gradFill rotWithShape="1">
           <a:gsLst>
             <a:gs pos="0">
               <a:schemeClr val="phClr">
-                <a:tint val="94000"/>
-                <a:satMod val="80000"/>
-                <a:lumMod val="106000"/>
+                <a:tint val="97000"/>
+                <a:hueMod val="92000"/>
+                <a:satMod val="169000"/>
+                <a:lumMod val="164000"/>
               </a:schemeClr>
             </a:gs>
             <a:gs pos="100000">
               <a:schemeClr val="phClr">
-                <a:shade val="80000"/>
+                <a:shade val="96000"/>
+                <a:satMod val="120000"/>
+                <a:lumMod val="90000"/>
               </a:schemeClr>
             </a:gs>
           </a:gsLst>
           <a:path path="circle">
-            <a:fillToRect l="50000" t="50000" r="50000" b="50000"/>
+            <a:fillToRect b="100000"/>
           </a:path>
         </a:gradFill>
       </a:bgFillStyleLst>
@@ -4161,7 +6093,7 @@
   <a:extraClrSchemeLst/>
   <a:extLst>
     <a:ext uri="{05A4C25C-085E-4340-85A3-A5531E510DB2}">
-      <thm15:themeFamily xmlns:thm15="http://schemas.microsoft.com/office/thememl/2012/main" name="Gallery" id="{BBFCD31E-59A1-489D-B089-A3EAD7CAE12E}" vid="{F5E91637-A7B6-4E27-B710-77DA7014EE1E}"/>
+      <thm15:themeFamily xmlns:thm15="http://schemas.microsoft.com/office/thememl/2012/main" name="Slice" id="{0507925B-6AC9-4358-8E18-C330545D08F8}" vid="{13FEC7C6-62A9-40C4-99D2-581AACACAA2F}"/>
     </a:ext>
   </a:extLst>
 </a:theme>
